--- a/snow_plow_blower.pptx
+++ b/snow_plow_blower.pptx
@@ -5,7 +5,7 @@
     <p:sldMasterId id="2147483648" r:id="rId1"/>
   </p:sldMasterIdLst>
   <p:notesMasterIdLst>
-    <p:notesMasterId r:id="rId11"/>
+    <p:notesMasterId r:id="rId12"/>
   </p:notesMasterIdLst>
   <p:sldIdLst>
     <p:sldId id="261" r:id="rId2"/>
@@ -16,7 +16,8 @@
     <p:sldId id="267" r:id="rId7"/>
     <p:sldId id="268" r:id="rId8"/>
     <p:sldId id="264" r:id="rId9"/>
-    <p:sldId id="266" r:id="rId10"/>
+    <p:sldId id="270" r:id="rId10"/>
+    <p:sldId id="266" r:id="rId11"/>
   </p:sldIdLst>
   <p:sldSz cx="12192000" cy="6858000"/>
   <p:notesSz cx="6858000" cy="9144000"/>
@@ -205,7 +206,7 @@
           <a:p>
             <a:fld id="{25BB0166-7DA8-4040-98E7-81186BCABFDE}" type="datetimeFigureOut">
               <a:rPr lang="en-US" smtClean="0"/>
-              <a:t>1/31/26</a:t>
+              <a:t>2/6/26</a:t>
             </a:fld>
             <a:endParaRPr lang="en-US"/>
           </a:p>
@@ -618,7 +619,7 @@
           <a:lstStyle/>
           <a:p>
             <a:fld id="{5F491023-0B0A-7041-9F06-D25A50EF063B}" type="datetimeFigureOut">
-              <a:t>1/31/26</a:t>
+              <a:t>2/6/26</a:t>
             </a:fld>
             <a:endParaRPr lang="en-US"/>
           </a:p>
@@ -814,7 +815,7 @@
           <a:lstStyle/>
           <a:p>
             <a:fld id="{5F491023-0B0A-7041-9F06-D25A50EF063B}" type="datetimeFigureOut">
-              <a:t>1/31/26</a:t>
+              <a:t>2/6/26</a:t>
             </a:fld>
             <a:endParaRPr lang="en-US"/>
           </a:p>
@@ -1020,7 +1021,7 @@
           <a:lstStyle/>
           <a:p>
             <a:fld id="{5F491023-0B0A-7041-9F06-D25A50EF063B}" type="datetimeFigureOut">
-              <a:t>1/31/26</a:t>
+              <a:t>2/6/26</a:t>
             </a:fld>
             <a:endParaRPr lang="en-US"/>
           </a:p>
@@ -1216,7 +1217,7 @@
           <a:lstStyle/>
           <a:p>
             <a:fld id="{5F491023-0B0A-7041-9F06-D25A50EF063B}" type="datetimeFigureOut">
-              <a:t>1/31/26</a:t>
+              <a:t>2/6/26</a:t>
             </a:fld>
             <a:endParaRPr lang="en-US"/>
           </a:p>
@@ -1489,7 +1490,7 @@
           <a:lstStyle/>
           <a:p>
             <a:fld id="{5F491023-0B0A-7041-9F06-D25A50EF063B}" type="datetimeFigureOut">
-              <a:t>1/31/26</a:t>
+              <a:t>2/6/26</a:t>
             </a:fld>
             <a:endParaRPr lang="en-US"/>
           </a:p>
@@ -1752,7 +1753,7 @@
           <a:lstStyle/>
           <a:p>
             <a:fld id="{5F491023-0B0A-7041-9F06-D25A50EF063B}" type="datetimeFigureOut">
-              <a:t>1/31/26</a:t>
+              <a:t>2/6/26</a:t>
             </a:fld>
             <a:endParaRPr lang="en-US"/>
           </a:p>
@@ -2162,7 +2163,7 @@
           <a:lstStyle/>
           <a:p>
             <a:fld id="{5F491023-0B0A-7041-9F06-D25A50EF063B}" type="datetimeFigureOut">
-              <a:t>1/31/26</a:t>
+              <a:t>2/6/26</a:t>
             </a:fld>
             <a:endParaRPr lang="en-US"/>
           </a:p>
@@ -2301,7 +2302,7 @@
           <a:lstStyle/>
           <a:p>
             <a:fld id="{5F491023-0B0A-7041-9F06-D25A50EF063B}" type="datetimeFigureOut">
-              <a:t>1/31/26</a:t>
+              <a:t>2/6/26</a:t>
             </a:fld>
             <a:endParaRPr lang="en-US"/>
           </a:p>
@@ -2412,7 +2413,7 @@
           <a:lstStyle/>
           <a:p>
             <a:fld id="{5F491023-0B0A-7041-9F06-D25A50EF063B}" type="datetimeFigureOut">
-              <a:t>1/31/26</a:t>
+              <a:t>2/6/26</a:t>
             </a:fld>
             <a:endParaRPr lang="en-US"/>
           </a:p>
@@ -2721,7 +2722,7 @@
           <a:lstStyle/>
           <a:p>
             <a:fld id="{5F491023-0B0A-7041-9F06-D25A50EF063B}" type="datetimeFigureOut">
-              <a:t>1/31/26</a:t>
+              <a:t>2/6/26</a:t>
             </a:fld>
             <a:endParaRPr lang="en-US"/>
           </a:p>
@@ -3007,7 +3008,7 @@
           <a:lstStyle/>
           <a:p>
             <a:fld id="{5F491023-0B0A-7041-9F06-D25A50EF063B}" type="datetimeFigureOut">
-              <a:t>1/31/26</a:t>
+              <a:t>2/6/26</a:t>
             </a:fld>
             <a:endParaRPr lang="en-US"/>
           </a:p>
@@ -3246,7 +3247,7 @@
           </a:lstStyle>
           <a:p>
             <a:fld id="{5F491023-0B0A-7041-9F06-D25A50EF063B}" type="datetimeFigureOut">
-              <a:t>1/31/26</a:t>
+              <a:t>2/6/26</a:t>
             </a:fld>
             <a:endParaRPr lang="en-US"/>
           </a:p>
@@ -4199,6 +4200,551 @@
 </p:sld>
 </file>
 
+<file path=ppt/slides/slide10.xml><?xml version="1.0" encoding="utf-8"?>
+<p:sld xmlns:a="http://schemas.openxmlformats.org/drawingml/2006/main" xmlns:r="http://schemas.openxmlformats.org/officeDocument/2006/relationships" xmlns:p="http://schemas.openxmlformats.org/presentationml/2006/main">
+  <p:cSld>
+    <p:spTree>
+      <p:nvGrpSpPr>
+        <p:cNvPr id="1" name="">
+          <a:extLst>
+            <a:ext uri="{FF2B5EF4-FFF2-40B4-BE49-F238E27FC236}">
+              <a16:creationId xmlns:a16="http://schemas.microsoft.com/office/drawing/2014/main" id="{84AC1C7A-0E76-ABB4-D69F-724A22AA8CB3}"/>
+            </a:ext>
+          </a:extLst>
+        </p:cNvPr>
+        <p:cNvGrpSpPr/>
+        <p:nvPr/>
+      </p:nvGrpSpPr>
+      <p:grpSpPr>
+        <a:xfrm>
+          <a:off x="0" y="0"/>
+          <a:ext cx="0" cy="0"/>
+          <a:chOff x="0" y="0"/>
+          <a:chExt cx="0" cy="0"/>
+        </a:xfrm>
+      </p:grpSpPr>
+      <p:sp>
+        <p:nvSpPr>
+          <p:cNvPr id="2" name="TextBox 1">
+            <a:extLst>
+              <a:ext uri="{FF2B5EF4-FFF2-40B4-BE49-F238E27FC236}">
+                <a16:creationId xmlns:a16="http://schemas.microsoft.com/office/drawing/2014/main" id="{ED823884-F214-65FC-D4DC-F6CE3A3AD4B8}"/>
+              </a:ext>
+            </a:extLst>
+          </p:cNvPr>
+          <p:cNvSpPr txBox="1"/>
+          <p:nvPr/>
+        </p:nvSpPr>
+        <p:spPr>
+          <a:xfrm>
+            <a:off x="143219" y="198303"/>
+            <a:ext cx="3514381" cy="369332"/>
+          </a:xfrm>
+          <a:prstGeom prst="rect">
+            <a:avLst/>
+          </a:prstGeom>
+          <a:noFill/>
+        </p:spPr>
+        <p:txBody>
+          <a:bodyPr wrap="square" rtlCol="0">
+            <a:spAutoFit/>
+          </a:bodyPr>
+          <a:lstStyle/>
+          <a:p>
+            <a:r>
+              <a:rPr lang="en-US" dirty="0"/>
+              <a:t>Snow Shovels</a:t>
+            </a:r>
+          </a:p>
+        </p:txBody>
+      </p:sp>
+      <p:sp>
+        <p:nvSpPr>
+          <p:cNvPr id="12" name="TextBox 11">
+            <a:extLst>
+              <a:ext uri="{FF2B5EF4-FFF2-40B4-BE49-F238E27FC236}">
+                <a16:creationId xmlns:a16="http://schemas.microsoft.com/office/drawing/2014/main" id="{81C3F313-C0E5-3C5B-B089-F60FD3402B3F}"/>
+              </a:ext>
+            </a:extLst>
+          </p:cNvPr>
+          <p:cNvSpPr txBox="1"/>
+          <p:nvPr/>
+        </p:nvSpPr>
+        <p:spPr>
+          <a:xfrm>
+            <a:off x="76557" y="1098976"/>
+            <a:ext cx="4394914" cy="600164"/>
+          </a:xfrm>
+          <a:prstGeom prst="rect">
+            <a:avLst/>
+          </a:prstGeom>
+          <a:noFill/>
+        </p:spPr>
+        <p:txBody>
+          <a:bodyPr wrap="square" rtlCol="0">
+            <a:spAutoFit/>
+          </a:bodyPr>
+          <a:lstStyle/>
+          <a:p>
+            <a:r>
+              <a:rPr lang="en-US" sz="1100" dirty="0">
+                <a:latin typeface="Calibri" panose="020F0502020204030204" pitchFamily="34" charset="0"/>
+                <a:cs typeface="Calibri" panose="020F0502020204030204" pitchFamily="34" charset="0"/>
+              </a:rPr>
+              <a:t>https://</a:t>
+            </a:r>
+            <a:r>
+              <a:rPr lang="en-US" sz="1100" dirty="0" err="1">
+                <a:latin typeface="Calibri" panose="020F0502020204030204" pitchFamily="34" charset="0"/>
+                <a:cs typeface="Calibri" panose="020F0502020204030204" pitchFamily="34" charset="0"/>
+              </a:rPr>
+              <a:t>www.youtube.com</a:t>
+            </a:r>
+            <a:r>
+              <a:rPr lang="en-US" sz="1100" dirty="0">
+                <a:latin typeface="Calibri" panose="020F0502020204030204" pitchFamily="34" charset="0"/>
+                <a:cs typeface="Calibri" panose="020F0502020204030204" pitchFamily="34" charset="0"/>
+              </a:rPr>
+              <a:t>/</a:t>
+            </a:r>
+            <a:r>
+              <a:rPr lang="en-US" sz="1100" dirty="0" err="1">
+                <a:latin typeface="Calibri" panose="020F0502020204030204" pitchFamily="34" charset="0"/>
+                <a:cs typeface="Calibri" panose="020F0502020204030204" pitchFamily="34" charset="0"/>
+              </a:rPr>
+              <a:t>watch?v</a:t>
+            </a:r>
+            <a:r>
+              <a:rPr lang="en-US" sz="1100" dirty="0">
+                <a:latin typeface="Calibri" panose="020F0502020204030204" pitchFamily="34" charset="0"/>
+                <a:cs typeface="Calibri" panose="020F0502020204030204" pitchFamily="34" charset="0"/>
+              </a:rPr>
+              <a:t>=M3OsMTyofe0  - video comparison</a:t>
+            </a:r>
+          </a:p>
+          <a:p>
+            <a:r>
+              <a:rPr lang="en-US" sz="1100" dirty="0">
+                <a:latin typeface="Calibri" panose="020F0502020204030204" pitchFamily="34" charset="0"/>
+                <a:cs typeface="Calibri" panose="020F0502020204030204" pitchFamily="34" charset="0"/>
+              </a:rPr>
+              <a:t>https://</a:t>
+            </a:r>
+            <a:r>
+              <a:rPr lang="en-US" sz="1100" dirty="0" err="1">
+                <a:latin typeface="Calibri" panose="020F0502020204030204" pitchFamily="34" charset="0"/>
+                <a:cs typeface="Calibri" panose="020F0502020204030204" pitchFamily="34" charset="0"/>
+              </a:rPr>
+              <a:t>www.amazon.com</a:t>
+            </a:r>
+            <a:r>
+              <a:rPr lang="en-US" sz="1100" dirty="0">
+                <a:latin typeface="Calibri" panose="020F0502020204030204" pitchFamily="34" charset="0"/>
+                <a:cs typeface="Calibri" panose="020F0502020204030204" pitchFamily="34" charset="0"/>
+              </a:rPr>
+              <a:t>/</a:t>
+            </a:r>
+            <a:r>
+              <a:rPr lang="en-US" sz="1100" dirty="0" err="1">
+                <a:latin typeface="Calibri" panose="020F0502020204030204" pitchFamily="34" charset="0"/>
+                <a:cs typeface="Calibri" panose="020F0502020204030204" pitchFamily="34" charset="0"/>
+              </a:rPr>
+              <a:t>dp</a:t>
+            </a:r>
+            <a:r>
+              <a:rPr lang="en-US" sz="1100" dirty="0">
+                <a:latin typeface="Calibri" panose="020F0502020204030204" pitchFamily="34" charset="0"/>
+                <a:cs typeface="Calibri" panose="020F0502020204030204" pitchFamily="34" charset="0"/>
+              </a:rPr>
+              <a:t>/B0G1YBMSVL - </a:t>
+            </a:r>
+            <a:r>
+              <a:rPr lang="en-US" sz="1100" dirty="0" err="1">
+                <a:latin typeface="Calibri" panose="020F0502020204030204" pitchFamily="34" charset="0"/>
+                <a:cs typeface="Calibri" panose="020F0502020204030204" pitchFamily="34" charset="0"/>
+              </a:rPr>
+              <a:t>Litheli</a:t>
+            </a:r>
+            <a:r>
+              <a:rPr lang="en-US" sz="1100" dirty="0">
+                <a:latin typeface="Calibri" panose="020F0502020204030204" pitchFamily="34" charset="0"/>
+                <a:cs typeface="Calibri" panose="020F0502020204030204" pitchFamily="34" charset="0"/>
+              </a:rPr>
+              <a:t> 40V (2×20V) Cordless Snow Shovel with Directional Plate &amp; Adjustable Handle, 14-Inch</a:t>
+            </a:r>
+          </a:p>
+        </p:txBody>
+      </p:sp>
+      <p:pic>
+        <p:nvPicPr>
+          <p:cNvPr id="7" name="Picture 6">
+            <a:extLst>
+              <a:ext uri="{FF2B5EF4-FFF2-40B4-BE49-F238E27FC236}">
+                <a16:creationId xmlns:a16="http://schemas.microsoft.com/office/drawing/2014/main" id="{82FD6872-F4B7-0819-5797-2F74EF9B2F60}"/>
+              </a:ext>
+            </a:extLst>
+          </p:cNvPr>
+          <p:cNvPicPr>
+            <a:picLocks noChangeAspect="1"/>
+          </p:cNvPicPr>
+          <p:nvPr/>
+        </p:nvPicPr>
+        <p:blipFill>
+          <a:blip r:embed="rId2" cstate="email">
+            <a:extLst>
+              <a:ext uri="{28A0092B-C50C-407E-A947-70E740481C1C}">
+                <a14:useLocalDpi xmlns:a14="http://schemas.microsoft.com/office/drawing/2010/main"/>
+              </a:ext>
+            </a:extLst>
+          </a:blip>
+          <a:stretch>
+            <a:fillRect/>
+          </a:stretch>
+        </p:blipFill>
+        <p:spPr>
+          <a:xfrm>
+            <a:off x="726487" y="2036757"/>
+            <a:ext cx="2347843" cy="2784485"/>
+          </a:xfrm>
+          <a:prstGeom prst="rect">
+            <a:avLst/>
+          </a:prstGeom>
+        </p:spPr>
+      </p:pic>
+      <p:sp>
+        <p:nvSpPr>
+          <p:cNvPr id="9" name="TextBox 8">
+            <a:extLst>
+              <a:ext uri="{FF2B5EF4-FFF2-40B4-BE49-F238E27FC236}">
+                <a16:creationId xmlns:a16="http://schemas.microsoft.com/office/drawing/2014/main" id="{D42B9A2F-F19F-2AB3-026E-CA6DAEF17597}"/>
+              </a:ext>
+            </a:extLst>
+          </p:cNvPr>
+          <p:cNvSpPr txBox="1"/>
+          <p:nvPr/>
+        </p:nvSpPr>
+        <p:spPr>
+          <a:xfrm>
+            <a:off x="89257" y="5759024"/>
+            <a:ext cx="5219343" cy="600164"/>
+          </a:xfrm>
+          <a:prstGeom prst="rect">
+            <a:avLst/>
+          </a:prstGeom>
+          <a:noFill/>
+        </p:spPr>
+        <p:txBody>
+          <a:bodyPr wrap="square" rtlCol="0">
+            <a:spAutoFit/>
+          </a:bodyPr>
+          <a:lstStyle/>
+          <a:p>
+            <a:r>
+              <a:rPr lang="en-US" sz="1100" dirty="0">
+                <a:latin typeface="Calibri" panose="020F0502020204030204" pitchFamily="34" charset="0"/>
+                <a:cs typeface="Calibri" panose="020F0502020204030204" pitchFamily="34" charset="0"/>
+              </a:rPr>
+              <a:t>► 3. EGO Power+ Electric Snow Shovel - https://</a:t>
+            </a:r>
+            <a:r>
+              <a:rPr lang="en-US" sz="1100" dirty="0" err="1">
+                <a:latin typeface="Calibri" panose="020F0502020204030204" pitchFamily="34" charset="0"/>
+                <a:cs typeface="Calibri" panose="020F0502020204030204" pitchFamily="34" charset="0"/>
+              </a:rPr>
+              <a:t>geni.us</a:t>
+            </a:r>
+            <a:r>
+              <a:rPr lang="en-US" sz="1100" dirty="0">
+                <a:latin typeface="Calibri" panose="020F0502020204030204" pitchFamily="34" charset="0"/>
+                <a:cs typeface="Calibri" panose="020F0502020204030204" pitchFamily="34" charset="0"/>
+              </a:rPr>
+              <a:t>/WBJ5A. -expensive</a:t>
+            </a:r>
+          </a:p>
+          <a:p>
+            <a:r>
+              <a:rPr lang="en-US" sz="1100" dirty="0">
+                <a:latin typeface="Calibri" panose="020F0502020204030204" pitchFamily="34" charset="0"/>
+                <a:cs typeface="Calibri" panose="020F0502020204030204" pitchFamily="34" charset="0"/>
+              </a:rPr>
+              <a:t>► 2. Toro 60V Power Shovel - https://</a:t>
+            </a:r>
+            <a:r>
+              <a:rPr lang="en-US" sz="1100" dirty="0" err="1">
+                <a:latin typeface="Calibri" panose="020F0502020204030204" pitchFamily="34" charset="0"/>
+                <a:cs typeface="Calibri" panose="020F0502020204030204" pitchFamily="34" charset="0"/>
+              </a:rPr>
+              <a:t>geni.us</a:t>
+            </a:r>
+            <a:r>
+              <a:rPr lang="en-US" sz="1100" dirty="0">
+                <a:latin typeface="Calibri" panose="020F0502020204030204" pitchFamily="34" charset="0"/>
+                <a:cs typeface="Calibri" panose="020F0502020204030204" pitchFamily="34" charset="0"/>
+              </a:rPr>
+              <a:t>/</a:t>
+            </a:r>
+            <a:r>
+              <a:rPr lang="en-US" sz="1100" dirty="0" err="1">
+                <a:latin typeface="Calibri" panose="020F0502020204030204" pitchFamily="34" charset="0"/>
+                <a:cs typeface="Calibri" panose="020F0502020204030204" pitchFamily="34" charset="0"/>
+              </a:rPr>
+              <a:t>IYwEh</a:t>
+            </a:r>
+            <a:r>
+              <a:rPr lang="en-US" sz="1100" dirty="0">
+                <a:latin typeface="Calibri" panose="020F0502020204030204" pitchFamily="34" charset="0"/>
+                <a:cs typeface="Calibri" panose="020F0502020204030204" pitchFamily="34" charset="0"/>
+              </a:rPr>
+              <a:t> </a:t>
+            </a:r>
+            <a:r>
+              <a:rPr lang="en-US" sz="1100">
+                <a:latin typeface="Calibri" panose="020F0502020204030204" pitchFamily="34" charset="0"/>
+                <a:cs typeface="Calibri" panose="020F0502020204030204" pitchFamily="34" charset="0"/>
+              </a:rPr>
+              <a:t>- heavy</a:t>
+            </a:r>
+            <a:endParaRPr lang="en-US" sz="1100" dirty="0">
+              <a:latin typeface="Calibri" panose="020F0502020204030204" pitchFamily="34" charset="0"/>
+              <a:cs typeface="Calibri" panose="020F0502020204030204" pitchFamily="34" charset="0"/>
+            </a:endParaRPr>
+          </a:p>
+          <a:p>
+            <a:r>
+              <a:rPr lang="en-US" sz="1100" dirty="0">
+                <a:latin typeface="Calibri" panose="020F0502020204030204" pitchFamily="34" charset="0"/>
+                <a:cs typeface="Calibri" panose="020F0502020204030204" pitchFamily="34" charset="0"/>
+              </a:rPr>
+              <a:t>► 1. Greenworks 80V 12" Cordless Snow Shovel - https://</a:t>
+            </a:r>
+            <a:r>
+              <a:rPr lang="en-US" sz="1100" dirty="0" err="1">
+                <a:latin typeface="Calibri" panose="020F0502020204030204" pitchFamily="34" charset="0"/>
+                <a:cs typeface="Calibri" panose="020F0502020204030204" pitchFamily="34" charset="0"/>
+              </a:rPr>
+              <a:t>geni.us</a:t>
+            </a:r>
+            <a:r>
+              <a:rPr lang="en-US" sz="1100" dirty="0">
+                <a:latin typeface="Calibri" panose="020F0502020204030204" pitchFamily="34" charset="0"/>
+                <a:cs typeface="Calibri" panose="020F0502020204030204" pitchFamily="34" charset="0"/>
+              </a:rPr>
+              <a:t>/</a:t>
+            </a:r>
+            <a:r>
+              <a:rPr lang="en-US" sz="1100" dirty="0" err="1">
+                <a:latin typeface="Calibri" panose="020F0502020204030204" pitchFamily="34" charset="0"/>
+                <a:cs typeface="Calibri" panose="020F0502020204030204" pitchFamily="34" charset="0"/>
+              </a:rPr>
+              <a:t>JMkppek</a:t>
+            </a:r>
+            <a:endParaRPr lang="en-US" sz="1100" dirty="0">
+              <a:latin typeface="Calibri" panose="020F0502020204030204" pitchFamily="34" charset="0"/>
+              <a:cs typeface="Calibri" panose="020F0502020204030204" pitchFamily="34" charset="0"/>
+            </a:endParaRPr>
+          </a:p>
+        </p:txBody>
+      </p:sp>
+      <p:pic>
+        <p:nvPicPr>
+          <p:cNvPr id="3" name="Picture 2">
+            <a:extLst>
+              <a:ext uri="{FF2B5EF4-FFF2-40B4-BE49-F238E27FC236}">
+                <a16:creationId xmlns:a16="http://schemas.microsoft.com/office/drawing/2014/main" id="{9E5F7792-7591-4CAF-A97A-FB77DF26D654}"/>
+              </a:ext>
+            </a:extLst>
+          </p:cNvPr>
+          <p:cNvPicPr>
+            <a:picLocks noChangeAspect="1"/>
+          </p:cNvPicPr>
+          <p:nvPr/>
+        </p:nvPicPr>
+        <p:blipFill>
+          <a:blip r:embed="rId3" cstate="email">
+            <a:extLst>
+              <a:ext uri="{28A0092B-C50C-407E-A947-70E740481C1C}">
+                <a14:useLocalDpi xmlns:a14="http://schemas.microsoft.com/office/drawing/2010/main"/>
+              </a:ext>
+            </a:extLst>
+          </a:blip>
+          <a:stretch>
+            <a:fillRect/>
+          </a:stretch>
+        </p:blipFill>
+        <p:spPr>
+          <a:xfrm>
+            <a:off x="8128000" y="2925622"/>
+            <a:ext cx="3777322" cy="3837553"/>
+          </a:xfrm>
+          <a:prstGeom prst="rect">
+            <a:avLst/>
+          </a:prstGeom>
+        </p:spPr>
+      </p:pic>
+      <p:sp>
+        <p:nvSpPr>
+          <p:cNvPr id="4" name="TextBox 3">
+            <a:extLst>
+              <a:ext uri="{FF2B5EF4-FFF2-40B4-BE49-F238E27FC236}">
+                <a16:creationId xmlns:a16="http://schemas.microsoft.com/office/drawing/2014/main" id="{39EA2680-F2F0-1D47-2F79-0153005D4A6E}"/>
+              </a:ext>
+            </a:extLst>
+          </p:cNvPr>
+          <p:cNvSpPr txBox="1"/>
+          <p:nvPr/>
+        </p:nvSpPr>
+        <p:spPr>
+          <a:xfrm>
+            <a:off x="6913390" y="2333152"/>
+            <a:ext cx="3777323" cy="1431161"/>
+          </a:xfrm>
+          <a:prstGeom prst="rect">
+            <a:avLst/>
+          </a:prstGeom>
+          <a:noFill/>
+        </p:spPr>
+        <p:txBody>
+          <a:bodyPr wrap="square" rtlCol="0">
+            <a:spAutoFit/>
+          </a:bodyPr>
+          <a:lstStyle/>
+          <a:p>
+            <a:r>
+              <a:rPr lang="en-US" sz="1600" b="1" dirty="0">
+                <a:solidFill>
+                  <a:srgbClr val="FF0000"/>
+                </a:solidFill>
+                <a:latin typeface="Calibri" panose="020F0502020204030204" pitchFamily="34" charset="0"/>
+                <a:cs typeface="Calibri" panose="020F0502020204030204" pitchFamily="34" charset="0"/>
+              </a:rPr>
+              <a:t>Greenworks </a:t>
+            </a:r>
+          </a:p>
+          <a:p>
+            <a:pPr marL="171450" indent="-171450">
+              <a:buFont typeface="Arial" panose="020B0604020202020204" pitchFamily="34" charset="0"/>
+              <a:buChar char="•"/>
+            </a:pPr>
+            <a:r>
+              <a:rPr lang="en-US" sz="1100" dirty="0">
+                <a:latin typeface="Calibri" panose="020F0502020204030204" pitchFamily="34" charset="0"/>
+                <a:cs typeface="Calibri" panose="020F0502020204030204" pitchFamily="34" charset="0"/>
+              </a:rPr>
+              <a:t>80V 12" Cordless Battery LED Snow Shovel </a:t>
+            </a:r>
+          </a:p>
+          <a:p>
+            <a:pPr marL="171450" indent="-171450">
+              <a:buFont typeface="Arial" panose="020B0604020202020204" pitchFamily="34" charset="0"/>
+              <a:buChar char="•"/>
+            </a:pPr>
+            <a:r>
+              <a:rPr lang="en-US" sz="1100" dirty="0">
+                <a:latin typeface="Calibri" panose="020F0502020204030204" pitchFamily="34" charset="0"/>
+                <a:cs typeface="Calibri" panose="020F0502020204030204" pitchFamily="34" charset="0"/>
+              </a:rPr>
+              <a:t>w/ 4.0Ah Battery &amp; 6A Charger</a:t>
+            </a:r>
+          </a:p>
+          <a:p>
+            <a:pPr marL="171450" indent="-171450">
+              <a:buFont typeface="Arial" panose="020B0604020202020204" pitchFamily="34" charset="0"/>
+              <a:buChar char="•"/>
+            </a:pPr>
+            <a:r>
+              <a:rPr lang="en-US" sz="1100" dirty="0">
+                <a:latin typeface="Calibri" panose="020F0502020204030204" pitchFamily="34" charset="0"/>
+                <a:cs typeface="Calibri" panose="020F0502020204030204" pitchFamily="34" charset="0"/>
+                <a:hlinkClick r:id="rId4"/>
+              </a:rPr>
+              <a:t>https://www.greenworkstools.com/products/80v-12-cordless-battery-snow-shovel-w-4-0ah-battery-6a-charger</a:t>
+            </a:r>
+            <a:endParaRPr lang="en-US" sz="1100" dirty="0">
+              <a:latin typeface="Calibri" panose="020F0502020204030204" pitchFamily="34" charset="0"/>
+              <a:cs typeface="Calibri" panose="020F0502020204030204" pitchFamily="34" charset="0"/>
+            </a:endParaRPr>
+          </a:p>
+          <a:p>
+            <a:pPr marL="171450" indent="-171450">
+              <a:buFont typeface="Arial" panose="020B0604020202020204" pitchFamily="34" charset="0"/>
+              <a:buChar char="•"/>
+            </a:pPr>
+            <a:r>
+              <a:rPr lang="en-US" sz="1100" dirty="0">
+                <a:latin typeface="Calibri" panose="020F0502020204030204" pitchFamily="34" charset="0"/>
+                <a:cs typeface="Calibri" panose="020F0502020204030204" pitchFamily="34" charset="0"/>
+                <a:hlinkClick r:id="rId5"/>
+              </a:rPr>
+              <a:t>https://</a:t>
+            </a:r>
+            <a:r>
+              <a:rPr lang="en-US" sz="1100" dirty="0" err="1">
+                <a:latin typeface="Calibri" panose="020F0502020204030204" pitchFamily="34" charset="0"/>
+                <a:cs typeface="Calibri" panose="020F0502020204030204" pitchFamily="34" charset="0"/>
+                <a:hlinkClick r:id="rId5"/>
+              </a:rPr>
+              <a:t>www.youtube.com</a:t>
+            </a:r>
+            <a:r>
+              <a:rPr lang="en-US" sz="1100" dirty="0">
+                <a:latin typeface="Calibri" panose="020F0502020204030204" pitchFamily="34" charset="0"/>
+                <a:cs typeface="Calibri" panose="020F0502020204030204" pitchFamily="34" charset="0"/>
+                <a:hlinkClick r:id="rId5"/>
+              </a:rPr>
+              <a:t>/</a:t>
+            </a:r>
+            <a:r>
+              <a:rPr lang="en-US" sz="1100" dirty="0" err="1">
+                <a:latin typeface="Calibri" panose="020F0502020204030204" pitchFamily="34" charset="0"/>
+                <a:cs typeface="Calibri" panose="020F0502020204030204" pitchFamily="34" charset="0"/>
+                <a:hlinkClick r:id="rId5"/>
+              </a:rPr>
+              <a:t>watch?v</a:t>
+            </a:r>
+            <a:r>
+              <a:rPr lang="en-US" sz="1100" dirty="0">
+                <a:latin typeface="Calibri" panose="020F0502020204030204" pitchFamily="34" charset="0"/>
+                <a:cs typeface="Calibri" panose="020F0502020204030204" pitchFamily="34" charset="0"/>
+                <a:hlinkClick r:id="rId5"/>
+              </a:rPr>
+              <a:t>=0obvIOD0fKY</a:t>
+            </a:r>
+            <a:endParaRPr lang="en-US" sz="1100" dirty="0">
+              <a:latin typeface="Calibri" panose="020F0502020204030204" pitchFamily="34" charset="0"/>
+              <a:cs typeface="Calibri" panose="020F0502020204030204" pitchFamily="34" charset="0"/>
+            </a:endParaRPr>
+          </a:p>
+          <a:p>
+            <a:pPr marL="285750" indent="-285750">
+              <a:buFont typeface="Arial" panose="020B0604020202020204" pitchFamily="34" charset="0"/>
+              <a:buChar char="•"/>
+            </a:pPr>
+            <a:r>
+              <a:rPr lang="en-US" sz="1600" b="1" dirty="0">
+                <a:solidFill>
+                  <a:srgbClr val="FF0000"/>
+                </a:solidFill>
+                <a:latin typeface="Calibri" panose="020F0502020204030204" pitchFamily="34" charset="0"/>
+                <a:cs typeface="Calibri" panose="020F0502020204030204" pitchFamily="34" charset="0"/>
+              </a:rPr>
+              <a:t>$252</a:t>
+            </a:r>
+          </a:p>
+        </p:txBody>
+      </p:sp>
+    </p:spTree>
+    <p:extLst>
+      <p:ext uri="{BB962C8B-B14F-4D97-AF65-F5344CB8AC3E}">
+        <p14:creationId xmlns:p14="http://schemas.microsoft.com/office/powerpoint/2010/main" val="3538257692"/>
+      </p:ext>
+    </p:extLst>
+  </p:cSld>
+  <p:clrMapOvr>
+    <a:masterClrMapping/>
+  </p:clrMapOvr>
+</p:sld>
+</file>
+
 <file path=ppt/slides/slide2.xml><?xml version="1.0" encoding="utf-8"?>
 <p:sld xmlns:a="http://schemas.openxmlformats.org/drawingml/2006/main" xmlns:r="http://schemas.openxmlformats.org/officeDocument/2006/relationships" xmlns:p="http://schemas.openxmlformats.org/presentationml/2006/main">
   <p:cSld>
@@ -5903,7 +6449,7 @@
         <p:spPr>
           <a:xfrm>
             <a:off x="143219" y="198303"/>
-            <a:ext cx="3514381" cy="1015663"/>
+            <a:ext cx="3828362" cy="1015663"/>
           </a:xfrm>
           <a:prstGeom prst="rect">
             <a:avLst/>
@@ -5924,90 +6470,11 @@
           <a:p>
             <a:r>
               <a:rPr lang="en-US" sz="2000" b="1" dirty="0"/>
-              <a:t>Our XUV590M is 56.5" wide</a:t>
+              <a:t>XUV590M width: 56.5" (144 cm)</a:t>
             </a:r>
           </a:p>
           <a:p>
             <a:endParaRPr lang="en-US" sz="2000" b="1" dirty="0"/>
-          </a:p>
-        </p:txBody>
-      </p:sp>
-      <p:sp>
-        <p:nvSpPr>
-          <p:cNvPr id="3" name="TextBox 2">
-            <a:extLst>
-              <a:ext uri="{FF2B5EF4-FFF2-40B4-BE49-F238E27FC236}">
-                <a16:creationId xmlns:a16="http://schemas.microsoft.com/office/drawing/2014/main" id="{6F07CB0B-F1C1-1A54-C7D9-077761FEBD33}"/>
-              </a:ext>
-            </a:extLst>
-          </p:cNvPr>
-          <p:cNvSpPr txBox="1"/>
-          <p:nvPr/>
-        </p:nvSpPr>
-        <p:spPr>
-          <a:xfrm>
-            <a:off x="143219" y="1213966"/>
-            <a:ext cx="3110344" cy="1785104"/>
-          </a:xfrm>
-          <a:prstGeom prst="rect">
-            <a:avLst/>
-          </a:prstGeom>
-          <a:noFill/>
-          <a:ln>
-            <a:solidFill>
-              <a:srgbClr val="FF0000"/>
-            </a:solidFill>
-          </a:ln>
-        </p:spPr>
-        <p:txBody>
-          <a:bodyPr wrap="square" rtlCol="0">
-            <a:spAutoFit/>
-          </a:bodyPr>
-          <a:lstStyle/>
-          <a:p>
-            <a:r>
-              <a:rPr lang="en-US" dirty="0"/>
-              <a:t>Rammy 155 UTV PRO </a:t>
-            </a:r>
-            <a:br>
-              <a:rPr lang="en-US" sz="2000" dirty="0"/>
-            </a:br>
-            <a:r>
-              <a:rPr lang="en-US" sz="2000" dirty="0"/>
-              <a:t>$6,400</a:t>
-            </a:r>
-          </a:p>
-          <a:p>
-            <a:r>
-              <a:rPr lang="en-US" dirty="0"/>
-              <a:t>61" width (155 cm)</a:t>
-            </a:r>
-          </a:p>
-          <a:p>
-            <a:r>
-              <a:rPr lang="en-US" dirty="0"/>
-              <a:t>420cc Briggs &amp; </a:t>
-            </a:r>
-            <a:r>
-              <a:rPr lang="en-US" dirty="0">
-                <a:ln>
-                  <a:solidFill>
-                    <a:srgbClr val="FF0000"/>
-                  </a:solidFill>
-                </a:ln>
-              </a:rPr>
-              <a:t>Stratton</a:t>
-            </a:r>
-            <a:br>
-              <a:rPr lang="en-US" sz="2000" dirty="0"/>
-            </a:br>
-            <a:r>
-              <a:rPr lang="en-US" dirty="0">
-                <a:hlinkClick r:id="rId2"/>
-              </a:rPr>
-              <a:t>https://rammy.fi/en/rammy-snowblower-155-utv-pro-3/</a:t>
-            </a:r>
-            <a:endParaRPr lang="en-US" dirty="0"/>
           </a:p>
         </p:txBody>
       </p:sp>
@@ -6026,7 +6493,7 @@
           <p:nvPr/>
         </p:nvPicPr>
         <p:blipFill>
-          <a:blip r:embed="rId3" cstate="email">
+          <a:blip r:embed="rId2" cstate="email">
             <a:extLst>
               <a:ext uri="{28A0092B-C50C-407E-A947-70E740481C1C}">
                 <a14:useLocalDpi xmlns:a14="http://schemas.microsoft.com/office/drawing/2010/main"/>
@@ -6040,7 +6507,7 @@
         </p:blipFill>
         <p:spPr bwMode="auto">
           <a:xfrm>
-            <a:off x="3508744" y="426190"/>
+            <a:off x="457199" y="1213966"/>
             <a:ext cx="3514382" cy="2342921"/>
           </a:xfrm>
           <a:prstGeom prst="rect">
@@ -6077,8 +6544,8 @@
         </p:nvSpPr>
         <p:spPr>
           <a:xfrm>
-            <a:off x="5265935" y="3429000"/>
-            <a:ext cx="6581057" cy="3170099"/>
+            <a:off x="4615049" y="210002"/>
+            <a:ext cx="6645618" cy="3962623"/>
           </a:xfrm>
           <a:prstGeom prst="rect">
             <a:avLst/>
@@ -6097,78 +6564,247 @@
           <a:lstStyle/>
           <a:p>
             <a:r>
+              <a:rPr lang="en-US" sz="2000" dirty="0"/>
+              <a:t>==================================</a:t>
+            </a:r>
+          </a:p>
+          <a:p>
+            <a:r>
               <a:rPr lang="en-US" sz="2000" dirty="0" err="1"/>
               <a:t>Bercomac</a:t>
             </a:r>
             <a:r>
               <a:rPr lang="en-US" sz="2000" dirty="0"/>
-              <a:t> Versatile Plus 54" (20HP Honda engine)</a:t>
-            </a:r>
-          </a:p>
-          <a:p>
-            <a:r>
-              <a:rPr lang="en-US" sz="2000" dirty="0"/>
-              <a:t>    $7K</a:t>
-            </a:r>
-          </a:p>
-          <a:p>
+              <a:t> from Canada:</a:t>
+            </a:r>
+          </a:p>
+          <a:p>
+            <a:r>
+              <a:rPr lang="en-US" sz="1050" dirty="0">
+                <a:hlinkClick r:id="rId3"/>
+              </a:rPr>
+              <a:t>https://us.bercomac.com/en_US/taxons/category/snowblower?limit=27</a:t>
+            </a:r>
+            <a:endParaRPr lang="en-US" sz="1050" dirty="0"/>
+          </a:p>
+          <a:p>
+            <a:pPr marL="342900" indent="-342900">
+              <a:buFont typeface="Arial" panose="020B0604020202020204" pitchFamily="34" charset="0"/>
+              <a:buChar char="•"/>
+            </a:pPr>
             <a:r>
               <a:rPr lang="en-US" sz="2000" dirty="0" err="1"/>
               <a:t>Bercomac</a:t>
             </a:r>
             <a:r>
               <a:rPr lang="en-US" sz="2000" dirty="0"/>
-              <a:t> Premium 54" (22-24HP Honda engine)</a:t>
-            </a:r>
-          </a:p>
-          <a:p>
-            <a:r>
-              <a:rPr lang="en-US" sz="2000" dirty="0"/>
-              <a:t>    $8,500</a:t>
-            </a:r>
-          </a:p>
-          <a:p>
-            <a:r>
-              <a:rPr lang="en-US" sz="2000" dirty="0"/>
-              <a:t>Rammy 155 UTV PRO (61"/155cm, 420cc Briggs &amp; Stratton)</a:t>
-            </a:r>
-          </a:p>
-          <a:p>
-            <a:r>
-              <a:rPr lang="en-US" sz="2000" dirty="0"/>
-              <a:t>    $6,400</a:t>
-            </a:r>
-          </a:p>
-          <a:p>
-            <a:r>
-              <a:rPr lang="en-US" sz="2000" dirty="0"/>
-              <a:t>Erskine 60" (SB300 Hydraulic model)</a:t>
-            </a:r>
-          </a:p>
-          <a:p>
-            <a:r>
-              <a:rPr lang="en-US" sz="2000" dirty="0"/>
-              <a:t>    The 78" hydraulic version is $8,500</a:t>
-            </a:r>
-          </a:p>
-          <a:p>
+              <a:t> Versatile Plus 54" (20HP Honda engine) $7K</a:t>
+            </a:r>
+          </a:p>
+          <a:p>
+            <a:pPr marL="342900" indent="-342900">
+              <a:buFont typeface="Arial" panose="020B0604020202020204" pitchFamily="34" charset="0"/>
+              <a:buChar char="•"/>
+            </a:pPr>
             <a:r>
               <a:rPr lang="en-US" sz="2000" dirty="0" err="1"/>
               <a:t>Bercomac</a:t>
             </a:r>
             <a:r>
               <a:rPr lang="en-US" sz="2000" dirty="0"/>
-              <a:t> Vantage 66"</a:t>
-            </a:r>
-          </a:p>
-          <a:p>
+              <a:t> Premium 54" (22-24HP Honda engine) $8,500</a:t>
+            </a:r>
+          </a:p>
+          <a:p>
+            <a:pPr marL="342900" indent="-342900">
+              <a:buFont typeface="Arial" panose="020B0604020202020204" pitchFamily="34" charset="0"/>
+              <a:buChar char="•"/>
+            </a:pPr>
+            <a:r>
+              <a:rPr lang="en-US" sz="2000" dirty="0" err="1"/>
+              <a:t>Bercomac</a:t>
+            </a:r>
             <a:r>
               <a:rPr lang="en-US" sz="2000" dirty="0"/>
-              <a:t>    $8,500</a:t>
-            </a:r>
-          </a:p>
-        </p:txBody>
-      </p:sp>
+              <a:t> Vantage 66" $8,500</a:t>
+            </a:r>
+          </a:p>
+          <a:p>
+            <a:r>
+              <a:rPr lang="en-US" sz="2000" dirty="0"/>
+              <a:t>==================================</a:t>
+            </a:r>
+          </a:p>
+          <a:p>
+            <a:r>
+              <a:rPr lang="en-US" sz="2000" dirty="0"/>
+              <a:t>Rammy from Finland:</a:t>
+            </a:r>
+          </a:p>
+          <a:p>
+            <a:r>
+              <a:rPr lang="en-US" sz="2000" dirty="0"/>
+              <a:t>Rammy 155 UTV PRO 61" (B&amp;S engine, 13HP) $6,400</a:t>
+            </a:r>
+          </a:p>
+          <a:p>
+            <a:r>
+              <a:rPr lang="en-US" sz="1050" dirty="0">
+                <a:hlinkClick r:id="rId4"/>
+              </a:rPr>
+              <a:t>https://rammy.fi/en/rammy-snowblower-155-utv-pro-3/</a:t>
+            </a:r>
+            <a:endParaRPr lang="en-US" sz="1050" dirty="0"/>
+          </a:p>
+          <a:p>
+            <a:r>
+              <a:rPr lang="en-US" sz="2000" dirty="0"/>
+              <a:t>==================================</a:t>
+            </a:r>
+          </a:p>
+          <a:p>
+            <a:r>
+              <a:rPr lang="en-US" sz="2000" dirty="0"/>
+              <a:t>Erskine 60" (SB300 Hydraulic model) - USA</a:t>
+            </a:r>
+          </a:p>
+          <a:p>
+            <a:r>
+              <a:rPr lang="en-US" sz="1050" dirty="0">
+                <a:hlinkClick r:id="rId5"/>
+              </a:rPr>
+              <a:t>https://</a:t>
+            </a:r>
+            <a:r>
+              <a:rPr lang="en-US" sz="1050" dirty="0" err="1">
+                <a:hlinkClick r:id="rId5"/>
+              </a:rPr>
+              <a:t>erskineattachments.com</a:t>
+            </a:r>
+            <a:r>
+              <a:rPr lang="en-US" sz="1050" dirty="0">
+                <a:hlinkClick r:id="rId5"/>
+              </a:rPr>
+              <a:t>/products/hydraulic-snowblower-sb300-series/</a:t>
+            </a:r>
+            <a:endParaRPr lang="en-US" sz="1050" dirty="0"/>
+          </a:p>
+          <a:p>
+            <a:r>
+              <a:rPr lang="en-US" sz="2000" dirty="0"/>
+              <a:t>==================================</a:t>
+            </a:r>
+          </a:p>
+        </p:txBody>
+      </p:sp>
+      <p:sp>
+        <p:nvSpPr>
+          <p:cNvPr id="3" name="TextBox 2">
+            <a:extLst>
+              <a:ext uri="{FF2B5EF4-FFF2-40B4-BE49-F238E27FC236}">
+                <a16:creationId xmlns:a16="http://schemas.microsoft.com/office/drawing/2014/main" id="{5C468931-D2D2-A3BF-55CA-AA47A7B9FE15}"/>
+              </a:ext>
+            </a:extLst>
+          </p:cNvPr>
+          <p:cNvSpPr txBox="1"/>
+          <p:nvPr/>
+        </p:nvSpPr>
+        <p:spPr>
+          <a:xfrm>
+            <a:off x="4615049" y="4460268"/>
+            <a:ext cx="7407618" cy="2308324"/>
+          </a:xfrm>
+          <a:prstGeom prst="rect">
+            <a:avLst/>
+          </a:prstGeom>
+          <a:noFill/>
+          <a:ln>
+            <a:solidFill>
+              <a:srgbClr val="FF0000"/>
+            </a:solidFill>
+          </a:ln>
+        </p:spPr>
+        <p:txBody>
+          <a:bodyPr wrap="square" rtlCol="0">
+            <a:spAutoFit/>
+          </a:bodyPr>
+          <a:lstStyle/>
+          <a:p>
+            <a:r>
+              <a:rPr lang="en-US" dirty="0"/>
+              <a:t>Also considered this ATV blade + snowblower combo:</a:t>
+            </a:r>
+            <a:br>
+              <a:rPr lang="en-US" dirty="0"/>
+            </a:br>
+            <a:r>
+              <a:rPr lang="en-US" dirty="0"/>
+              <a:t>Rammy W165 Plow + ST30 Combo </a:t>
+            </a:r>
+          </a:p>
+          <a:p>
+            <a:r>
+              <a:rPr lang="en-US" dirty="0"/>
+              <a:t>Unfortunately it is only  118 cm (46") with ST30 mounted, which is much narrower than our gator (144 cm) – so we will not be able to advance through the field of snow.</a:t>
+            </a:r>
+          </a:p>
+          <a:p>
+            <a:r>
+              <a:rPr lang="en-US" dirty="0"/>
+              <a:t>Yes, it is not as heavy, but the difference in weight is only 30 kg.</a:t>
+            </a:r>
+          </a:p>
+          <a:p>
+            <a:r>
+              <a:rPr lang="en-US" dirty="0"/>
+              <a:t>W165 Plow + ST30 Combo - 120 kg total (plow 50kg + ST30 70kg) </a:t>
+            </a:r>
+          </a:p>
+          <a:p>
+            <a:r>
+              <a:rPr lang="en-US" dirty="0"/>
+              <a:t>Rammy 155 UTV PRO - 150 kg total (125 kg snowblower + 25kg frame)</a:t>
+            </a:r>
+            <a:endParaRPr lang="en-US" sz="2000" dirty="0"/>
+          </a:p>
+        </p:txBody>
+      </p:sp>
+      <p:pic>
+        <p:nvPicPr>
+          <p:cNvPr id="5" name="Picture 4">
+            <a:extLst>
+              <a:ext uri="{FF2B5EF4-FFF2-40B4-BE49-F238E27FC236}">
+                <a16:creationId xmlns:a16="http://schemas.microsoft.com/office/drawing/2014/main" id="{F6DC205C-5CBD-5265-16C9-2808CDFB0D23}"/>
+              </a:ext>
+            </a:extLst>
+          </p:cNvPr>
+          <p:cNvPicPr>
+            <a:picLocks noChangeAspect="1"/>
+          </p:cNvPicPr>
+          <p:nvPr/>
+        </p:nvPicPr>
+        <p:blipFill>
+          <a:blip r:embed="rId6" cstate="email">
+            <a:extLst>
+              <a:ext uri="{28A0092B-C50C-407E-A947-70E740481C1C}">
+                <a14:useLocalDpi xmlns:a14="http://schemas.microsoft.com/office/drawing/2010/main"/>
+              </a:ext>
+            </a:extLst>
+          </a:blip>
+          <a:stretch>
+            <a:fillRect/>
+          </a:stretch>
+        </p:blipFill>
+        <p:spPr>
+          <a:xfrm>
+            <a:off x="457199" y="4590948"/>
+            <a:ext cx="3514382" cy="2068749"/>
+          </a:xfrm>
+          <a:prstGeom prst="rect">
+            <a:avLst/>
+          </a:prstGeom>
+        </p:spPr>
+      </p:pic>
     </p:spTree>
     <p:extLst>
       <p:ext uri="{BB962C8B-B14F-4D97-AF65-F5344CB8AC3E}">
@@ -6459,7 +7095,7 @@
         </p:blipFill>
         <p:spPr bwMode="auto">
           <a:xfrm flipH="1">
-            <a:off x="3957735" y="2930134"/>
+            <a:off x="3989119" y="2616090"/>
             <a:ext cx="1139198" cy="1786200"/>
           </a:xfrm>
           <a:prstGeom prst="rect">
@@ -6805,7 +7441,7 @@
         </p:blipFill>
         <p:spPr>
           <a:xfrm>
-            <a:off x="8320056" y="5229056"/>
+            <a:off x="5891895" y="5120248"/>
             <a:ext cx="1296910" cy="1439927"/>
           </a:xfrm>
           <a:prstGeom prst="rect">
@@ -8772,7 +9408,7 @@
         <p:cNvPr id="1" name="">
           <a:extLst>
             <a:ext uri="{FF2B5EF4-FFF2-40B4-BE49-F238E27FC236}">
-              <a16:creationId xmlns:a16="http://schemas.microsoft.com/office/drawing/2014/main" id="{84AC1C7A-0E76-ABB4-D69F-724A22AA8CB3}"/>
+              <a16:creationId xmlns:a16="http://schemas.microsoft.com/office/drawing/2014/main" id="{1545F99A-9A76-0D4B-7909-5BEEC960A928}"/>
             </a:ext>
           </a:extLst>
         </p:cNvPr>
@@ -8792,7 +9428,7 @@
           <p:cNvPr id="2" name="TextBox 1">
             <a:extLst>
               <a:ext uri="{FF2B5EF4-FFF2-40B4-BE49-F238E27FC236}">
-                <a16:creationId xmlns:a16="http://schemas.microsoft.com/office/drawing/2014/main" id="{ED823884-F214-65FC-D4DC-F6CE3A3AD4B8}"/>
+                <a16:creationId xmlns:a16="http://schemas.microsoft.com/office/drawing/2014/main" id="{4EA4FDA6-CDAC-9BCC-3C0C-F323B968C36A}"/>
               </a:ext>
             </a:extLst>
           </p:cNvPr>
@@ -8802,12 +9438,22 @@
         <p:spPr>
           <a:xfrm>
             <a:off x="143219" y="198303"/>
-            <a:ext cx="3514381" cy="369332"/>
+            <a:ext cx="3819182" cy="738664"/>
           </a:xfrm>
           <a:prstGeom prst="rect">
             <a:avLst/>
           </a:prstGeom>
-          <a:noFill/>
+          <a:solidFill>
+            <a:schemeClr val="accent4">
+              <a:lumMod val="20000"/>
+              <a:lumOff val="80000"/>
+            </a:schemeClr>
+          </a:solidFill>
+          <a:ln>
+            <a:solidFill>
+              <a:srgbClr val="FF0000"/>
+            </a:solidFill>
+          </a:ln>
         </p:spPr>
         <p:txBody>
           <a:bodyPr wrap="square" rtlCol="0">
@@ -8817,8 +9463,50 @@
           <a:p>
             <a:r>
               <a:rPr lang="en-US" dirty="0"/>
-              <a:t>Snow Shovels</a:t>
-            </a:r>
+              <a:t>Snow Tamers</a:t>
+            </a:r>
+          </a:p>
+          <a:p>
+            <a:r>
+              <a:rPr lang="en-US" sz="1200" dirty="0">
+                <a:hlinkClick r:id="rId2"/>
+              </a:rPr>
+              <a:t>https://www.r2manufacturing.com</a:t>
+            </a:r>
+            <a:endParaRPr lang="en-US" sz="1200" dirty="0"/>
+          </a:p>
+          <a:p>
+            <a:r>
+              <a:rPr lang="en-US" sz="1200" dirty="0">
+                <a:hlinkClick r:id="rId3"/>
+              </a:rPr>
+              <a:t>https://</a:t>
+            </a:r>
+            <a:r>
+              <a:rPr lang="en-US" sz="1200" dirty="0" err="1">
+                <a:hlinkClick r:id="rId3"/>
+              </a:rPr>
+              <a:t>www.youtube.com</a:t>
+            </a:r>
+            <a:r>
+              <a:rPr lang="en-US" sz="1200" dirty="0">
+                <a:hlinkClick r:id="rId3"/>
+              </a:rPr>
+              <a:t>/</a:t>
+            </a:r>
+            <a:r>
+              <a:rPr lang="en-US" sz="1200" dirty="0" err="1">
+                <a:hlinkClick r:id="rId3"/>
+              </a:rPr>
+              <a:t>watch?v</a:t>
+            </a:r>
+            <a:r>
+              <a:rPr lang="en-US" sz="1200" dirty="0">
+                <a:hlinkClick r:id="rId3"/>
+              </a:rPr>
+              <a:t>=5VuD0MhxcQ0</a:t>
+            </a:r>
+            <a:endParaRPr lang="en-US" sz="1200" dirty="0"/>
           </a:p>
         </p:txBody>
       </p:sp>
@@ -8827,7 +9515,7 @@
           <p:cNvPr id="12" name="TextBox 11">
             <a:extLst>
               <a:ext uri="{FF2B5EF4-FFF2-40B4-BE49-F238E27FC236}">
-                <a16:creationId xmlns:a16="http://schemas.microsoft.com/office/drawing/2014/main" id="{81C3F313-C0E5-3C5B-B089-F60FD3402B3F}"/>
+                <a16:creationId xmlns:a16="http://schemas.microsoft.com/office/drawing/2014/main" id="{7A6C7CEA-91BC-1EA0-3719-3E53253B3B07}"/>
               </a:ext>
             </a:extLst>
           </p:cNvPr>
@@ -8837,12 +9525,22 @@
         <p:spPr>
           <a:xfrm>
             <a:off x="76557" y="1098976"/>
-            <a:ext cx="4394914" cy="600164"/>
+            <a:ext cx="4394914" cy="4493538"/>
           </a:xfrm>
           <a:prstGeom prst="rect">
             <a:avLst/>
           </a:prstGeom>
-          <a:noFill/>
+          <a:solidFill>
+            <a:schemeClr val="accent4">
+              <a:lumMod val="20000"/>
+              <a:lumOff val="80000"/>
+            </a:schemeClr>
+          </a:solidFill>
+          <a:ln>
+            <a:solidFill>
+              <a:srgbClr val="FF0000"/>
+            </a:solidFill>
+          </a:ln>
         </p:spPr>
         <p:txBody>
           <a:bodyPr wrap="square" rtlCol="0">
@@ -8855,12 +9553,38 @@
                 <a:latin typeface="Calibri" panose="020F0502020204030204" pitchFamily="34" charset="0"/>
                 <a:cs typeface="Calibri" panose="020F0502020204030204" pitchFamily="34" charset="0"/>
               </a:rPr>
+              <a:t>Plowing snow on gravel</a:t>
+            </a:r>
+          </a:p>
+          <a:p>
+            <a:r>
+              <a:rPr lang="en-US" sz="1100" dirty="0">
+                <a:latin typeface="Calibri" panose="020F0502020204030204" pitchFamily="34" charset="0"/>
+                <a:cs typeface="Calibri" panose="020F0502020204030204" pitchFamily="34" charset="0"/>
+              </a:rPr>
+              <a:t>Using tube at the bottom of the snow blade</a:t>
+            </a:r>
+          </a:p>
+          <a:p>
+            <a:endParaRPr lang="en-US" sz="1100" dirty="0">
+              <a:latin typeface="Calibri" panose="020F0502020204030204" pitchFamily="34" charset="0"/>
+              <a:cs typeface="Calibri" panose="020F0502020204030204" pitchFamily="34" charset="0"/>
+            </a:endParaRPr>
+          </a:p>
+          <a:p>
+            <a:r>
+              <a:rPr lang="en-US" sz="1100" dirty="0">
+                <a:latin typeface="Calibri" panose="020F0502020204030204" pitchFamily="34" charset="0"/>
+                <a:cs typeface="Calibri" panose="020F0502020204030204" pitchFamily="34" charset="0"/>
+                <a:hlinkClick r:id="rId4"/>
+              </a:rPr>
               <a:t>https://</a:t>
             </a:r>
             <a:r>
               <a:rPr lang="en-US" sz="1100" dirty="0" err="1">
                 <a:latin typeface="Calibri" panose="020F0502020204030204" pitchFamily="34" charset="0"/>
                 <a:cs typeface="Calibri" panose="020F0502020204030204" pitchFamily="34" charset="0"/>
+                <a:hlinkClick r:id="rId4"/>
               </a:rPr>
               <a:t>www.youtube.com</a:t>
             </a:r>
@@ -8868,6 +9592,7 @@
               <a:rPr lang="en-US" sz="1100" dirty="0">
                 <a:latin typeface="Calibri" panose="020F0502020204030204" pitchFamily="34" charset="0"/>
                 <a:cs typeface="Calibri" panose="020F0502020204030204" pitchFamily="34" charset="0"/>
+                <a:hlinkClick r:id="rId4"/>
               </a:rPr>
               <a:t>/</a:t>
             </a:r>
@@ -8875,6 +9600,7 @@
               <a:rPr lang="en-US" sz="1100" dirty="0" err="1">
                 <a:latin typeface="Calibri" panose="020F0502020204030204" pitchFamily="34" charset="0"/>
                 <a:cs typeface="Calibri" panose="020F0502020204030204" pitchFamily="34" charset="0"/>
+                <a:hlinkClick r:id="rId4"/>
               </a:rPr>
               <a:t>watch?v</a:t>
             </a:r>
@@ -8882,9 +9608,14 @@
               <a:rPr lang="en-US" sz="1100" dirty="0">
                 <a:latin typeface="Calibri" panose="020F0502020204030204" pitchFamily="34" charset="0"/>
                 <a:cs typeface="Calibri" panose="020F0502020204030204" pitchFamily="34" charset="0"/>
-              </a:rPr>
-              <a:t>=M3OsMTyofe0  - video comparison</a:t>
-            </a:r>
+                <a:hlinkClick r:id="rId4"/>
+              </a:rPr>
+              <a:t>=K8zB1X35QtI</a:t>
+            </a:r>
+            <a:endParaRPr lang="en-US" sz="1100" dirty="0">
+              <a:latin typeface="Calibri" panose="020F0502020204030204" pitchFamily="34" charset="0"/>
+              <a:cs typeface="Calibri" panose="020F0502020204030204" pitchFamily="34" charset="0"/>
+            </a:endParaRPr>
           </a:p>
           <a:p>
             <a:r>
@@ -8892,59 +9623,250 @@
                 <a:latin typeface="Calibri" panose="020F0502020204030204" pitchFamily="34" charset="0"/>
                 <a:cs typeface="Calibri" panose="020F0502020204030204" pitchFamily="34" charset="0"/>
               </a:rPr>
-              <a:t>https://</a:t>
+              <a:t>He uses 1-3/8" galvanized steel fence top rail.</a:t>
+            </a:r>
+          </a:p>
+          <a:p>
+            <a:r>
+              <a:rPr lang="en-US" sz="1100" dirty="0">
+                <a:latin typeface="Calibri" panose="020F0502020204030204" pitchFamily="34" charset="0"/>
+                <a:cs typeface="Calibri" panose="020F0502020204030204" pitchFamily="34" charset="0"/>
+              </a:rPr>
+              <a:t>It is a galvanized steel pipe.</a:t>
+            </a:r>
+          </a:p>
+          <a:p>
+            <a:r>
+              <a:rPr lang="en-US" sz="1100" dirty="0">
+                <a:latin typeface="Calibri" panose="020F0502020204030204" pitchFamily="34" charset="0"/>
+                <a:cs typeface="Calibri" panose="020F0502020204030204" pitchFamily="34" charset="0"/>
+              </a:rPr>
+              <a:t>Sizes (diameter):</a:t>
+            </a:r>
+          </a:p>
+          <a:p>
+            <a:r>
+              <a:rPr lang="en-US" sz="1100" dirty="0">
+                <a:latin typeface="Calibri" panose="020F0502020204030204" pitchFamily="34" charset="0"/>
+                <a:cs typeface="Calibri" panose="020F0502020204030204" pitchFamily="34" charset="0"/>
+              </a:rPr>
+              <a:t>  1 1/4"</a:t>
+            </a:r>
+          </a:p>
+          <a:p>
+            <a:r>
+              <a:rPr lang="en-US" sz="1100" dirty="0">
+                <a:latin typeface="Calibri" panose="020F0502020204030204" pitchFamily="34" charset="0"/>
+                <a:cs typeface="Calibri" panose="020F0502020204030204" pitchFamily="34" charset="0"/>
+              </a:rPr>
+              <a:t>  1-3/8"</a:t>
+            </a:r>
+          </a:p>
+          <a:p>
+            <a:r>
+              <a:rPr lang="en-US" sz="1100" dirty="0">
+                <a:latin typeface="Calibri" panose="020F0502020204030204" pitchFamily="34" charset="0"/>
+                <a:cs typeface="Calibri" panose="020F0502020204030204" pitchFamily="34" charset="0"/>
+              </a:rPr>
+              <a:t>  1 1/2"</a:t>
+            </a:r>
+          </a:p>
+          <a:p>
+            <a:r>
+              <a:rPr lang="en-US" sz="1100" dirty="0">
+                <a:latin typeface="Calibri" panose="020F0502020204030204" pitchFamily="34" charset="0"/>
+                <a:cs typeface="Calibri" panose="020F0502020204030204" pitchFamily="34" charset="0"/>
+              </a:rPr>
+              <a:t>In this video he used size 1-3/8"</a:t>
+            </a:r>
+          </a:p>
+          <a:p>
+            <a:endParaRPr lang="en-US" sz="1100" dirty="0">
+              <a:latin typeface="Calibri" panose="020F0502020204030204" pitchFamily="34" charset="0"/>
+              <a:cs typeface="Calibri" panose="020F0502020204030204" pitchFamily="34" charset="0"/>
+            </a:endParaRPr>
+          </a:p>
+          <a:p>
+            <a:r>
+              <a:rPr lang="en-US" sz="1100" dirty="0">
+                <a:latin typeface="Calibri" panose="020F0502020204030204" pitchFamily="34" charset="0"/>
+                <a:cs typeface="Calibri" panose="020F0502020204030204" pitchFamily="34" charset="0"/>
+              </a:rPr>
+              <a:t>Even better solution - replaceable :</a:t>
+            </a:r>
+          </a:p>
+          <a:p>
+            <a:r>
+              <a:rPr lang="en-US" sz="1100" dirty="0">
+                <a:latin typeface="Calibri" panose="020F0502020204030204" pitchFamily="34" charset="0"/>
+                <a:cs typeface="Calibri" panose="020F0502020204030204" pitchFamily="34" charset="0"/>
+                <a:hlinkClick r:id="rId5"/>
+              </a:rPr>
+              <a:t>https://www.youtube.com/</a:t>
             </a:r>
             <a:r>
               <a:rPr lang="en-US" sz="1100" dirty="0" err="1">
                 <a:latin typeface="Calibri" panose="020F0502020204030204" pitchFamily="34" charset="0"/>
                 <a:cs typeface="Calibri" panose="020F0502020204030204" pitchFamily="34" charset="0"/>
-              </a:rPr>
-              <a:t>www.amazon.com</a:t>
+                <a:hlinkClick r:id="rId5"/>
+              </a:rPr>
+              <a:t>watch?v</a:t>
             </a:r>
             <a:r>
               <a:rPr lang="en-US" sz="1100" dirty="0">
                 <a:latin typeface="Calibri" panose="020F0502020204030204" pitchFamily="34" charset="0"/>
                 <a:cs typeface="Calibri" panose="020F0502020204030204" pitchFamily="34" charset="0"/>
-              </a:rPr>
-              <a:t>/</a:t>
+                <a:hlinkClick r:id="rId5"/>
+              </a:rPr>
+              <a:t>=</a:t>
             </a:r>
             <a:r>
               <a:rPr lang="en-US" sz="1100" dirty="0" err="1">
                 <a:latin typeface="Calibri" panose="020F0502020204030204" pitchFamily="34" charset="0"/>
                 <a:cs typeface="Calibri" panose="020F0502020204030204" pitchFamily="34" charset="0"/>
-              </a:rPr>
-              <a:t>dp</a:t>
-            </a:r>
+                <a:hlinkClick r:id="rId5"/>
+              </a:rPr>
+              <a:t>wCxOjqdGEjw</a:t>
+            </a:r>
+            <a:endParaRPr lang="en-US" sz="1100" dirty="0">
+              <a:latin typeface="Calibri" panose="020F0502020204030204" pitchFamily="34" charset="0"/>
+              <a:cs typeface="Calibri" panose="020F0502020204030204" pitchFamily="34" charset="0"/>
+            </a:endParaRPr>
+          </a:p>
+          <a:p>
+            <a:endParaRPr lang="en-US" sz="1100" dirty="0">
+              <a:latin typeface="Calibri" panose="020F0502020204030204" pitchFamily="34" charset="0"/>
+              <a:cs typeface="Calibri" panose="020F0502020204030204" pitchFamily="34" charset="0"/>
+            </a:endParaRPr>
+          </a:p>
+          <a:p>
             <a:r>
               <a:rPr lang="en-US" sz="1100" dirty="0">
                 <a:latin typeface="Calibri" panose="020F0502020204030204" pitchFamily="34" charset="0"/>
                 <a:cs typeface="Calibri" panose="020F0502020204030204" pitchFamily="34" charset="0"/>
               </a:rPr>
-              <a:t>/B0G1YBMSVL - </a:t>
+              <a:t>Yet another one ( steel pipe 2 in inner, 2 3/8 outer, and 3/16 thick):</a:t>
+            </a:r>
+          </a:p>
+          <a:p>
+            <a:r>
+              <a:rPr lang="en-US" sz="1100" dirty="0">
+                <a:latin typeface="Calibri" panose="020F0502020204030204" pitchFamily="34" charset="0"/>
+                <a:cs typeface="Calibri" panose="020F0502020204030204" pitchFamily="34" charset="0"/>
+                <a:hlinkClick r:id="rId6"/>
+              </a:rPr>
+              <a:t>https://www.youtube.com/watch?v=</a:t>
             </a:r>
             <a:r>
               <a:rPr lang="en-US" sz="1100" dirty="0" err="1">
                 <a:latin typeface="Calibri" panose="020F0502020204030204" pitchFamily="34" charset="0"/>
                 <a:cs typeface="Calibri" panose="020F0502020204030204" pitchFamily="34" charset="0"/>
-              </a:rPr>
-              <a:t>Litheli</a:t>
-            </a:r>
+                <a:hlinkClick r:id="rId6"/>
+              </a:rPr>
+              <a:t>MVhIKQvNplc</a:t>
+            </a:r>
+            <a:endParaRPr lang="en-US" sz="1100" dirty="0">
+              <a:latin typeface="Calibri" panose="020F0502020204030204" pitchFamily="34" charset="0"/>
+              <a:cs typeface="Calibri" panose="020F0502020204030204" pitchFamily="34" charset="0"/>
+            </a:endParaRPr>
+          </a:p>
+          <a:p>
+            <a:endParaRPr lang="en-US" sz="1100" dirty="0">
+              <a:latin typeface="Calibri" panose="020F0502020204030204" pitchFamily="34" charset="0"/>
+              <a:cs typeface="Calibri" panose="020F0502020204030204" pitchFamily="34" charset="0"/>
+            </a:endParaRPr>
+          </a:p>
+          <a:p>
             <a:r>
               <a:rPr lang="en-US" sz="1100" dirty="0">
                 <a:latin typeface="Calibri" panose="020F0502020204030204" pitchFamily="34" charset="0"/>
                 <a:cs typeface="Calibri" panose="020F0502020204030204" pitchFamily="34" charset="0"/>
               </a:rPr>
-              <a:t> 40V (2×20V) Cordless Snow Shovel with Directional Plate &amp; Adjustable Handle, 14-Inch</a:t>
-            </a:r>
+              <a:t>Some people attach using chain</a:t>
+            </a:r>
+          </a:p>
+          <a:p>
+            <a:endParaRPr lang="en-US" sz="1100" dirty="0">
+              <a:latin typeface="Calibri" panose="020F0502020204030204" pitchFamily="34" charset="0"/>
+              <a:cs typeface="Calibri" panose="020F0502020204030204" pitchFamily="34" charset="0"/>
+            </a:endParaRPr>
+          </a:p>
+          <a:p>
+            <a:r>
+              <a:rPr lang="en-US" sz="1100" dirty="0">
+                <a:latin typeface="Calibri" panose="020F0502020204030204" pitchFamily="34" charset="0"/>
+                <a:cs typeface="Calibri" panose="020F0502020204030204" pitchFamily="34" charset="0"/>
+                <a:hlinkClick r:id="rId7"/>
+              </a:rPr>
+              <a:t>https://www.youtube.com/</a:t>
+            </a:r>
+            <a:r>
+              <a:rPr lang="en-US" sz="1100" dirty="0" err="1">
+                <a:latin typeface="Calibri" panose="020F0502020204030204" pitchFamily="34" charset="0"/>
+                <a:cs typeface="Calibri" panose="020F0502020204030204" pitchFamily="34" charset="0"/>
+                <a:hlinkClick r:id="rId7"/>
+              </a:rPr>
+              <a:t>watch?v</a:t>
+            </a:r>
+            <a:r>
+              <a:rPr lang="en-US" sz="1100" dirty="0">
+                <a:latin typeface="Calibri" panose="020F0502020204030204" pitchFamily="34" charset="0"/>
+                <a:cs typeface="Calibri" panose="020F0502020204030204" pitchFamily="34" charset="0"/>
+                <a:hlinkClick r:id="rId7"/>
+              </a:rPr>
+              <a:t>=</a:t>
+            </a:r>
+            <a:r>
+              <a:rPr lang="en-US" sz="1100" dirty="0" err="1">
+                <a:latin typeface="Calibri" panose="020F0502020204030204" pitchFamily="34" charset="0"/>
+                <a:cs typeface="Calibri" panose="020F0502020204030204" pitchFamily="34" charset="0"/>
+                <a:hlinkClick r:id="rId7"/>
+              </a:rPr>
+              <a:t>ublecStrYAE</a:t>
+            </a:r>
+            <a:endParaRPr lang="en-US" sz="1100" dirty="0">
+              <a:latin typeface="Calibri" panose="020F0502020204030204" pitchFamily="34" charset="0"/>
+              <a:cs typeface="Calibri" panose="020F0502020204030204" pitchFamily="34" charset="0"/>
+            </a:endParaRPr>
+          </a:p>
+          <a:p>
+            <a:endParaRPr lang="en-US" sz="1100" dirty="0">
+              <a:latin typeface="Calibri" panose="020F0502020204030204" pitchFamily="34" charset="0"/>
+              <a:cs typeface="Calibri" panose="020F0502020204030204" pitchFamily="34" charset="0"/>
+            </a:endParaRPr>
+          </a:p>
+          <a:p>
+            <a:r>
+              <a:rPr lang="en-US" sz="1100" dirty="0">
+                <a:latin typeface="Calibri" panose="020F0502020204030204" pitchFamily="34" charset="0"/>
+                <a:cs typeface="Calibri" panose="020F0502020204030204" pitchFamily="34" charset="0"/>
+              </a:rPr>
+              <a:t>Yet another way to attach it.</a:t>
+            </a:r>
+          </a:p>
+          <a:p>
+            <a:r>
+              <a:rPr lang="en-US" sz="1100" dirty="0">
+                <a:latin typeface="Calibri" panose="020F0502020204030204" pitchFamily="34" charset="0"/>
+                <a:cs typeface="Calibri" panose="020F0502020204030204" pitchFamily="34" charset="0"/>
+              </a:rPr>
+              <a:t>He welds steel brackets with holes to the pipe that align with the plow's existing mounting bolts.</a:t>
+            </a:r>
+          </a:p>
+          <a:p>
+            <a:endParaRPr lang="en-US" sz="1100" dirty="0">
+              <a:latin typeface="Calibri" panose="020F0502020204030204" pitchFamily="34" charset="0"/>
+              <a:cs typeface="Calibri" panose="020F0502020204030204" pitchFamily="34" charset="0"/>
+            </a:endParaRPr>
           </a:p>
         </p:txBody>
       </p:sp>
       <p:pic>
         <p:nvPicPr>
-          <p:cNvPr id="7" name="Picture 6">
-            <a:extLst>
-              <a:ext uri="{FF2B5EF4-FFF2-40B4-BE49-F238E27FC236}">
-                <a16:creationId xmlns:a16="http://schemas.microsoft.com/office/drawing/2014/main" id="{82FD6872-F4B7-0819-5797-2F74EF9B2F60}"/>
+          <p:cNvPr id="9" name="Picture 8">
+            <a:extLst>
+              <a:ext uri="{FF2B5EF4-FFF2-40B4-BE49-F238E27FC236}">
+                <a16:creationId xmlns:a16="http://schemas.microsoft.com/office/drawing/2014/main" id="{FEDB6647-A377-F039-E331-124636F83F3E}"/>
               </a:ext>
             </a:extLst>
           </p:cNvPr>
@@ -8954,7 +9876,7 @@
           <p:nvPr/>
         </p:nvPicPr>
         <p:blipFill>
-          <a:blip r:embed="rId2" cstate="email">
+          <a:blip r:embed="rId8" cstate="email">
             <a:extLst>
               <a:ext uri="{28A0092B-C50C-407E-A947-70E740481C1C}">
                 <a14:useLocalDpi xmlns:a14="http://schemas.microsoft.com/office/drawing/2010/main"/>
@@ -8967,154 +9889,20 @@
         </p:blipFill>
         <p:spPr>
           <a:xfrm>
-            <a:off x="726487" y="2036757"/>
-            <a:ext cx="2347843" cy="2784485"/>
+            <a:off x="7442199" y="198303"/>
+            <a:ext cx="4555781" cy="2294578"/>
           </a:xfrm>
           <a:prstGeom prst="rect">
             <a:avLst/>
           </a:prstGeom>
         </p:spPr>
       </p:pic>
-      <p:sp>
-        <p:nvSpPr>
-          <p:cNvPr id="9" name="TextBox 8">
-            <a:extLst>
-              <a:ext uri="{FF2B5EF4-FFF2-40B4-BE49-F238E27FC236}">
-                <a16:creationId xmlns:a16="http://schemas.microsoft.com/office/drawing/2014/main" id="{D42B9A2F-F19F-2AB3-026E-CA6DAEF17597}"/>
-              </a:ext>
-            </a:extLst>
-          </p:cNvPr>
-          <p:cNvSpPr txBox="1"/>
-          <p:nvPr/>
-        </p:nvSpPr>
-        <p:spPr>
-          <a:xfrm>
-            <a:off x="89257" y="5759024"/>
-            <a:ext cx="5219343" cy="600164"/>
-          </a:xfrm>
-          <a:prstGeom prst="rect">
-            <a:avLst/>
-          </a:prstGeom>
-          <a:noFill/>
-        </p:spPr>
-        <p:txBody>
-          <a:bodyPr wrap="square" rtlCol="0">
-            <a:spAutoFit/>
-          </a:bodyPr>
-          <a:lstStyle/>
-          <a:p>
-            <a:r>
-              <a:rPr lang="en-US" sz="1100" dirty="0">
-                <a:latin typeface="Calibri" panose="020F0502020204030204" pitchFamily="34" charset="0"/>
-                <a:cs typeface="Calibri" panose="020F0502020204030204" pitchFamily="34" charset="0"/>
-              </a:rPr>
-              <a:t>► 3. EGO Power+ Electric Snow Shovel - https://</a:t>
-            </a:r>
-            <a:r>
-              <a:rPr lang="en-US" sz="1100" dirty="0" err="1">
-                <a:latin typeface="Calibri" panose="020F0502020204030204" pitchFamily="34" charset="0"/>
-                <a:cs typeface="Calibri" panose="020F0502020204030204" pitchFamily="34" charset="0"/>
-              </a:rPr>
-              <a:t>geni.us</a:t>
-            </a:r>
-            <a:r>
-              <a:rPr lang="en-US" sz="1100" dirty="0">
-                <a:latin typeface="Calibri" panose="020F0502020204030204" pitchFamily="34" charset="0"/>
-                <a:cs typeface="Calibri" panose="020F0502020204030204" pitchFamily="34" charset="0"/>
-              </a:rPr>
-              <a:t>/WBJ5A. -expensive</a:t>
-            </a:r>
-          </a:p>
-          <a:p>
-            <a:r>
-              <a:rPr lang="en-US" sz="1100" dirty="0">
-                <a:latin typeface="Calibri" panose="020F0502020204030204" pitchFamily="34" charset="0"/>
-                <a:cs typeface="Calibri" panose="020F0502020204030204" pitchFamily="34" charset="0"/>
-              </a:rPr>
-              <a:t>► 2. Toro 60V Power Shovel - https://</a:t>
-            </a:r>
-            <a:r>
-              <a:rPr lang="en-US" sz="1100" dirty="0" err="1">
-                <a:latin typeface="Calibri" panose="020F0502020204030204" pitchFamily="34" charset="0"/>
-                <a:cs typeface="Calibri" panose="020F0502020204030204" pitchFamily="34" charset="0"/>
-              </a:rPr>
-              <a:t>geni.us</a:t>
-            </a:r>
-            <a:r>
-              <a:rPr lang="en-US" sz="1100" dirty="0">
-                <a:latin typeface="Calibri" panose="020F0502020204030204" pitchFamily="34" charset="0"/>
-                <a:cs typeface="Calibri" panose="020F0502020204030204" pitchFamily="34" charset="0"/>
-              </a:rPr>
-              <a:t>/</a:t>
-            </a:r>
-            <a:r>
-              <a:rPr lang="en-US" sz="1100" dirty="0" err="1">
-                <a:latin typeface="Calibri" panose="020F0502020204030204" pitchFamily="34" charset="0"/>
-                <a:cs typeface="Calibri" panose="020F0502020204030204" pitchFamily="34" charset="0"/>
-              </a:rPr>
-              <a:t>IYwEh</a:t>
-            </a:r>
-            <a:r>
-              <a:rPr lang="en-US" sz="1100" dirty="0">
-                <a:latin typeface="Calibri" panose="020F0502020204030204" pitchFamily="34" charset="0"/>
-                <a:cs typeface="Calibri" panose="020F0502020204030204" pitchFamily="34" charset="0"/>
-              </a:rPr>
-              <a:t> </a:t>
-            </a:r>
-            <a:r>
-              <a:rPr lang="en-US" sz="1100">
-                <a:latin typeface="Calibri" panose="020F0502020204030204" pitchFamily="34" charset="0"/>
-                <a:cs typeface="Calibri" panose="020F0502020204030204" pitchFamily="34" charset="0"/>
-              </a:rPr>
-              <a:t>- heavy</a:t>
-            </a:r>
-            <a:endParaRPr lang="en-US" sz="1100" dirty="0">
-              <a:latin typeface="Calibri" panose="020F0502020204030204" pitchFamily="34" charset="0"/>
-              <a:cs typeface="Calibri" panose="020F0502020204030204" pitchFamily="34" charset="0"/>
-            </a:endParaRPr>
-          </a:p>
-          <a:p>
-            <a:r>
-              <a:rPr lang="en-US" sz="1100" dirty="0">
-                <a:latin typeface="Calibri" panose="020F0502020204030204" pitchFamily="34" charset="0"/>
-                <a:cs typeface="Calibri" panose="020F0502020204030204" pitchFamily="34" charset="0"/>
-              </a:rPr>
-              <a:t>► 1. Greenworks 80V 12" Cordless Snow Shovel - https://</a:t>
-            </a:r>
-            <a:r>
-              <a:rPr lang="en-US" sz="1100" dirty="0" err="1">
-                <a:latin typeface="Calibri" panose="020F0502020204030204" pitchFamily="34" charset="0"/>
-                <a:cs typeface="Calibri" panose="020F0502020204030204" pitchFamily="34" charset="0"/>
-              </a:rPr>
-              <a:t>geni.us</a:t>
-            </a:r>
-            <a:r>
-              <a:rPr lang="en-US" sz="1100" dirty="0">
-                <a:latin typeface="Calibri" panose="020F0502020204030204" pitchFamily="34" charset="0"/>
-                <a:cs typeface="Calibri" panose="020F0502020204030204" pitchFamily="34" charset="0"/>
-              </a:rPr>
-              <a:t>/</a:t>
-            </a:r>
-            <a:r>
-              <a:rPr lang="en-US" sz="1100" dirty="0" err="1">
-                <a:latin typeface="Calibri" panose="020F0502020204030204" pitchFamily="34" charset="0"/>
-                <a:cs typeface="Calibri" panose="020F0502020204030204" pitchFamily="34" charset="0"/>
-              </a:rPr>
-              <a:t>JMkppek</a:t>
-            </a:r>
-            <a:endParaRPr lang="en-US" sz="1100" dirty="0">
-              <a:latin typeface="Calibri" panose="020F0502020204030204" pitchFamily="34" charset="0"/>
-              <a:cs typeface="Calibri" panose="020F0502020204030204" pitchFamily="34" charset="0"/>
-            </a:endParaRPr>
-          </a:p>
-        </p:txBody>
-      </p:sp>
       <p:pic>
         <p:nvPicPr>
-          <p:cNvPr id="3" name="Picture 2">
-            <a:extLst>
-              <a:ext uri="{FF2B5EF4-FFF2-40B4-BE49-F238E27FC236}">
-                <a16:creationId xmlns:a16="http://schemas.microsoft.com/office/drawing/2014/main" id="{9E5F7792-7591-4CAF-A97A-FB77DF26D654}"/>
+          <p:cNvPr id="20" name="Picture 19">
+            <a:extLst>
+              <a:ext uri="{FF2B5EF4-FFF2-40B4-BE49-F238E27FC236}">
+                <a16:creationId xmlns:a16="http://schemas.microsoft.com/office/drawing/2014/main" id="{3ACB17B7-0A9F-D5C8-1F67-1EE6DF154057}"/>
               </a:ext>
             </a:extLst>
           </p:cNvPr>
@@ -9124,7 +9912,7 @@
           <p:nvPr/>
         </p:nvPicPr>
         <p:blipFill>
-          <a:blip r:embed="rId3" cstate="email">
+          <a:blip r:embed="rId9" cstate="email">
             <a:extLst>
               <a:ext uri="{28A0092B-C50C-407E-A947-70E740481C1C}">
                 <a14:useLocalDpi xmlns:a14="http://schemas.microsoft.com/office/drawing/2010/main"/>
@@ -9137,169 +9925,177 @@
         </p:blipFill>
         <p:spPr>
           <a:xfrm>
-            <a:off x="8128000" y="2925622"/>
-            <a:ext cx="3777322" cy="3837553"/>
+            <a:off x="8423275" y="4068313"/>
+            <a:ext cx="1949450" cy="1665032"/>
           </a:xfrm>
           <a:prstGeom prst="rect">
             <a:avLst/>
           </a:prstGeom>
         </p:spPr>
       </p:pic>
-      <p:sp>
-        <p:nvSpPr>
-          <p:cNvPr id="4" name="TextBox 3">
-            <a:extLst>
-              <a:ext uri="{FF2B5EF4-FFF2-40B4-BE49-F238E27FC236}">
-                <a16:creationId xmlns:a16="http://schemas.microsoft.com/office/drawing/2014/main" id="{39EA2680-F2F0-1D47-2F79-0153005D4A6E}"/>
-              </a:ext>
-            </a:extLst>
-          </p:cNvPr>
-          <p:cNvSpPr txBox="1"/>
+      <p:pic>
+        <p:nvPicPr>
+          <p:cNvPr id="22" name="Picture 21">
+            <a:extLst>
+              <a:ext uri="{FF2B5EF4-FFF2-40B4-BE49-F238E27FC236}">
+                <a16:creationId xmlns:a16="http://schemas.microsoft.com/office/drawing/2014/main" id="{7D48DB42-DECD-F71C-3704-5FD53587BA7B}"/>
+              </a:ext>
+            </a:extLst>
+          </p:cNvPr>
+          <p:cNvPicPr>
+            <a:picLocks noChangeAspect="1"/>
+          </p:cNvPicPr>
           <p:nvPr/>
-        </p:nvSpPr>
+        </p:nvPicPr>
+        <p:blipFill>
+          <a:blip r:embed="rId10" cstate="email">
+            <a:extLst>
+              <a:ext uri="{28A0092B-C50C-407E-A947-70E740481C1C}">
+                <a14:useLocalDpi xmlns:a14="http://schemas.microsoft.com/office/drawing/2010/main"/>
+              </a:ext>
+            </a:extLst>
+          </a:blip>
+          <a:stretch>
+            <a:fillRect/>
+          </a:stretch>
+        </p:blipFill>
         <p:spPr>
           <a:xfrm>
-            <a:off x="6913390" y="2333152"/>
-            <a:ext cx="3777323" cy="1431161"/>
+            <a:off x="10527943" y="3472745"/>
+            <a:ext cx="1587500" cy="2260600"/>
           </a:xfrm>
           <a:prstGeom prst="rect">
             <a:avLst/>
           </a:prstGeom>
-          <a:noFill/>
-        </p:spPr>
-        <p:txBody>
-          <a:bodyPr wrap="square" rtlCol="0">
-            <a:spAutoFit/>
-          </a:bodyPr>
-          <a:lstStyle/>
-          <a:p>
-            <a:r>
-              <a:rPr lang="en-US" sz="1600" b="1" dirty="0">
-                <a:solidFill>
-                  <a:srgbClr val="FF0000"/>
-                </a:solidFill>
-                <a:latin typeface="Calibri" panose="020F0502020204030204" pitchFamily="34" charset="0"/>
-                <a:cs typeface="Calibri" panose="020F0502020204030204" pitchFamily="34" charset="0"/>
-              </a:rPr>
-              <a:t>Greenworks </a:t>
-            </a:r>
-          </a:p>
-          <a:p>
-            <a:pPr marL="171450" indent="-171450">
-              <a:buFont typeface="Arial" panose="020B0604020202020204" pitchFamily="34" charset="0"/>
-              <a:buChar char="•"/>
-            </a:pPr>
-            <a:r>
-              <a:rPr lang="en-US" sz="1100" dirty="0">
-                <a:latin typeface="Calibri" panose="020F0502020204030204" pitchFamily="34" charset="0"/>
-                <a:cs typeface="Calibri" panose="020F0502020204030204" pitchFamily="34" charset="0"/>
-              </a:rPr>
-              <a:t>80V 12" Cordless Battery LED Snow Shovel </a:t>
-            </a:r>
-          </a:p>
-          <a:p>
-            <a:pPr marL="171450" indent="-171450">
-              <a:buFont typeface="Arial" panose="020B0604020202020204" pitchFamily="34" charset="0"/>
-              <a:buChar char="•"/>
-            </a:pPr>
-            <a:r>
-              <a:rPr lang="en-US" sz="1100" dirty="0">
-                <a:latin typeface="Calibri" panose="020F0502020204030204" pitchFamily="34" charset="0"/>
-                <a:cs typeface="Calibri" panose="020F0502020204030204" pitchFamily="34" charset="0"/>
-              </a:rPr>
-              <a:t>w/ 4.0Ah Battery &amp; 6A Charger</a:t>
-            </a:r>
-          </a:p>
-          <a:p>
-            <a:pPr marL="171450" indent="-171450">
-              <a:buFont typeface="Arial" panose="020B0604020202020204" pitchFamily="34" charset="0"/>
-              <a:buChar char="•"/>
-            </a:pPr>
-            <a:r>
-              <a:rPr lang="en-US" sz="1100" dirty="0">
-                <a:latin typeface="Calibri" panose="020F0502020204030204" pitchFamily="34" charset="0"/>
-                <a:cs typeface="Calibri" panose="020F0502020204030204" pitchFamily="34" charset="0"/>
-                <a:hlinkClick r:id="rId4"/>
-              </a:rPr>
-              <a:t>https://www.greenworkstools.com/products/80v-12-cordless-battery-snow-shovel-w-4-0ah-battery-6a-charger</a:t>
-            </a:r>
-            <a:endParaRPr lang="en-US" sz="1100" dirty="0">
-              <a:latin typeface="Calibri" panose="020F0502020204030204" pitchFamily="34" charset="0"/>
-              <a:cs typeface="Calibri" panose="020F0502020204030204" pitchFamily="34" charset="0"/>
-            </a:endParaRPr>
-          </a:p>
-          <a:p>
-            <a:pPr marL="171450" indent="-171450">
-              <a:buFont typeface="Arial" panose="020B0604020202020204" pitchFamily="34" charset="0"/>
-              <a:buChar char="•"/>
-            </a:pPr>
-            <a:r>
-              <a:rPr lang="en-US" sz="1100" dirty="0">
-                <a:latin typeface="Calibri" panose="020F0502020204030204" pitchFamily="34" charset="0"/>
-                <a:cs typeface="Calibri" panose="020F0502020204030204" pitchFamily="34" charset="0"/>
-                <a:hlinkClick r:id="rId5"/>
-              </a:rPr>
-              <a:t>https://</a:t>
-            </a:r>
-            <a:r>
-              <a:rPr lang="en-US" sz="1100" dirty="0" err="1">
-                <a:latin typeface="Calibri" panose="020F0502020204030204" pitchFamily="34" charset="0"/>
-                <a:cs typeface="Calibri" panose="020F0502020204030204" pitchFamily="34" charset="0"/>
-                <a:hlinkClick r:id="rId5"/>
-              </a:rPr>
-              <a:t>www.youtube.com</a:t>
-            </a:r>
-            <a:r>
-              <a:rPr lang="en-US" sz="1100" dirty="0">
-                <a:latin typeface="Calibri" panose="020F0502020204030204" pitchFamily="34" charset="0"/>
-                <a:cs typeface="Calibri" panose="020F0502020204030204" pitchFamily="34" charset="0"/>
-                <a:hlinkClick r:id="rId5"/>
-              </a:rPr>
-              <a:t>/</a:t>
-            </a:r>
-            <a:r>
-              <a:rPr lang="en-US" sz="1100" dirty="0" err="1">
-                <a:latin typeface="Calibri" panose="020F0502020204030204" pitchFamily="34" charset="0"/>
-                <a:cs typeface="Calibri" panose="020F0502020204030204" pitchFamily="34" charset="0"/>
-                <a:hlinkClick r:id="rId5"/>
-              </a:rPr>
-              <a:t>watch?v</a:t>
-            </a:r>
-            <a:r>
-              <a:rPr lang="en-US" sz="1100" dirty="0">
-                <a:latin typeface="Calibri" panose="020F0502020204030204" pitchFamily="34" charset="0"/>
-                <a:cs typeface="Calibri" panose="020F0502020204030204" pitchFamily="34" charset="0"/>
-                <a:hlinkClick r:id="rId5"/>
-              </a:rPr>
-              <a:t>=0obvIOD0fKY</a:t>
-            </a:r>
-            <a:endParaRPr lang="en-US" sz="1100" dirty="0">
-              <a:latin typeface="Calibri" panose="020F0502020204030204" pitchFamily="34" charset="0"/>
-              <a:cs typeface="Calibri" panose="020F0502020204030204" pitchFamily="34" charset="0"/>
-            </a:endParaRPr>
-          </a:p>
-          <a:p>
-            <a:pPr marL="285750" indent="-285750">
-              <a:buFont typeface="Arial" panose="020B0604020202020204" pitchFamily="34" charset="0"/>
-              <a:buChar char="•"/>
-            </a:pPr>
-            <a:r>
-              <a:rPr lang="en-US" sz="1600" b="1" dirty="0">
-                <a:solidFill>
-                  <a:srgbClr val="FF0000"/>
-                </a:solidFill>
-                <a:latin typeface="Calibri" panose="020F0502020204030204" pitchFamily="34" charset="0"/>
-                <a:cs typeface="Calibri" panose="020F0502020204030204" pitchFamily="34" charset="0"/>
-              </a:rPr>
-              <a:t>$252</a:t>
-            </a:r>
-          </a:p>
-        </p:txBody>
-      </p:sp>
+        </p:spPr>
+      </p:pic>
+      <p:pic>
+        <p:nvPicPr>
+          <p:cNvPr id="23" name="Picture 22">
+            <a:extLst>
+              <a:ext uri="{FF2B5EF4-FFF2-40B4-BE49-F238E27FC236}">
+                <a16:creationId xmlns:a16="http://schemas.microsoft.com/office/drawing/2014/main" id="{40FF0DF2-89F1-C530-8C2E-FADE305D8DD8}"/>
+              </a:ext>
+            </a:extLst>
+          </p:cNvPr>
+          <p:cNvPicPr>
+            <a:picLocks noChangeAspect="1"/>
+          </p:cNvPicPr>
+          <p:nvPr/>
+        </p:nvPicPr>
+        <p:blipFill>
+          <a:blip r:embed="rId11" cstate="email">
+            <a:extLst>
+              <a:ext uri="{28A0092B-C50C-407E-A947-70E740481C1C}">
+                <a14:useLocalDpi xmlns:a14="http://schemas.microsoft.com/office/drawing/2010/main"/>
+              </a:ext>
+            </a:extLst>
+          </a:blip>
+          <a:stretch>
+            <a:fillRect/>
+          </a:stretch>
+        </p:blipFill>
+        <p:spPr>
+          <a:xfrm>
+            <a:off x="4696859" y="198303"/>
+            <a:ext cx="2632111" cy="1325697"/>
+          </a:xfrm>
+          <a:prstGeom prst="rect">
+            <a:avLst/>
+          </a:prstGeom>
+          <a:ln>
+            <a:solidFill>
+              <a:srgbClr val="FF0000"/>
+            </a:solidFill>
+          </a:ln>
+        </p:spPr>
+      </p:pic>
+      <p:pic>
+        <p:nvPicPr>
+          <p:cNvPr id="24" name="Picture 23">
+            <a:extLst>
+              <a:ext uri="{FF2B5EF4-FFF2-40B4-BE49-F238E27FC236}">
+                <a16:creationId xmlns:a16="http://schemas.microsoft.com/office/drawing/2014/main" id="{0DFF0FE5-B491-429E-D62E-0A58FD60CA4D}"/>
+              </a:ext>
+            </a:extLst>
+          </p:cNvPr>
+          <p:cNvPicPr>
+            <a:picLocks noChangeAspect="1"/>
+          </p:cNvPicPr>
+          <p:nvPr/>
+        </p:nvPicPr>
+        <p:blipFill>
+          <a:blip r:embed="rId12" cstate="email">
+            <a:extLst>
+              <a:ext uri="{28A0092B-C50C-407E-A947-70E740481C1C}">
+                <a14:useLocalDpi xmlns:a14="http://schemas.microsoft.com/office/drawing/2010/main"/>
+              </a:ext>
+            </a:extLst>
+          </a:blip>
+          <a:stretch>
+            <a:fillRect/>
+          </a:stretch>
+        </p:blipFill>
+        <p:spPr>
+          <a:xfrm>
+            <a:off x="4749802" y="2029805"/>
+            <a:ext cx="2579169" cy="1832568"/>
+          </a:xfrm>
+          <a:prstGeom prst="rect">
+            <a:avLst/>
+          </a:prstGeom>
+          <a:ln>
+            <a:solidFill>
+              <a:srgbClr val="FF0000"/>
+            </a:solidFill>
+          </a:ln>
+        </p:spPr>
+      </p:pic>
+      <p:pic>
+        <p:nvPicPr>
+          <p:cNvPr id="25" name="Picture 24">
+            <a:extLst>
+              <a:ext uri="{FF2B5EF4-FFF2-40B4-BE49-F238E27FC236}">
+                <a16:creationId xmlns:a16="http://schemas.microsoft.com/office/drawing/2014/main" id="{6B1E62A4-FF2B-BD7A-02E6-474C51F83960}"/>
+              </a:ext>
+            </a:extLst>
+          </p:cNvPr>
+          <p:cNvPicPr>
+            <a:picLocks noChangeAspect="1"/>
+          </p:cNvPicPr>
+          <p:nvPr/>
+        </p:nvPicPr>
+        <p:blipFill>
+          <a:blip r:embed="rId13" cstate="email">
+            <a:extLst>
+              <a:ext uri="{28A0092B-C50C-407E-A947-70E740481C1C}">
+                <a14:useLocalDpi xmlns:a14="http://schemas.microsoft.com/office/drawing/2010/main"/>
+              </a:ext>
+            </a:extLst>
+          </a:blip>
+          <a:stretch>
+            <a:fillRect/>
+          </a:stretch>
+        </p:blipFill>
+        <p:spPr>
+          <a:xfrm>
+            <a:off x="5478870" y="4174015"/>
+            <a:ext cx="1234260" cy="1922597"/>
+          </a:xfrm>
+          <a:prstGeom prst="rect">
+            <a:avLst/>
+          </a:prstGeom>
+          <a:ln>
+            <a:solidFill>
+              <a:srgbClr val="FF0000"/>
+            </a:solidFill>
+          </a:ln>
+        </p:spPr>
+      </p:pic>
     </p:spTree>
     <p:extLst>
       <p:ext uri="{BB962C8B-B14F-4D97-AF65-F5344CB8AC3E}">
-        <p14:creationId xmlns:p14="http://schemas.microsoft.com/office/powerpoint/2010/main" val="3538257692"/>
+        <p14:creationId xmlns:p14="http://schemas.microsoft.com/office/powerpoint/2010/main" val="415699365"/>
       </p:ext>
     </p:extLst>
   </p:cSld>

--- a/snow_plow_blower.pptx
+++ b/snow_plow_blower.pptx
@@ -5,19 +5,20 @@
     <p:sldMasterId id="2147483648" r:id="rId1"/>
   </p:sldMasterIdLst>
   <p:notesMasterIdLst>
-    <p:notesMasterId r:id="rId12"/>
+    <p:notesMasterId r:id="rId13"/>
   </p:notesMasterIdLst>
   <p:sldIdLst>
     <p:sldId id="261" r:id="rId2"/>
     <p:sldId id="262" r:id="rId3"/>
-    <p:sldId id="263" r:id="rId4"/>
-    <p:sldId id="265" r:id="rId5"/>
-    <p:sldId id="269" r:id="rId6"/>
-    <p:sldId id="267" r:id="rId7"/>
-    <p:sldId id="268" r:id="rId8"/>
-    <p:sldId id="264" r:id="rId9"/>
-    <p:sldId id="270" r:id="rId10"/>
-    <p:sldId id="266" r:id="rId11"/>
+    <p:sldId id="271" r:id="rId4"/>
+    <p:sldId id="263" r:id="rId5"/>
+    <p:sldId id="265" r:id="rId6"/>
+    <p:sldId id="269" r:id="rId7"/>
+    <p:sldId id="267" r:id="rId8"/>
+    <p:sldId id="268" r:id="rId9"/>
+    <p:sldId id="264" r:id="rId10"/>
+    <p:sldId id="270" r:id="rId11"/>
+    <p:sldId id="266" r:id="rId12"/>
   </p:sldIdLst>
   <p:sldSz cx="12192000" cy="6858000"/>
   <p:notesSz cx="6858000" cy="9144000"/>
@@ -206,7 +207,7 @@
           <a:p>
             <a:fld id="{25BB0166-7DA8-4040-98E7-81186BCABFDE}" type="datetimeFigureOut">
               <a:rPr lang="en-US" smtClean="0"/>
-              <a:t>2/6/26</a:t>
+              <a:t>2/10/26</a:t>
             </a:fld>
             <a:endParaRPr lang="en-US"/>
           </a:p>
@@ -619,7 +620,7 @@
           <a:lstStyle/>
           <a:p>
             <a:fld id="{5F491023-0B0A-7041-9F06-D25A50EF063B}" type="datetimeFigureOut">
-              <a:t>2/6/26</a:t>
+              <a:t>2/10/26</a:t>
             </a:fld>
             <a:endParaRPr lang="en-US"/>
           </a:p>
@@ -815,7 +816,7 @@
           <a:lstStyle/>
           <a:p>
             <a:fld id="{5F491023-0B0A-7041-9F06-D25A50EF063B}" type="datetimeFigureOut">
-              <a:t>2/6/26</a:t>
+              <a:t>2/10/26</a:t>
             </a:fld>
             <a:endParaRPr lang="en-US"/>
           </a:p>
@@ -1021,7 +1022,7 @@
           <a:lstStyle/>
           <a:p>
             <a:fld id="{5F491023-0B0A-7041-9F06-D25A50EF063B}" type="datetimeFigureOut">
-              <a:t>2/6/26</a:t>
+              <a:t>2/10/26</a:t>
             </a:fld>
             <a:endParaRPr lang="en-US"/>
           </a:p>
@@ -1217,7 +1218,7 @@
           <a:lstStyle/>
           <a:p>
             <a:fld id="{5F491023-0B0A-7041-9F06-D25A50EF063B}" type="datetimeFigureOut">
-              <a:t>2/6/26</a:t>
+              <a:t>2/10/26</a:t>
             </a:fld>
             <a:endParaRPr lang="en-US"/>
           </a:p>
@@ -1490,7 +1491,7 @@
           <a:lstStyle/>
           <a:p>
             <a:fld id="{5F491023-0B0A-7041-9F06-D25A50EF063B}" type="datetimeFigureOut">
-              <a:t>2/6/26</a:t>
+              <a:t>2/10/26</a:t>
             </a:fld>
             <a:endParaRPr lang="en-US"/>
           </a:p>
@@ -1753,7 +1754,7 @@
           <a:lstStyle/>
           <a:p>
             <a:fld id="{5F491023-0B0A-7041-9F06-D25A50EF063B}" type="datetimeFigureOut">
-              <a:t>2/6/26</a:t>
+              <a:t>2/10/26</a:t>
             </a:fld>
             <a:endParaRPr lang="en-US"/>
           </a:p>
@@ -2163,7 +2164,7 @@
           <a:lstStyle/>
           <a:p>
             <a:fld id="{5F491023-0B0A-7041-9F06-D25A50EF063B}" type="datetimeFigureOut">
-              <a:t>2/6/26</a:t>
+              <a:t>2/10/26</a:t>
             </a:fld>
             <a:endParaRPr lang="en-US"/>
           </a:p>
@@ -2302,7 +2303,7 @@
           <a:lstStyle/>
           <a:p>
             <a:fld id="{5F491023-0B0A-7041-9F06-D25A50EF063B}" type="datetimeFigureOut">
-              <a:t>2/6/26</a:t>
+              <a:t>2/10/26</a:t>
             </a:fld>
             <a:endParaRPr lang="en-US"/>
           </a:p>
@@ -2413,7 +2414,7 @@
           <a:lstStyle/>
           <a:p>
             <a:fld id="{5F491023-0B0A-7041-9F06-D25A50EF063B}" type="datetimeFigureOut">
-              <a:t>2/6/26</a:t>
+              <a:t>2/10/26</a:t>
             </a:fld>
             <a:endParaRPr lang="en-US"/>
           </a:p>
@@ -2722,7 +2723,7 @@
           <a:lstStyle/>
           <a:p>
             <a:fld id="{5F491023-0B0A-7041-9F06-D25A50EF063B}" type="datetimeFigureOut">
-              <a:t>2/6/26</a:t>
+              <a:t>2/10/26</a:t>
             </a:fld>
             <a:endParaRPr lang="en-US"/>
           </a:p>
@@ -3008,7 +3009,7 @@
           <a:lstStyle/>
           <a:p>
             <a:fld id="{5F491023-0B0A-7041-9F06-D25A50EF063B}" type="datetimeFigureOut">
-              <a:t>2/6/26</a:t>
+              <a:t>2/10/26</a:t>
             </a:fld>
             <a:endParaRPr lang="en-US"/>
           </a:p>
@@ -3247,7 +3248,7 @@
           </a:lstStyle>
           <a:p>
             <a:fld id="{5F491023-0B0A-7041-9F06-D25A50EF063B}" type="datetimeFigureOut">
-              <a:t>2/6/26</a:t>
+              <a:t>2/10/26</a:t>
             </a:fld>
             <a:endParaRPr lang="en-US"/>
           </a:p>
@@ -4208,6 +4209,711 @@
         <p:cNvPr id="1" name="">
           <a:extLst>
             <a:ext uri="{FF2B5EF4-FFF2-40B4-BE49-F238E27FC236}">
+              <a16:creationId xmlns:a16="http://schemas.microsoft.com/office/drawing/2014/main" id="{1545F99A-9A76-0D4B-7909-5BEEC960A928}"/>
+            </a:ext>
+          </a:extLst>
+        </p:cNvPr>
+        <p:cNvGrpSpPr/>
+        <p:nvPr/>
+      </p:nvGrpSpPr>
+      <p:grpSpPr>
+        <a:xfrm>
+          <a:off x="0" y="0"/>
+          <a:ext cx="0" cy="0"/>
+          <a:chOff x="0" y="0"/>
+          <a:chExt cx="0" cy="0"/>
+        </a:xfrm>
+      </p:grpSpPr>
+      <p:sp>
+        <p:nvSpPr>
+          <p:cNvPr id="2" name="TextBox 1">
+            <a:extLst>
+              <a:ext uri="{FF2B5EF4-FFF2-40B4-BE49-F238E27FC236}">
+                <a16:creationId xmlns:a16="http://schemas.microsoft.com/office/drawing/2014/main" id="{4EA4FDA6-CDAC-9BCC-3C0C-F323B968C36A}"/>
+              </a:ext>
+            </a:extLst>
+          </p:cNvPr>
+          <p:cNvSpPr txBox="1"/>
+          <p:nvPr/>
+        </p:nvSpPr>
+        <p:spPr>
+          <a:xfrm>
+            <a:off x="143219" y="198303"/>
+            <a:ext cx="3819182" cy="738664"/>
+          </a:xfrm>
+          <a:prstGeom prst="rect">
+            <a:avLst/>
+          </a:prstGeom>
+          <a:solidFill>
+            <a:schemeClr val="accent4">
+              <a:lumMod val="20000"/>
+              <a:lumOff val="80000"/>
+            </a:schemeClr>
+          </a:solidFill>
+          <a:ln>
+            <a:solidFill>
+              <a:srgbClr val="FF0000"/>
+            </a:solidFill>
+          </a:ln>
+        </p:spPr>
+        <p:txBody>
+          <a:bodyPr wrap="square" rtlCol="0">
+            <a:spAutoFit/>
+          </a:bodyPr>
+          <a:lstStyle/>
+          <a:p>
+            <a:r>
+              <a:rPr lang="en-US" dirty="0"/>
+              <a:t>Snow Tamers</a:t>
+            </a:r>
+          </a:p>
+          <a:p>
+            <a:r>
+              <a:rPr lang="en-US" sz="1200" dirty="0">
+                <a:hlinkClick r:id="rId2"/>
+              </a:rPr>
+              <a:t>https://www.r2manufacturing.com</a:t>
+            </a:r>
+            <a:endParaRPr lang="en-US" sz="1200" dirty="0"/>
+          </a:p>
+          <a:p>
+            <a:r>
+              <a:rPr lang="en-US" sz="1200" dirty="0">
+                <a:hlinkClick r:id="rId3"/>
+              </a:rPr>
+              <a:t>https://</a:t>
+            </a:r>
+            <a:r>
+              <a:rPr lang="en-US" sz="1200" dirty="0" err="1">
+                <a:hlinkClick r:id="rId3"/>
+              </a:rPr>
+              <a:t>www.youtube.com</a:t>
+            </a:r>
+            <a:r>
+              <a:rPr lang="en-US" sz="1200" dirty="0">
+                <a:hlinkClick r:id="rId3"/>
+              </a:rPr>
+              <a:t>/</a:t>
+            </a:r>
+            <a:r>
+              <a:rPr lang="en-US" sz="1200" dirty="0" err="1">
+                <a:hlinkClick r:id="rId3"/>
+              </a:rPr>
+              <a:t>watch?v</a:t>
+            </a:r>
+            <a:r>
+              <a:rPr lang="en-US" sz="1200" dirty="0">
+                <a:hlinkClick r:id="rId3"/>
+              </a:rPr>
+              <a:t>=5VuD0MhxcQ0</a:t>
+            </a:r>
+            <a:endParaRPr lang="en-US" sz="1200" dirty="0"/>
+          </a:p>
+        </p:txBody>
+      </p:sp>
+      <p:sp>
+        <p:nvSpPr>
+          <p:cNvPr id="12" name="TextBox 11">
+            <a:extLst>
+              <a:ext uri="{FF2B5EF4-FFF2-40B4-BE49-F238E27FC236}">
+                <a16:creationId xmlns:a16="http://schemas.microsoft.com/office/drawing/2014/main" id="{7A6C7CEA-91BC-1EA0-3719-3E53253B3B07}"/>
+              </a:ext>
+            </a:extLst>
+          </p:cNvPr>
+          <p:cNvSpPr txBox="1"/>
+          <p:nvPr/>
+        </p:nvSpPr>
+        <p:spPr>
+          <a:xfrm>
+            <a:off x="76557" y="1098976"/>
+            <a:ext cx="4394914" cy="4493538"/>
+          </a:xfrm>
+          <a:prstGeom prst="rect">
+            <a:avLst/>
+          </a:prstGeom>
+          <a:solidFill>
+            <a:schemeClr val="accent4">
+              <a:lumMod val="20000"/>
+              <a:lumOff val="80000"/>
+            </a:schemeClr>
+          </a:solidFill>
+          <a:ln>
+            <a:solidFill>
+              <a:srgbClr val="FF0000"/>
+            </a:solidFill>
+          </a:ln>
+        </p:spPr>
+        <p:txBody>
+          <a:bodyPr wrap="square" rtlCol="0">
+            <a:spAutoFit/>
+          </a:bodyPr>
+          <a:lstStyle/>
+          <a:p>
+            <a:r>
+              <a:rPr lang="en-US" sz="1100" dirty="0">
+                <a:latin typeface="Calibri" panose="020F0502020204030204" pitchFamily="34" charset="0"/>
+                <a:cs typeface="Calibri" panose="020F0502020204030204" pitchFamily="34" charset="0"/>
+              </a:rPr>
+              <a:t>Plowing snow on gravel</a:t>
+            </a:r>
+          </a:p>
+          <a:p>
+            <a:r>
+              <a:rPr lang="en-US" sz="1100" dirty="0">
+                <a:latin typeface="Calibri" panose="020F0502020204030204" pitchFamily="34" charset="0"/>
+                <a:cs typeface="Calibri" panose="020F0502020204030204" pitchFamily="34" charset="0"/>
+              </a:rPr>
+              <a:t>Using tube at the bottom of the snow blade</a:t>
+            </a:r>
+          </a:p>
+          <a:p>
+            <a:endParaRPr lang="en-US" sz="1100" dirty="0">
+              <a:latin typeface="Calibri" panose="020F0502020204030204" pitchFamily="34" charset="0"/>
+              <a:cs typeface="Calibri" panose="020F0502020204030204" pitchFamily="34" charset="0"/>
+            </a:endParaRPr>
+          </a:p>
+          <a:p>
+            <a:r>
+              <a:rPr lang="en-US" sz="1100" dirty="0">
+                <a:latin typeface="Calibri" panose="020F0502020204030204" pitchFamily="34" charset="0"/>
+                <a:cs typeface="Calibri" panose="020F0502020204030204" pitchFamily="34" charset="0"/>
+                <a:hlinkClick r:id="rId4"/>
+              </a:rPr>
+              <a:t>https://</a:t>
+            </a:r>
+            <a:r>
+              <a:rPr lang="en-US" sz="1100" dirty="0" err="1">
+                <a:latin typeface="Calibri" panose="020F0502020204030204" pitchFamily="34" charset="0"/>
+                <a:cs typeface="Calibri" panose="020F0502020204030204" pitchFamily="34" charset="0"/>
+                <a:hlinkClick r:id="rId4"/>
+              </a:rPr>
+              <a:t>www.youtube.com</a:t>
+            </a:r>
+            <a:r>
+              <a:rPr lang="en-US" sz="1100" dirty="0">
+                <a:latin typeface="Calibri" panose="020F0502020204030204" pitchFamily="34" charset="0"/>
+                <a:cs typeface="Calibri" panose="020F0502020204030204" pitchFamily="34" charset="0"/>
+                <a:hlinkClick r:id="rId4"/>
+              </a:rPr>
+              <a:t>/</a:t>
+            </a:r>
+            <a:r>
+              <a:rPr lang="en-US" sz="1100" dirty="0" err="1">
+                <a:latin typeface="Calibri" panose="020F0502020204030204" pitchFamily="34" charset="0"/>
+                <a:cs typeface="Calibri" panose="020F0502020204030204" pitchFamily="34" charset="0"/>
+                <a:hlinkClick r:id="rId4"/>
+              </a:rPr>
+              <a:t>watch?v</a:t>
+            </a:r>
+            <a:r>
+              <a:rPr lang="en-US" sz="1100" dirty="0">
+                <a:latin typeface="Calibri" panose="020F0502020204030204" pitchFamily="34" charset="0"/>
+                <a:cs typeface="Calibri" panose="020F0502020204030204" pitchFamily="34" charset="0"/>
+                <a:hlinkClick r:id="rId4"/>
+              </a:rPr>
+              <a:t>=K8zB1X35QtI</a:t>
+            </a:r>
+            <a:endParaRPr lang="en-US" sz="1100" dirty="0">
+              <a:latin typeface="Calibri" panose="020F0502020204030204" pitchFamily="34" charset="0"/>
+              <a:cs typeface="Calibri" panose="020F0502020204030204" pitchFamily="34" charset="0"/>
+            </a:endParaRPr>
+          </a:p>
+          <a:p>
+            <a:r>
+              <a:rPr lang="en-US" sz="1100" dirty="0">
+                <a:latin typeface="Calibri" panose="020F0502020204030204" pitchFamily="34" charset="0"/>
+                <a:cs typeface="Calibri" panose="020F0502020204030204" pitchFamily="34" charset="0"/>
+              </a:rPr>
+              <a:t>He uses 1-3/8" galvanized steel fence top rail.</a:t>
+            </a:r>
+          </a:p>
+          <a:p>
+            <a:r>
+              <a:rPr lang="en-US" sz="1100" dirty="0">
+                <a:latin typeface="Calibri" panose="020F0502020204030204" pitchFamily="34" charset="0"/>
+                <a:cs typeface="Calibri" panose="020F0502020204030204" pitchFamily="34" charset="0"/>
+              </a:rPr>
+              <a:t>It is a galvanized steel pipe.</a:t>
+            </a:r>
+          </a:p>
+          <a:p>
+            <a:r>
+              <a:rPr lang="en-US" sz="1100" dirty="0">
+                <a:latin typeface="Calibri" panose="020F0502020204030204" pitchFamily="34" charset="0"/>
+                <a:cs typeface="Calibri" panose="020F0502020204030204" pitchFamily="34" charset="0"/>
+              </a:rPr>
+              <a:t>Sizes (diameter):</a:t>
+            </a:r>
+          </a:p>
+          <a:p>
+            <a:r>
+              <a:rPr lang="en-US" sz="1100" dirty="0">
+                <a:latin typeface="Calibri" panose="020F0502020204030204" pitchFamily="34" charset="0"/>
+                <a:cs typeface="Calibri" panose="020F0502020204030204" pitchFamily="34" charset="0"/>
+              </a:rPr>
+              <a:t>  1 1/4"</a:t>
+            </a:r>
+          </a:p>
+          <a:p>
+            <a:r>
+              <a:rPr lang="en-US" sz="1100" dirty="0">
+                <a:latin typeface="Calibri" panose="020F0502020204030204" pitchFamily="34" charset="0"/>
+                <a:cs typeface="Calibri" panose="020F0502020204030204" pitchFamily="34" charset="0"/>
+              </a:rPr>
+              <a:t>  1-3/8"</a:t>
+            </a:r>
+          </a:p>
+          <a:p>
+            <a:r>
+              <a:rPr lang="en-US" sz="1100" dirty="0">
+                <a:latin typeface="Calibri" panose="020F0502020204030204" pitchFamily="34" charset="0"/>
+                <a:cs typeface="Calibri" panose="020F0502020204030204" pitchFamily="34" charset="0"/>
+              </a:rPr>
+              <a:t>  1 1/2"</a:t>
+            </a:r>
+          </a:p>
+          <a:p>
+            <a:r>
+              <a:rPr lang="en-US" sz="1100" dirty="0">
+                <a:latin typeface="Calibri" panose="020F0502020204030204" pitchFamily="34" charset="0"/>
+                <a:cs typeface="Calibri" panose="020F0502020204030204" pitchFamily="34" charset="0"/>
+              </a:rPr>
+              <a:t>In this video he used size 1-3/8"</a:t>
+            </a:r>
+          </a:p>
+          <a:p>
+            <a:endParaRPr lang="en-US" sz="1100" dirty="0">
+              <a:latin typeface="Calibri" panose="020F0502020204030204" pitchFamily="34" charset="0"/>
+              <a:cs typeface="Calibri" panose="020F0502020204030204" pitchFamily="34" charset="0"/>
+            </a:endParaRPr>
+          </a:p>
+          <a:p>
+            <a:r>
+              <a:rPr lang="en-US" sz="1100" dirty="0">
+                <a:latin typeface="Calibri" panose="020F0502020204030204" pitchFamily="34" charset="0"/>
+                <a:cs typeface="Calibri" panose="020F0502020204030204" pitchFamily="34" charset="0"/>
+              </a:rPr>
+              <a:t>Even better solution - replaceable :</a:t>
+            </a:r>
+          </a:p>
+          <a:p>
+            <a:r>
+              <a:rPr lang="en-US" sz="1100" dirty="0">
+                <a:latin typeface="Calibri" panose="020F0502020204030204" pitchFamily="34" charset="0"/>
+                <a:cs typeface="Calibri" panose="020F0502020204030204" pitchFamily="34" charset="0"/>
+                <a:hlinkClick r:id="rId5"/>
+              </a:rPr>
+              <a:t>https://www.youtube.com/</a:t>
+            </a:r>
+            <a:r>
+              <a:rPr lang="en-US" sz="1100" dirty="0" err="1">
+                <a:latin typeface="Calibri" panose="020F0502020204030204" pitchFamily="34" charset="0"/>
+                <a:cs typeface="Calibri" panose="020F0502020204030204" pitchFamily="34" charset="0"/>
+                <a:hlinkClick r:id="rId5"/>
+              </a:rPr>
+              <a:t>watch?v</a:t>
+            </a:r>
+            <a:r>
+              <a:rPr lang="en-US" sz="1100" dirty="0">
+                <a:latin typeface="Calibri" panose="020F0502020204030204" pitchFamily="34" charset="0"/>
+                <a:cs typeface="Calibri" panose="020F0502020204030204" pitchFamily="34" charset="0"/>
+                <a:hlinkClick r:id="rId5"/>
+              </a:rPr>
+              <a:t>=</a:t>
+            </a:r>
+            <a:r>
+              <a:rPr lang="en-US" sz="1100" dirty="0" err="1">
+                <a:latin typeface="Calibri" panose="020F0502020204030204" pitchFamily="34" charset="0"/>
+                <a:cs typeface="Calibri" panose="020F0502020204030204" pitchFamily="34" charset="0"/>
+                <a:hlinkClick r:id="rId5"/>
+              </a:rPr>
+              <a:t>wCxOjqdGEjw</a:t>
+            </a:r>
+            <a:endParaRPr lang="en-US" sz="1100" dirty="0">
+              <a:latin typeface="Calibri" panose="020F0502020204030204" pitchFamily="34" charset="0"/>
+              <a:cs typeface="Calibri" panose="020F0502020204030204" pitchFamily="34" charset="0"/>
+            </a:endParaRPr>
+          </a:p>
+          <a:p>
+            <a:endParaRPr lang="en-US" sz="1100" dirty="0">
+              <a:latin typeface="Calibri" panose="020F0502020204030204" pitchFamily="34" charset="0"/>
+              <a:cs typeface="Calibri" panose="020F0502020204030204" pitchFamily="34" charset="0"/>
+            </a:endParaRPr>
+          </a:p>
+          <a:p>
+            <a:r>
+              <a:rPr lang="en-US" sz="1100" dirty="0">
+                <a:latin typeface="Calibri" panose="020F0502020204030204" pitchFamily="34" charset="0"/>
+                <a:cs typeface="Calibri" panose="020F0502020204030204" pitchFamily="34" charset="0"/>
+              </a:rPr>
+              <a:t>Yet another one ( steel pipe 2 in inner, 2 3/8 outer, and 3/16 thick):</a:t>
+            </a:r>
+          </a:p>
+          <a:p>
+            <a:r>
+              <a:rPr lang="en-US" sz="1100" dirty="0">
+                <a:latin typeface="Calibri" panose="020F0502020204030204" pitchFamily="34" charset="0"/>
+                <a:cs typeface="Calibri" panose="020F0502020204030204" pitchFamily="34" charset="0"/>
+                <a:hlinkClick r:id="rId6"/>
+              </a:rPr>
+              <a:t>https://www.youtube.com/watch?v=</a:t>
+            </a:r>
+            <a:r>
+              <a:rPr lang="en-US" sz="1100" dirty="0" err="1">
+                <a:latin typeface="Calibri" panose="020F0502020204030204" pitchFamily="34" charset="0"/>
+                <a:cs typeface="Calibri" panose="020F0502020204030204" pitchFamily="34" charset="0"/>
+                <a:hlinkClick r:id="rId6"/>
+              </a:rPr>
+              <a:t>MVhIKQvNplc</a:t>
+            </a:r>
+            <a:endParaRPr lang="en-US" sz="1100" dirty="0">
+              <a:latin typeface="Calibri" panose="020F0502020204030204" pitchFamily="34" charset="0"/>
+              <a:cs typeface="Calibri" panose="020F0502020204030204" pitchFamily="34" charset="0"/>
+            </a:endParaRPr>
+          </a:p>
+          <a:p>
+            <a:endParaRPr lang="en-US" sz="1100" dirty="0">
+              <a:latin typeface="Calibri" panose="020F0502020204030204" pitchFamily="34" charset="0"/>
+              <a:cs typeface="Calibri" panose="020F0502020204030204" pitchFamily="34" charset="0"/>
+            </a:endParaRPr>
+          </a:p>
+          <a:p>
+            <a:r>
+              <a:rPr lang="en-US" sz="1100" dirty="0">
+                <a:latin typeface="Calibri" panose="020F0502020204030204" pitchFamily="34" charset="0"/>
+                <a:cs typeface="Calibri" panose="020F0502020204030204" pitchFamily="34" charset="0"/>
+              </a:rPr>
+              <a:t>Some people attach using chain</a:t>
+            </a:r>
+          </a:p>
+          <a:p>
+            <a:endParaRPr lang="en-US" sz="1100" dirty="0">
+              <a:latin typeface="Calibri" panose="020F0502020204030204" pitchFamily="34" charset="0"/>
+              <a:cs typeface="Calibri" panose="020F0502020204030204" pitchFamily="34" charset="0"/>
+            </a:endParaRPr>
+          </a:p>
+          <a:p>
+            <a:r>
+              <a:rPr lang="en-US" sz="1100" dirty="0">
+                <a:latin typeface="Calibri" panose="020F0502020204030204" pitchFamily="34" charset="0"/>
+                <a:cs typeface="Calibri" panose="020F0502020204030204" pitchFamily="34" charset="0"/>
+                <a:hlinkClick r:id="rId7"/>
+              </a:rPr>
+              <a:t>https://www.youtube.com/</a:t>
+            </a:r>
+            <a:r>
+              <a:rPr lang="en-US" sz="1100" dirty="0" err="1">
+                <a:latin typeface="Calibri" panose="020F0502020204030204" pitchFamily="34" charset="0"/>
+                <a:cs typeface="Calibri" panose="020F0502020204030204" pitchFamily="34" charset="0"/>
+                <a:hlinkClick r:id="rId7"/>
+              </a:rPr>
+              <a:t>watch?v</a:t>
+            </a:r>
+            <a:r>
+              <a:rPr lang="en-US" sz="1100" dirty="0">
+                <a:latin typeface="Calibri" panose="020F0502020204030204" pitchFamily="34" charset="0"/>
+                <a:cs typeface="Calibri" panose="020F0502020204030204" pitchFamily="34" charset="0"/>
+                <a:hlinkClick r:id="rId7"/>
+              </a:rPr>
+              <a:t>=</a:t>
+            </a:r>
+            <a:r>
+              <a:rPr lang="en-US" sz="1100" dirty="0" err="1">
+                <a:latin typeface="Calibri" panose="020F0502020204030204" pitchFamily="34" charset="0"/>
+                <a:cs typeface="Calibri" panose="020F0502020204030204" pitchFamily="34" charset="0"/>
+                <a:hlinkClick r:id="rId7"/>
+              </a:rPr>
+              <a:t>ublecStrYAE</a:t>
+            </a:r>
+            <a:endParaRPr lang="en-US" sz="1100" dirty="0">
+              <a:latin typeface="Calibri" panose="020F0502020204030204" pitchFamily="34" charset="0"/>
+              <a:cs typeface="Calibri" panose="020F0502020204030204" pitchFamily="34" charset="0"/>
+            </a:endParaRPr>
+          </a:p>
+          <a:p>
+            <a:endParaRPr lang="en-US" sz="1100" dirty="0">
+              <a:latin typeface="Calibri" panose="020F0502020204030204" pitchFamily="34" charset="0"/>
+              <a:cs typeface="Calibri" panose="020F0502020204030204" pitchFamily="34" charset="0"/>
+            </a:endParaRPr>
+          </a:p>
+          <a:p>
+            <a:r>
+              <a:rPr lang="en-US" sz="1100" dirty="0">
+                <a:latin typeface="Calibri" panose="020F0502020204030204" pitchFamily="34" charset="0"/>
+                <a:cs typeface="Calibri" panose="020F0502020204030204" pitchFamily="34" charset="0"/>
+              </a:rPr>
+              <a:t>Yet another way to attach it.</a:t>
+            </a:r>
+          </a:p>
+          <a:p>
+            <a:r>
+              <a:rPr lang="en-US" sz="1100" dirty="0">
+                <a:latin typeface="Calibri" panose="020F0502020204030204" pitchFamily="34" charset="0"/>
+                <a:cs typeface="Calibri" panose="020F0502020204030204" pitchFamily="34" charset="0"/>
+              </a:rPr>
+              <a:t>He welds steel brackets with holes to the pipe that align with the plow's existing mounting bolts.</a:t>
+            </a:r>
+          </a:p>
+          <a:p>
+            <a:endParaRPr lang="en-US" sz="1100" dirty="0">
+              <a:latin typeface="Calibri" panose="020F0502020204030204" pitchFamily="34" charset="0"/>
+              <a:cs typeface="Calibri" panose="020F0502020204030204" pitchFamily="34" charset="0"/>
+            </a:endParaRPr>
+          </a:p>
+        </p:txBody>
+      </p:sp>
+      <p:pic>
+        <p:nvPicPr>
+          <p:cNvPr id="9" name="Picture 8">
+            <a:extLst>
+              <a:ext uri="{FF2B5EF4-FFF2-40B4-BE49-F238E27FC236}">
+                <a16:creationId xmlns:a16="http://schemas.microsoft.com/office/drawing/2014/main" id="{FEDB6647-A377-F039-E331-124636F83F3E}"/>
+              </a:ext>
+            </a:extLst>
+          </p:cNvPr>
+          <p:cNvPicPr>
+            <a:picLocks noChangeAspect="1"/>
+          </p:cNvPicPr>
+          <p:nvPr/>
+        </p:nvPicPr>
+        <p:blipFill>
+          <a:blip r:embed="rId8" cstate="email">
+            <a:extLst>
+              <a:ext uri="{28A0092B-C50C-407E-A947-70E740481C1C}">
+                <a14:useLocalDpi xmlns:a14="http://schemas.microsoft.com/office/drawing/2010/main"/>
+              </a:ext>
+            </a:extLst>
+          </a:blip>
+          <a:stretch>
+            <a:fillRect/>
+          </a:stretch>
+        </p:blipFill>
+        <p:spPr>
+          <a:xfrm>
+            <a:off x="7442199" y="198303"/>
+            <a:ext cx="4555781" cy="2294578"/>
+          </a:xfrm>
+          <a:prstGeom prst="rect">
+            <a:avLst/>
+          </a:prstGeom>
+        </p:spPr>
+      </p:pic>
+      <p:pic>
+        <p:nvPicPr>
+          <p:cNvPr id="20" name="Picture 19">
+            <a:extLst>
+              <a:ext uri="{FF2B5EF4-FFF2-40B4-BE49-F238E27FC236}">
+                <a16:creationId xmlns:a16="http://schemas.microsoft.com/office/drawing/2014/main" id="{3ACB17B7-0A9F-D5C8-1F67-1EE6DF154057}"/>
+              </a:ext>
+            </a:extLst>
+          </p:cNvPr>
+          <p:cNvPicPr>
+            <a:picLocks noChangeAspect="1"/>
+          </p:cNvPicPr>
+          <p:nvPr/>
+        </p:nvPicPr>
+        <p:blipFill>
+          <a:blip r:embed="rId9" cstate="email">
+            <a:extLst>
+              <a:ext uri="{28A0092B-C50C-407E-A947-70E740481C1C}">
+                <a14:useLocalDpi xmlns:a14="http://schemas.microsoft.com/office/drawing/2010/main"/>
+              </a:ext>
+            </a:extLst>
+          </a:blip>
+          <a:stretch>
+            <a:fillRect/>
+          </a:stretch>
+        </p:blipFill>
+        <p:spPr>
+          <a:xfrm>
+            <a:off x="8423275" y="4068313"/>
+            <a:ext cx="1949450" cy="1665032"/>
+          </a:xfrm>
+          <a:prstGeom prst="rect">
+            <a:avLst/>
+          </a:prstGeom>
+        </p:spPr>
+      </p:pic>
+      <p:pic>
+        <p:nvPicPr>
+          <p:cNvPr id="22" name="Picture 21">
+            <a:extLst>
+              <a:ext uri="{FF2B5EF4-FFF2-40B4-BE49-F238E27FC236}">
+                <a16:creationId xmlns:a16="http://schemas.microsoft.com/office/drawing/2014/main" id="{7D48DB42-DECD-F71C-3704-5FD53587BA7B}"/>
+              </a:ext>
+            </a:extLst>
+          </p:cNvPr>
+          <p:cNvPicPr>
+            <a:picLocks noChangeAspect="1"/>
+          </p:cNvPicPr>
+          <p:nvPr/>
+        </p:nvPicPr>
+        <p:blipFill>
+          <a:blip r:embed="rId10" cstate="email">
+            <a:extLst>
+              <a:ext uri="{28A0092B-C50C-407E-A947-70E740481C1C}">
+                <a14:useLocalDpi xmlns:a14="http://schemas.microsoft.com/office/drawing/2010/main"/>
+              </a:ext>
+            </a:extLst>
+          </a:blip>
+          <a:stretch>
+            <a:fillRect/>
+          </a:stretch>
+        </p:blipFill>
+        <p:spPr>
+          <a:xfrm>
+            <a:off x="10527943" y="3472745"/>
+            <a:ext cx="1587500" cy="2260600"/>
+          </a:xfrm>
+          <a:prstGeom prst="rect">
+            <a:avLst/>
+          </a:prstGeom>
+        </p:spPr>
+      </p:pic>
+      <p:pic>
+        <p:nvPicPr>
+          <p:cNvPr id="23" name="Picture 22">
+            <a:extLst>
+              <a:ext uri="{FF2B5EF4-FFF2-40B4-BE49-F238E27FC236}">
+                <a16:creationId xmlns:a16="http://schemas.microsoft.com/office/drawing/2014/main" id="{40FF0DF2-89F1-C530-8C2E-FADE305D8DD8}"/>
+              </a:ext>
+            </a:extLst>
+          </p:cNvPr>
+          <p:cNvPicPr>
+            <a:picLocks noChangeAspect="1"/>
+          </p:cNvPicPr>
+          <p:nvPr/>
+        </p:nvPicPr>
+        <p:blipFill>
+          <a:blip r:embed="rId11" cstate="email">
+            <a:extLst>
+              <a:ext uri="{28A0092B-C50C-407E-A947-70E740481C1C}">
+                <a14:useLocalDpi xmlns:a14="http://schemas.microsoft.com/office/drawing/2010/main"/>
+              </a:ext>
+            </a:extLst>
+          </a:blip>
+          <a:stretch>
+            <a:fillRect/>
+          </a:stretch>
+        </p:blipFill>
+        <p:spPr>
+          <a:xfrm>
+            <a:off x="4696859" y="198303"/>
+            <a:ext cx="2632111" cy="1325697"/>
+          </a:xfrm>
+          <a:prstGeom prst="rect">
+            <a:avLst/>
+          </a:prstGeom>
+          <a:ln>
+            <a:solidFill>
+              <a:srgbClr val="FF0000"/>
+            </a:solidFill>
+          </a:ln>
+        </p:spPr>
+      </p:pic>
+      <p:pic>
+        <p:nvPicPr>
+          <p:cNvPr id="24" name="Picture 23">
+            <a:extLst>
+              <a:ext uri="{FF2B5EF4-FFF2-40B4-BE49-F238E27FC236}">
+                <a16:creationId xmlns:a16="http://schemas.microsoft.com/office/drawing/2014/main" id="{0DFF0FE5-B491-429E-D62E-0A58FD60CA4D}"/>
+              </a:ext>
+            </a:extLst>
+          </p:cNvPr>
+          <p:cNvPicPr>
+            <a:picLocks noChangeAspect="1"/>
+          </p:cNvPicPr>
+          <p:nvPr/>
+        </p:nvPicPr>
+        <p:blipFill>
+          <a:blip r:embed="rId12" cstate="email">
+            <a:extLst>
+              <a:ext uri="{28A0092B-C50C-407E-A947-70E740481C1C}">
+                <a14:useLocalDpi xmlns:a14="http://schemas.microsoft.com/office/drawing/2010/main"/>
+              </a:ext>
+            </a:extLst>
+          </a:blip>
+          <a:stretch>
+            <a:fillRect/>
+          </a:stretch>
+        </p:blipFill>
+        <p:spPr>
+          <a:xfrm>
+            <a:off x="4749802" y="2029805"/>
+            <a:ext cx="2579169" cy="1832568"/>
+          </a:xfrm>
+          <a:prstGeom prst="rect">
+            <a:avLst/>
+          </a:prstGeom>
+          <a:ln>
+            <a:solidFill>
+              <a:srgbClr val="FF0000"/>
+            </a:solidFill>
+          </a:ln>
+        </p:spPr>
+      </p:pic>
+      <p:pic>
+        <p:nvPicPr>
+          <p:cNvPr id="25" name="Picture 24">
+            <a:extLst>
+              <a:ext uri="{FF2B5EF4-FFF2-40B4-BE49-F238E27FC236}">
+                <a16:creationId xmlns:a16="http://schemas.microsoft.com/office/drawing/2014/main" id="{6B1E62A4-FF2B-BD7A-02E6-474C51F83960}"/>
+              </a:ext>
+            </a:extLst>
+          </p:cNvPr>
+          <p:cNvPicPr>
+            <a:picLocks noChangeAspect="1"/>
+          </p:cNvPicPr>
+          <p:nvPr/>
+        </p:nvPicPr>
+        <p:blipFill>
+          <a:blip r:embed="rId13" cstate="email">
+            <a:extLst>
+              <a:ext uri="{28A0092B-C50C-407E-A947-70E740481C1C}">
+                <a14:useLocalDpi xmlns:a14="http://schemas.microsoft.com/office/drawing/2010/main"/>
+              </a:ext>
+            </a:extLst>
+          </a:blip>
+          <a:stretch>
+            <a:fillRect/>
+          </a:stretch>
+        </p:blipFill>
+        <p:spPr>
+          <a:xfrm>
+            <a:off x="5478870" y="4174015"/>
+            <a:ext cx="1234260" cy="1922597"/>
+          </a:xfrm>
+          <a:prstGeom prst="rect">
+            <a:avLst/>
+          </a:prstGeom>
+          <a:ln>
+            <a:solidFill>
+              <a:srgbClr val="FF0000"/>
+            </a:solidFill>
+          </a:ln>
+        </p:spPr>
+      </p:pic>
+    </p:spTree>
+    <p:extLst>
+      <p:ext uri="{BB962C8B-B14F-4D97-AF65-F5344CB8AC3E}">
+        <p14:creationId xmlns:p14="http://schemas.microsoft.com/office/powerpoint/2010/main" val="415699365"/>
+      </p:ext>
+    </p:extLst>
+  </p:cSld>
+  <p:clrMapOvr>
+    <a:masterClrMapping/>
+  </p:clrMapOvr>
+</p:sld>
+</file>
+
+<file path=ppt/slides/slide11.xml><?xml version="1.0" encoding="utf-8"?>
+<p:sld xmlns:a="http://schemas.openxmlformats.org/drawingml/2006/main" xmlns:r="http://schemas.openxmlformats.org/officeDocument/2006/relationships" xmlns:p="http://schemas.openxmlformats.org/presentationml/2006/main">
+  <p:cSld>
+    <p:spTree>
+      <p:nvGrpSpPr>
+        <p:cNvPr id="1" name="">
+          <a:extLst>
+            <a:ext uri="{FF2B5EF4-FFF2-40B4-BE49-F238E27FC236}">
               <a16:creationId xmlns:a16="http://schemas.microsoft.com/office/drawing/2014/main" id="{84AC1C7A-0E76-ABB4-D69F-724A22AA8CB3}"/>
             </a:ext>
           </a:extLst>
@@ -6407,7 +7113,7 @@
     </p:spTree>
     <p:extLst>
       <p:ext uri="{BB962C8B-B14F-4D97-AF65-F5344CB8AC3E}">
-        <p14:creationId xmlns:p14="http://schemas.microsoft.com/office/powerpoint/2010/main" val="1462267718"/>
+        <p14:creationId xmlns:p14="http://schemas.microsoft.com/office/powerpoint/2010/main" val="54129809"/>
       </p:ext>
     </p:extLst>
   </p:cSld>
@@ -6448,6 +7154,114 @@
         </p:nvSpPr>
         <p:spPr>
           <a:xfrm>
+            <a:off x="143219" y="198304"/>
+            <a:ext cx="5508434" cy="646331"/>
+          </a:xfrm>
+          <a:prstGeom prst="rect">
+            <a:avLst/>
+          </a:prstGeom>
+          <a:noFill/>
+        </p:spPr>
+        <p:txBody>
+          <a:bodyPr wrap="square" rtlCol="0">
+            <a:spAutoFit/>
+          </a:bodyPr>
+          <a:lstStyle/>
+          <a:p>
+            <a:r>
+              <a:rPr lang="en-US" dirty="0"/>
+              <a:t>Kress KG471 professional-grade 60V battery-powered </a:t>
+            </a:r>
+            <a:br>
+              <a:rPr lang="en-US" dirty="0"/>
+            </a:br>
+            <a:r>
+              <a:rPr lang="en-US" dirty="0"/>
+              <a:t>2-stage snow blower</a:t>
+            </a:r>
+          </a:p>
+        </p:txBody>
+      </p:sp>
+      <p:pic>
+        <p:nvPicPr>
+          <p:cNvPr id="3" name="Picture 2">
+            <a:extLst>
+              <a:ext uri="{FF2B5EF4-FFF2-40B4-BE49-F238E27FC236}">
+                <a16:creationId xmlns:a16="http://schemas.microsoft.com/office/drawing/2014/main" id="{CD0C8BAE-3A25-33A0-B6D5-34DEB5FE733F}"/>
+              </a:ext>
+            </a:extLst>
+          </p:cNvPr>
+          <p:cNvPicPr>
+            <a:picLocks noChangeAspect="1"/>
+          </p:cNvPicPr>
+          <p:nvPr/>
+        </p:nvPicPr>
+        <p:blipFill>
+          <a:blip r:embed="rId2" cstate="email">
+            <a:extLst>
+              <a:ext uri="{28A0092B-C50C-407E-A947-70E740481C1C}">
+                <a14:useLocalDpi xmlns:a14="http://schemas.microsoft.com/office/drawing/2010/main"/>
+              </a:ext>
+            </a:extLst>
+          </a:blip>
+          <a:stretch>
+            <a:fillRect/>
+          </a:stretch>
+        </p:blipFill>
+        <p:spPr>
+          <a:xfrm>
+            <a:off x="715433" y="1677855"/>
+            <a:ext cx="4754033" cy="4251013"/>
+          </a:xfrm>
+          <a:prstGeom prst="rect">
+            <a:avLst/>
+          </a:prstGeom>
+        </p:spPr>
+      </p:pic>
+    </p:spTree>
+    <p:extLst>
+      <p:ext uri="{BB962C8B-B14F-4D97-AF65-F5344CB8AC3E}">
+        <p14:creationId xmlns:p14="http://schemas.microsoft.com/office/powerpoint/2010/main" val="1462267718"/>
+      </p:ext>
+    </p:extLst>
+  </p:cSld>
+  <p:clrMapOvr>
+    <a:masterClrMapping/>
+  </p:clrMapOvr>
+</p:sld>
+</file>
+
+<file path=ppt/slides/slide5.xml><?xml version="1.0" encoding="utf-8"?>
+<p:sld xmlns:a="http://schemas.openxmlformats.org/drawingml/2006/main" xmlns:r="http://schemas.openxmlformats.org/officeDocument/2006/relationships" xmlns:p="http://schemas.openxmlformats.org/presentationml/2006/main">
+  <p:cSld>
+    <p:spTree>
+      <p:nvGrpSpPr>
+        <p:cNvPr id="1" name=""/>
+        <p:cNvGrpSpPr/>
+        <p:nvPr/>
+      </p:nvGrpSpPr>
+      <p:grpSpPr>
+        <a:xfrm>
+          <a:off x="0" y="0"/>
+          <a:ext cx="0" cy="0"/>
+          <a:chOff x="0" y="0"/>
+          <a:chExt cx="0" cy="0"/>
+        </a:xfrm>
+      </p:grpSpPr>
+      <p:sp>
+        <p:nvSpPr>
+          <p:cNvPr id="2" name="TextBox 1">
+            <a:extLst>
+              <a:ext uri="{FF2B5EF4-FFF2-40B4-BE49-F238E27FC236}">
+                <a16:creationId xmlns:a16="http://schemas.microsoft.com/office/drawing/2014/main" id="{0F0FA36D-3404-1E9C-B96C-7A351AA9B517}"/>
+              </a:ext>
+            </a:extLst>
+          </p:cNvPr>
+          <p:cNvSpPr txBox="1"/>
+          <p:nvPr/>
+        </p:nvSpPr>
+        <p:spPr>
+          <a:xfrm>
             <a:off x="143219" y="198303"/>
             <a:ext cx="3828362" cy="1015663"/>
           </a:xfrm>
@@ -6818,7 +7632,7 @@
 </p:sld>
 </file>
 
-<file path=ppt/slides/slide5.xml><?xml version="1.0" encoding="utf-8"?>
+<file path=ppt/slides/slide6.xml><?xml version="1.0" encoding="utf-8"?>
 <p:sld xmlns:a="http://schemas.openxmlformats.org/drawingml/2006/main" xmlns:r="http://schemas.openxmlformats.org/officeDocument/2006/relationships" xmlns:p="http://schemas.openxmlformats.org/presentationml/2006/main">
   <p:cSld>
     <p:spTree>
@@ -7462,7 +8276,7 @@
 </p:sld>
 </file>
 
-<file path=ppt/slides/slide6.xml><?xml version="1.0" encoding="utf-8"?>
+<file path=ppt/slides/slide7.xml><?xml version="1.0" encoding="utf-8"?>
 <p:sld xmlns:a="http://schemas.openxmlformats.org/drawingml/2006/main" xmlns:r="http://schemas.openxmlformats.org/officeDocument/2006/relationships" xmlns:p="http://schemas.openxmlformats.org/presentationml/2006/main">
   <p:cSld>
     <p:spTree>
@@ -8292,7 +9106,7 @@
 </p:sld>
 </file>
 
-<file path=ppt/slides/slide7.xml><?xml version="1.0" encoding="utf-8"?>
+<file path=ppt/slides/slide8.xml><?xml version="1.0" encoding="utf-8"?>
 <p:sld xmlns:a="http://schemas.openxmlformats.org/drawingml/2006/main" xmlns:r="http://schemas.openxmlformats.org/officeDocument/2006/relationships" xmlns:p="http://schemas.openxmlformats.org/presentationml/2006/main">
   <p:cSld>
     <p:spTree>
@@ -8567,7 +9381,7 @@
 </p:sld>
 </file>
 
-<file path=ppt/slides/slide8.xml><?xml version="1.0" encoding="utf-8"?>
+<file path=ppt/slides/slide9.xml><?xml version="1.0" encoding="utf-8"?>
 <p:sld xmlns:a="http://schemas.openxmlformats.org/drawingml/2006/main" xmlns:r="http://schemas.openxmlformats.org/officeDocument/2006/relationships" xmlns:p="http://schemas.openxmlformats.org/presentationml/2006/main">
   <p:cSld>
     <p:spTree>
@@ -9391,711 +10205,6 @@
     <p:extLst>
       <p:ext uri="{BB962C8B-B14F-4D97-AF65-F5344CB8AC3E}">
         <p14:creationId xmlns:p14="http://schemas.microsoft.com/office/powerpoint/2010/main" val="2159689119"/>
-      </p:ext>
-    </p:extLst>
-  </p:cSld>
-  <p:clrMapOvr>
-    <a:masterClrMapping/>
-  </p:clrMapOvr>
-</p:sld>
-</file>
-
-<file path=ppt/slides/slide9.xml><?xml version="1.0" encoding="utf-8"?>
-<p:sld xmlns:a="http://schemas.openxmlformats.org/drawingml/2006/main" xmlns:r="http://schemas.openxmlformats.org/officeDocument/2006/relationships" xmlns:p="http://schemas.openxmlformats.org/presentationml/2006/main">
-  <p:cSld>
-    <p:spTree>
-      <p:nvGrpSpPr>
-        <p:cNvPr id="1" name="">
-          <a:extLst>
-            <a:ext uri="{FF2B5EF4-FFF2-40B4-BE49-F238E27FC236}">
-              <a16:creationId xmlns:a16="http://schemas.microsoft.com/office/drawing/2014/main" id="{1545F99A-9A76-0D4B-7909-5BEEC960A928}"/>
-            </a:ext>
-          </a:extLst>
-        </p:cNvPr>
-        <p:cNvGrpSpPr/>
-        <p:nvPr/>
-      </p:nvGrpSpPr>
-      <p:grpSpPr>
-        <a:xfrm>
-          <a:off x="0" y="0"/>
-          <a:ext cx="0" cy="0"/>
-          <a:chOff x="0" y="0"/>
-          <a:chExt cx="0" cy="0"/>
-        </a:xfrm>
-      </p:grpSpPr>
-      <p:sp>
-        <p:nvSpPr>
-          <p:cNvPr id="2" name="TextBox 1">
-            <a:extLst>
-              <a:ext uri="{FF2B5EF4-FFF2-40B4-BE49-F238E27FC236}">
-                <a16:creationId xmlns:a16="http://schemas.microsoft.com/office/drawing/2014/main" id="{4EA4FDA6-CDAC-9BCC-3C0C-F323B968C36A}"/>
-              </a:ext>
-            </a:extLst>
-          </p:cNvPr>
-          <p:cNvSpPr txBox="1"/>
-          <p:nvPr/>
-        </p:nvSpPr>
-        <p:spPr>
-          <a:xfrm>
-            <a:off x="143219" y="198303"/>
-            <a:ext cx="3819182" cy="738664"/>
-          </a:xfrm>
-          <a:prstGeom prst="rect">
-            <a:avLst/>
-          </a:prstGeom>
-          <a:solidFill>
-            <a:schemeClr val="accent4">
-              <a:lumMod val="20000"/>
-              <a:lumOff val="80000"/>
-            </a:schemeClr>
-          </a:solidFill>
-          <a:ln>
-            <a:solidFill>
-              <a:srgbClr val="FF0000"/>
-            </a:solidFill>
-          </a:ln>
-        </p:spPr>
-        <p:txBody>
-          <a:bodyPr wrap="square" rtlCol="0">
-            <a:spAutoFit/>
-          </a:bodyPr>
-          <a:lstStyle/>
-          <a:p>
-            <a:r>
-              <a:rPr lang="en-US" dirty="0"/>
-              <a:t>Snow Tamers</a:t>
-            </a:r>
-          </a:p>
-          <a:p>
-            <a:r>
-              <a:rPr lang="en-US" sz="1200" dirty="0">
-                <a:hlinkClick r:id="rId2"/>
-              </a:rPr>
-              <a:t>https://www.r2manufacturing.com</a:t>
-            </a:r>
-            <a:endParaRPr lang="en-US" sz="1200" dirty="0"/>
-          </a:p>
-          <a:p>
-            <a:r>
-              <a:rPr lang="en-US" sz="1200" dirty="0">
-                <a:hlinkClick r:id="rId3"/>
-              </a:rPr>
-              <a:t>https://</a:t>
-            </a:r>
-            <a:r>
-              <a:rPr lang="en-US" sz="1200" dirty="0" err="1">
-                <a:hlinkClick r:id="rId3"/>
-              </a:rPr>
-              <a:t>www.youtube.com</a:t>
-            </a:r>
-            <a:r>
-              <a:rPr lang="en-US" sz="1200" dirty="0">
-                <a:hlinkClick r:id="rId3"/>
-              </a:rPr>
-              <a:t>/</a:t>
-            </a:r>
-            <a:r>
-              <a:rPr lang="en-US" sz="1200" dirty="0" err="1">
-                <a:hlinkClick r:id="rId3"/>
-              </a:rPr>
-              <a:t>watch?v</a:t>
-            </a:r>
-            <a:r>
-              <a:rPr lang="en-US" sz="1200" dirty="0">
-                <a:hlinkClick r:id="rId3"/>
-              </a:rPr>
-              <a:t>=5VuD0MhxcQ0</a:t>
-            </a:r>
-            <a:endParaRPr lang="en-US" sz="1200" dirty="0"/>
-          </a:p>
-        </p:txBody>
-      </p:sp>
-      <p:sp>
-        <p:nvSpPr>
-          <p:cNvPr id="12" name="TextBox 11">
-            <a:extLst>
-              <a:ext uri="{FF2B5EF4-FFF2-40B4-BE49-F238E27FC236}">
-                <a16:creationId xmlns:a16="http://schemas.microsoft.com/office/drawing/2014/main" id="{7A6C7CEA-91BC-1EA0-3719-3E53253B3B07}"/>
-              </a:ext>
-            </a:extLst>
-          </p:cNvPr>
-          <p:cNvSpPr txBox="1"/>
-          <p:nvPr/>
-        </p:nvSpPr>
-        <p:spPr>
-          <a:xfrm>
-            <a:off x="76557" y="1098976"/>
-            <a:ext cx="4394914" cy="4493538"/>
-          </a:xfrm>
-          <a:prstGeom prst="rect">
-            <a:avLst/>
-          </a:prstGeom>
-          <a:solidFill>
-            <a:schemeClr val="accent4">
-              <a:lumMod val="20000"/>
-              <a:lumOff val="80000"/>
-            </a:schemeClr>
-          </a:solidFill>
-          <a:ln>
-            <a:solidFill>
-              <a:srgbClr val="FF0000"/>
-            </a:solidFill>
-          </a:ln>
-        </p:spPr>
-        <p:txBody>
-          <a:bodyPr wrap="square" rtlCol="0">
-            <a:spAutoFit/>
-          </a:bodyPr>
-          <a:lstStyle/>
-          <a:p>
-            <a:r>
-              <a:rPr lang="en-US" sz="1100" dirty="0">
-                <a:latin typeface="Calibri" panose="020F0502020204030204" pitchFamily="34" charset="0"/>
-                <a:cs typeface="Calibri" panose="020F0502020204030204" pitchFamily="34" charset="0"/>
-              </a:rPr>
-              <a:t>Plowing snow on gravel</a:t>
-            </a:r>
-          </a:p>
-          <a:p>
-            <a:r>
-              <a:rPr lang="en-US" sz="1100" dirty="0">
-                <a:latin typeface="Calibri" panose="020F0502020204030204" pitchFamily="34" charset="0"/>
-                <a:cs typeface="Calibri" panose="020F0502020204030204" pitchFamily="34" charset="0"/>
-              </a:rPr>
-              <a:t>Using tube at the bottom of the snow blade</a:t>
-            </a:r>
-          </a:p>
-          <a:p>
-            <a:endParaRPr lang="en-US" sz="1100" dirty="0">
-              <a:latin typeface="Calibri" panose="020F0502020204030204" pitchFamily="34" charset="0"/>
-              <a:cs typeface="Calibri" panose="020F0502020204030204" pitchFamily="34" charset="0"/>
-            </a:endParaRPr>
-          </a:p>
-          <a:p>
-            <a:r>
-              <a:rPr lang="en-US" sz="1100" dirty="0">
-                <a:latin typeface="Calibri" panose="020F0502020204030204" pitchFamily="34" charset="0"/>
-                <a:cs typeface="Calibri" panose="020F0502020204030204" pitchFamily="34" charset="0"/>
-                <a:hlinkClick r:id="rId4"/>
-              </a:rPr>
-              <a:t>https://</a:t>
-            </a:r>
-            <a:r>
-              <a:rPr lang="en-US" sz="1100" dirty="0" err="1">
-                <a:latin typeface="Calibri" panose="020F0502020204030204" pitchFamily="34" charset="0"/>
-                <a:cs typeface="Calibri" panose="020F0502020204030204" pitchFamily="34" charset="0"/>
-                <a:hlinkClick r:id="rId4"/>
-              </a:rPr>
-              <a:t>www.youtube.com</a:t>
-            </a:r>
-            <a:r>
-              <a:rPr lang="en-US" sz="1100" dirty="0">
-                <a:latin typeface="Calibri" panose="020F0502020204030204" pitchFamily="34" charset="0"/>
-                <a:cs typeface="Calibri" panose="020F0502020204030204" pitchFamily="34" charset="0"/>
-                <a:hlinkClick r:id="rId4"/>
-              </a:rPr>
-              <a:t>/</a:t>
-            </a:r>
-            <a:r>
-              <a:rPr lang="en-US" sz="1100" dirty="0" err="1">
-                <a:latin typeface="Calibri" panose="020F0502020204030204" pitchFamily="34" charset="0"/>
-                <a:cs typeface="Calibri" panose="020F0502020204030204" pitchFamily="34" charset="0"/>
-                <a:hlinkClick r:id="rId4"/>
-              </a:rPr>
-              <a:t>watch?v</a:t>
-            </a:r>
-            <a:r>
-              <a:rPr lang="en-US" sz="1100" dirty="0">
-                <a:latin typeface="Calibri" panose="020F0502020204030204" pitchFamily="34" charset="0"/>
-                <a:cs typeface="Calibri" panose="020F0502020204030204" pitchFamily="34" charset="0"/>
-                <a:hlinkClick r:id="rId4"/>
-              </a:rPr>
-              <a:t>=K8zB1X35QtI</a:t>
-            </a:r>
-            <a:endParaRPr lang="en-US" sz="1100" dirty="0">
-              <a:latin typeface="Calibri" panose="020F0502020204030204" pitchFamily="34" charset="0"/>
-              <a:cs typeface="Calibri" panose="020F0502020204030204" pitchFamily="34" charset="0"/>
-            </a:endParaRPr>
-          </a:p>
-          <a:p>
-            <a:r>
-              <a:rPr lang="en-US" sz="1100" dirty="0">
-                <a:latin typeface="Calibri" panose="020F0502020204030204" pitchFamily="34" charset="0"/>
-                <a:cs typeface="Calibri" panose="020F0502020204030204" pitchFamily="34" charset="0"/>
-              </a:rPr>
-              <a:t>He uses 1-3/8" galvanized steel fence top rail.</a:t>
-            </a:r>
-          </a:p>
-          <a:p>
-            <a:r>
-              <a:rPr lang="en-US" sz="1100" dirty="0">
-                <a:latin typeface="Calibri" panose="020F0502020204030204" pitchFamily="34" charset="0"/>
-                <a:cs typeface="Calibri" panose="020F0502020204030204" pitchFamily="34" charset="0"/>
-              </a:rPr>
-              <a:t>It is a galvanized steel pipe.</a:t>
-            </a:r>
-          </a:p>
-          <a:p>
-            <a:r>
-              <a:rPr lang="en-US" sz="1100" dirty="0">
-                <a:latin typeface="Calibri" panose="020F0502020204030204" pitchFamily="34" charset="0"/>
-                <a:cs typeface="Calibri" panose="020F0502020204030204" pitchFamily="34" charset="0"/>
-              </a:rPr>
-              <a:t>Sizes (diameter):</a:t>
-            </a:r>
-          </a:p>
-          <a:p>
-            <a:r>
-              <a:rPr lang="en-US" sz="1100" dirty="0">
-                <a:latin typeface="Calibri" panose="020F0502020204030204" pitchFamily="34" charset="0"/>
-                <a:cs typeface="Calibri" panose="020F0502020204030204" pitchFamily="34" charset="0"/>
-              </a:rPr>
-              <a:t>  1 1/4"</a:t>
-            </a:r>
-          </a:p>
-          <a:p>
-            <a:r>
-              <a:rPr lang="en-US" sz="1100" dirty="0">
-                <a:latin typeface="Calibri" panose="020F0502020204030204" pitchFamily="34" charset="0"/>
-                <a:cs typeface="Calibri" panose="020F0502020204030204" pitchFamily="34" charset="0"/>
-              </a:rPr>
-              <a:t>  1-3/8"</a:t>
-            </a:r>
-          </a:p>
-          <a:p>
-            <a:r>
-              <a:rPr lang="en-US" sz="1100" dirty="0">
-                <a:latin typeface="Calibri" panose="020F0502020204030204" pitchFamily="34" charset="0"/>
-                <a:cs typeface="Calibri" panose="020F0502020204030204" pitchFamily="34" charset="0"/>
-              </a:rPr>
-              <a:t>  1 1/2"</a:t>
-            </a:r>
-          </a:p>
-          <a:p>
-            <a:r>
-              <a:rPr lang="en-US" sz="1100" dirty="0">
-                <a:latin typeface="Calibri" panose="020F0502020204030204" pitchFamily="34" charset="0"/>
-                <a:cs typeface="Calibri" panose="020F0502020204030204" pitchFamily="34" charset="0"/>
-              </a:rPr>
-              <a:t>In this video he used size 1-3/8"</a:t>
-            </a:r>
-          </a:p>
-          <a:p>
-            <a:endParaRPr lang="en-US" sz="1100" dirty="0">
-              <a:latin typeface="Calibri" panose="020F0502020204030204" pitchFamily="34" charset="0"/>
-              <a:cs typeface="Calibri" panose="020F0502020204030204" pitchFamily="34" charset="0"/>
-            </a:endParaRPr>
-          </a:p>
-          <a:p>
-            <a:r>
-              <a:rPr lang="en-US" sz="1100" dirty="0">
-                <a:latin typeface="Calibri" panose="020F0502020204030204" pitchFamily="34" charset="0"/>
-                <a:cs typeface="Calibri" panose="020F0502020204030204" pitchFamily="34" charset="0"/>
-              </a:rPr>
-              <a:t>Even better solution - replaceable :</a:t>
-            </a:r>
-          </a:p>
-          <a:p>
-            <a:r>
-              <a:rPr lang="en-US" sz="1100" dirty="0">
-                <a:latin typeface="Calibri" panose="020F0502020204030204" pitchFamily="34" charset="0"/>
-                <a:cs typeface="Calibri" panose="020F0502020204030204" pitchFamily="34" charset="0"/>
-                <a:hlinkClick r:id="rId5"/>
-              </a:rPr>
-              <a:t>https://www.youtube.com/</a:t>
-            </a:r>
-            <a:r>
-              <a:rPr lang="en-US" sz="1100" dirty="0" err="1">
-                <a:latin typeface="Calibri" panose="020F0502020204030204" pitchFamily="34" charset="0"/>
-                <a:cs typeface="Calibri" panose="020F0502020204030204" pitchFamily="34" charset="0"/>
-                <a:hlinkClick r:id="rId5"/>
-              </a:rPr>
-              <a:t>watch?v</a:t>
-            </a:r>
-            <a:r>
-              <a:rPr lang="en-US" sz="1100" dirty="0">
-                <a:latin typeface="Calibri" panose="020F0502020204030204" pitchFamily="34" charset="0"/>
-                <a:cs typeface="Calibri" panose="020F0502020204030204" pitchFamily="34" charset="0"/>
-                <a:hlinkClick r:id="rId5"/>
-              </a:rPr>
-              <a:t>=</a:t>
-            </a:r>
-            <a:r>
-              <a:rPr lang="en-US" sz="1100" dirty="0" err="1">
-                <a:latin typeface="Calibri" panose="020F0502020204030204" pitchFamily="34" charset="0"/>
-                <a:cs typeface="Calibri" panose="020F0502020204030204" pitchFamily="34" charset="0"/>
-                <a:hlinkClick r:id="rId5"/>
-              </a:rPr>
-              <a:t>wCxOjqdGEjw</a:t>
-            </a:r>
-            <a:endParaRPr lang="en-US" sz="1100" dirty="0">
-              <a:latin typeface="Calibri" panose="020F0502020204030204" pitchFamily="34" charset="0"/>
-              <a:cs typeface="Calibri" panose="020F0502020204030204" pitchFamily="34" charset="0"/>
-            </a:endParaRPr>
-          </a:p>
-          <a:p>
-            <a:endParaRPr lang="en-US" sz="1100" dirty="0">
-              <a:latin typeface="Calibri" panose="020F0502020204030204" pitchFamily="34" charset="0"/>
-              <a:cs typeface="Calibri" panose="020F0502020204030204" pitchFamily="34" charset="0"/>
-            </a:endParaRPr>
-          </a:p>
-          <a:p>
-            <a:r>
-              <a:rPr lang="en-US" sz="1100" dirty="0">
-                <a:latin typeface="Calibri" panose="020F0502020204030204" pitchFamily="34" charset="0"/>
-                <a:cs typeface="Calibri" panose="020F0502020204030204" pitchFamily="34" charset="0"/>
-              </a:rPr>
-              <a:t>Yet another one ( steel pipe 2 in inner, 2 3/8 outer, and 3/16 thick):</a:t>
-            </a:r>
-          </a:p>
-          <a:p>
-            <a:r>
-              <a:rPr lang="en-US" sz="1100" dirty="0">
-                <a:latin typeface="Calibri" panose="020F0502020204030204" pitchFamily="34" charset="0"/>
-                <a:cs typeface="Calibri" panose="020F0502020204030204" pitchFamily="34" charset="0"/>
-                <a:hlinkClick r:id="rId6"/>
-              </a:rPr>
-              <a:t>https://www.youtube.com/watch?v=</a:t>
-            </a:r>
-            <a:r>
-              <a:rPr lang="en-US" sz="1100" dirty="0" err="1">
-                <a:latin typeface="Calibri" panose="020F0502020204030204" pitchFamily="34" charset="0"/>
-                <a:cs typeface="Calibri" panose="020F0502020204030204" pitchFamily="34" charset="0"/>
-                <a:hlinkClick r:id="rId6"/>
-              </a:rPr>
-              <a:t>MVhIKQvNplc</a:t>
-            </a:r>
-            <a:endParaRPr lang="en-US" sz="1100" dirty="0">
-              <a:latin typeface="Calibri" panose="020F0502020204030204" pitchFamily="34" charset="0"/>
-              <a:cs typeface="Calibri" panose="020F0502020204030204" pitchFamily="34" charset="0"/>
-            </a:endParaRPr>
-          </a:p>
-          <a:p>
-            <a:endParaRPr lang="en-US" sz="1100" dirty="0">
-              <a:latin typeface="Calibri" panose="020F0502020204030204" pitchFamily="34" charset="0"/>
-              <a:cs typeface="Calibri" panose="020F0502020204030204" pitchFamily="34" charset="0"/>
-            </a:endParaRPr>
-          </a:p>
-          <a:p>
-            <a:r>
-              <a:rPr lang="en-US" sz="1100" dirty="0">
-                <a:latin typeface="Calibri" panose="020F0502020204030204" pitchFamily="34" charset="0"/>
-                <a:cs typeface="Calibri" panose="020F0502020204030204" pitchFamily="34" charset="0"/>
-              </a:rPr>
-              <a:t>Some people attach using chain</a:t>
-            </a:r>
-          </a:p>
-          <a:p>
-            <a:endParaRPr lang="en-US" sz="1100" dirty="0">
-              <a:latin typeface="Calibri" panose="020F0502020204030204" pitchFamily="34" charset="0"/>
-              <a:cs typeface="Calibri" panose="020F0502020204030204" pitchFamily="34" charset="0"/>
-            </a:endParaRPr>
-          </a:p>
-          <a:p>
-            <a:r>
-              <a:rPr lang="en-US" sz="1100" dirty="0">
-                <a:latin typeface="Calibri" panose="020F0502020204030204" pitchFamily="34" charset="0"/>
-                <a:cs typeface="Calibri" panose="020F0502020204030204" pitchFamily="34" charset="0"/>
-                <a:hlinkClick r:id="rId7"/>
-              </a:rPr>
-              <a:t>https://www.youtube.com/</a:t>
-            </a:r>
-            <a:r>
-              <a:rPr lang="en-US" sz="1100" dirty="0" err="1">
-                <a:latin typeface="Calibri" panose="020F0502020204030204" pitchFamily="34" charset="0"/>
-                <a:cs typeface="Calibri" panose="020F0502020204030204" pitchFamily="34" charset="0"/>
-                <a:hlinkClick r:id="rId7"/>
-              </a:rPr>
-              <a:t>watch?v</a:t>
-            </a:r>
-            <a:r>
-              <a:rPr lang="en-US" sz="1100" dirty="0">
-                <a:latin typeface="Calibri" panose="020F0502020204030204" pitchFamily="34" charset="0"/>
-                <a:cs typeface="Calibri" panose="020F0502020204030204" pitchFamily="34" charset="0"/>
-                <a:hlinkClick r:id="rId7"/>
-              </a:rPr>
-              <a:t>=</a:t>
-            </a:r>
-            <a:r>
-              <a:rPr lang="en-US" sz="1100" dirty="0" err="1">
-                <a:latin typeface="Calibri" panose="020F0502020204030204" pitchFamily="34" charset="0"/>
-                <a:cs typeface="Calibri" panose="020F0502020204030204" pitchFamily="34" charset="0"/>
-                <a:hlinkClick r:id="rId7"/>
-              </a:rPr>
-              <a:t>ublecStrYAE</a:t>
-            </a:r>
-            <a:endParaRPr lang="en-US" sz="1100" dirty="0">
-              <a:latin typeface="Calibri" panose="020F0502020204030204" pitchFamily="34" charset="0"/>
-              <a:cs typeface="Calibri" panose="020F0502020204030204" pitchFamily="34" charset="0"/>
-            </a:endParaRPr>
-          </a:p>
-          <a:p>
-            <a:endParaRPr lang="en-US" sz="1100" dirty="0">
-              <a:latin typeface="Calibri" panose="020F0502020204030204" pitchFamily="34" charset="0"/>
-              <a:cs typeface="Calibri" panose="020F0502020204030204" pitchFamily="34" charset="0"/>
-            </a:endParaRPr>
-          </a:p>
-          <a:p>
-            <a:r>
-              <a:rPr lang="en-US" sz="1100" dirty="0">
-                <a:latin typeface="Calibri" panose="020F0502020204030204" pitchFamily="34" charset="0"/>
-                <a:cs typeface="Calibri" panose="020F0502020204030204" pitchFamily="34" charset="0"/>
-              </a:rPr>
-              <a:t>Yet another way to attach it.</a:t>
-            </a:r>
-          </a:p>
-          <a:p>
-            <a:r>
-              <a:rPr lang="en-US" sz="1100" dirty="0">
-                <a:latin typeface="Calibri" panose="020F0502020204030204" pitchFamily="34" charset="0"/>
-                <a:cs typeface="Calibri" panose="020F0502020204030204" pitchFamily="34" charset="0"/>
-              </a:rPr>
-              <a:t>He welds steel brackets with holes to the pipe that align with the plow's existing mounting bolts.</a:t>
-            </a:r>
-          </a:p>
-          <a:p>
-            <a:endParaRPr lang="en-US" sz="1100" dirty="0">
-              <a:latin typeface="Calibri" panose="020F0502020204030204" pitchFamily="34" charset="0"/>
-              <a:cs typeface="Calibri" panose="020F0502020204030204" pitchFamily="34" charset="0"/>
-            </a:endParaRPr>
-          </a:p>
-        </p:txBody>
-      </p:sp>
-      <p:pic>
-        <p:nvPicPr>
-          <p:cNvPr id="9" name="Picture 8">
-            <a:extLst>
-              <a:ext uri="{FF2B5EF4-FFF2-40B4-BE49-F238E27FC236}">
-                <a16:creationId xmlns:a16="http://schemas.microsoft.com/office/drawing/2014/main" id="{FEDB6647-A377-F039-E331-124636F83F3E}"/>
-              </a:ext>
-            </a:extLst>
-          </p:cNvPr>
-          <p:cNvPicPr>
-            <a:picLocks noChangeAspect="1"/>
-          </p:cNvPicPr>
-          <p:nvPr/>
-        </p:nvPicPr>
-        <p:blipFill>
-          <a:blip r:embed="rId8" cstate="email">
-            <a:extLst>
-              <a:ext uri="{28A0092B-C50C-407E-A947-70E740481C1C}">
-                <a14:useLocalDpi xmlns:a14="http://schemas.microsoft.com/office/drawing/2010/main"/>
-              </a:ext>
-            </a:extLst>
-          </a:blip>
-          <a:stretch>
-            <a:fillRect/>
-          </a:stretch>
-        </p:blipFill>
-        <p:spPr>
-          <a:xfrm>
-            <a:off x="7442199" y="198303"/>
-            <a:ext cx="4555781" cy="2294578"/>
-          </a:xfrm>
-          <a:prstGeom prst="rect">
-            <a:avLst/>
-          </a:prstGeom>
-        </p:spPr>
-      </p:pic>
-      <p:pic>
-        <p:nvPicPr>
-          <p:cNvPr id="20" name="Picture 19">
-            <a:extLst>
-              <a:ext uri="{FF2B5EF4-FFF2-40B4-BE49-F238E27FC236}">
-                <a16:creationId xmlns:a16="http://schemas.microsoft.com/office/drawing/2014/main" id="{3ACB17B7-0A9F-D5C8-1F67-1EE6DF154057}"/>
-              </a:ext>
-            </a:extLst>
-          </p:cNvPr>
-          <p:cNvPicPr>
-            <a:picLocks noChangeAspect="1"/>
-          </p:cNvPicPr>
-          <p:nvPr/>
-        </p:nvPicPr>
-        <p:blipFill>
-          <a:blip r:embed="rId9" cstate="email">
-            <a:extLst>
-              <a:ext uri="{28A0092B-C50C-407E-A947-70E740481C1C}">
-                <a14:useLocalDpi xmlns:a14="http://schemas.microsoft.com/office/drawing/2010/main"/>
-              </a:ext>
-            </a:extLst>
-          </a:blip>
-          <a:stretch>
-            <a:fillRect/>
-          </a:stretch>
-        </p:blipFill>
-        <p:spPr>
-          <a:xfrm>
-            <a:off x="8423275" y="4068313"/>
-            <a:ext cx="1949450" cy="1665032"/>
-          </a:xfrm>
-          <a:prstGeom prst="rect">
-            <a:avLst/>
-          </a:prstGeom>
-        </p:spPr>
-      </p:pic>
-      <p:pic>
-        <p:nvPicPr>
-          <p:cNvPr id="22" name="Picture 21">
-            <a:extLst>
-              <a:ext uri="{FF2B5EF4-FFF2-40B4-BE49-F238E27FC236}">
-                <a16:creationId xmlns:a16="http://schemas.microsoft.com/office/drawing/2014/main" id="{7D48DB42-DECD-F71C-3704-5FD53587BA7B}"/>
-              </a:ext>
-            </a:extLst>
-          </p:cNvPr>
-          <p:cNvPicPr>
-            <a:picLocks noChangeAspect="1"/>
-          </p:cNvPicPr>
-          <p:nvPr/>
-        </p:nvPicPr>
-        <p:blipFill>
-          <a:blip r:embed="rId10" cstate="email">
-            <a:extLst>
-              <a:ext uri="{28A0092B-C50C-407E-A947-70E740481C1C}">
-                <a14:useLocalDpi xmlns:a14="http://schemas.microsoft.com/office/drawing/2010/main"/>
-              </a:ext>
-            </a:extLst>
-          </a:blip>
-          <a:stretch>
-            <a:fillRect/>
-          </a:stretch>
-        </p:blipFill>
-        <p:spPr>
-          <a:xfrm>
-            <a:off x="10527943" y="3472745"/>
-            <a:ext cx="1587500" cy="2260600"/>
-          </a:xfrm>
-          <a:prstGeom prst="rect">
-            <a:avLst/>
-          </a:prstGeom>
-        </p:spPr>
-      </p:pic>
-      <p:pic>
-        <p:nvPicPr>
-          <p:cNvPr id="23" name="Picture 22">
-            <a:extLst>
-              <a:ext uri="{FF2B5EF4-FFF2-40B4-BE49-F238E27FC236}">
-                <a16:creationId xmlns:a16="http://schemas.microsoft.com/office/drawing/2014/main" id="{40FF0DF2-89F1-C530-8C2E-FADE305D8DD8}"/>
-              </a:ext>
-            </a:extLst>
-          </p:cNvPr>
-          <p:cNvPicPr>
-            <a:picLocks noChangeAspect="1"/>
-          </p:cNvPicPr>
-          <p:nvPr/>
-        </p:nvPicPr>
-        <p:blipFill>
-          <a:blip r:embed="rId11" cstate="email">
-            <a:extLst>
-              <a:ext uri="{28A0092B-C50C-407E-A947-70E740481C1C}">
-                <a14:useLocalDpi xmlns:a14="http://schemas.microsoft.com/office/drawing/2010/main"/>
-              </a:ext>
-            </a:extLst>
-          </a:blip>
-          <a:stretch>
-            <a:fillRect/>
-          </a:stretch>
-        </p:blipFill>
-        <p:spPr>
-          <a:xfrm>
-            <a:off x="4696859" y="198303"/>
-            <a:ext cx="2632111" cy="1325697"/>
-          </a:xfrm>
-          <a:prstGeom prst="rect">
-            <a:avLst/>
-          </a:prstGeom>
-          <a:ln>
-            <a:solidFill>
-              <a:srgbClr val="FF0000"/>
-            </a:solidFill>
-          </a:ln>
-        </p:spPr>
-      </p:pic>
-      <p:pic>
-        <p:nvPicPr>
-          <p:cNvPr id="24" name="Picture 23">
-            <a:extLst>
-              <a:ext uri="{FF2B5EF4-FFF2-40B4-BE49-F238E27FC236}">
-                <a16:creationId xmlns:a16="http://schemas.microsoft.com/office/drawing/2014/main" id="{0DFF0FE5-B491-429E-D62E-0A58FD60CA4D}"/>
-              </a:ext>
-            </a:extLst>
-          </p:cNvPr>
-          <p:cNvPicPr>
-            <a:picLocks noChangeAspect="1"/>
-          </p:cNvPicPr>
-          <p:nvPr/>
-        </p:nvPicPr>
-        <p:blipFill>
-          <a:blip r:embed="rId12" cstate="email">
-            <a:extLst>
-              <a:ext uri="{28A0092B-C50C-407E-A947-70E740481C1C}">
-                <a14:useLocalDpi xmlns:a14="http://schemas.microsoft.com/office/drawing/2010/main"/>
-              </a:ext>
-            </a:extLst>
-          </a:blip>
-          <a:stretch>
-            <a:fillRect/>
-          </a:stretch>
-        </p:blipFill>
-        <p:spPr>
-          <a:xfrm>
-            <a:off x="4749802" y="2029805"/>
-            <a:ext cx="2579169" cy="1832568"/>
-          </a:xfrm>
-          <a:prstGeom prst="rect">
-            <a:avLst/>
-          </a:prstGeom>
-          <a:ln>
-            <a:solidFill>
-              <a:srgbClr val="FF0000"/>
-            </a:solidFill>
-          </a:ln>
-        </p:spPr>
-      </p:pic>
-      <p:pic>
-        <p:nvPicPr>
-          <p:cNvPr id="25" name="Picture 24">
-            <a:extLst>
-              <a:ext uri="{FF2B5EF4-FFF2-40B4-BE49-F238E27FC236}">
-                <a16:creationId xmlns:a16="http://schemas.microsoft.com/office/drawing/2014/main" id="{6B1E62A4-FF2B-BD7A-02E6-474C51F83960}"/>
-              </a:ext>
-            </a:extLst>
-          </p:cNvPr>
-          <p:cNvPicPr>
-            <a:picLocks noChangeAspect="1"/>
-          </p:cNvPicPr>
-          <p:nvPr/>
-        </p:nvPicPr>
-        <p:blipFill>
-          <a:blip r:embed="rId13" cstate="email">
-            <a:extLst>
-              <a:ext uri="{28A0092B-C50C-407E-A947-70E740481C1C}">
-                <a14:useLocalDpi xmlns:a14="http://schemas.microsoft.com/office/drawing/2010/main"/>
-              </a:ext>
-            </a:extLst>
-          </a:blip>
-          <a:stretch>
-            <a:fillRect/>
-          </a:stretch>
-        </p:blipFill>
-        <p:spPr>
-          <a:xfrm>
-            <a:off x="5478870" y="4174015"/>
-            <a:ext cx="1234260" cy="1922597"/>
-          </a:xfrm>
-          <a:prstGeom prst="rect">
-            <a:avLst/>
-          </a:prstGeom>
-          <a:ln>
-            <a:solidFill>
-              <a:srgbClr val="FF0000"/>
-            </a:solidFill>
-          </a:ln>
-        </p:spPr>
-      </p:pic>
-    </p:spTree>
-    <p:extLst>
-      <p:ext uri="{BB962C8B-B14F-4D97-AF65-F5344CB8AC3E}">
-        <p14:creationId xmlns:p14="http://schemas.microsoft.com/office/powerpoint/2010/main" val="415699365"/>
       </p:ext>
     </p:extLst>
   </p:cSld>

--- a/snow_plow_blower.pptx
+++ b/snow_plow_blower.pptx
@@ -207,7 +207,7 @@
           <a:p>
             <a:fld id="{25BB0166-7DA8-4040-98E7-81186BCABFDE}" type="datetimeFigureOut">
               <a:rPr lang="en-US" smtClean="0"/>
-              <a:t>2/10/26</a:t>
+              <a:t>3/7/26</a:t>
             </a:fld>
             <a:endParaRPr lang="en-US"/>
           </a:p>
@@ -620,7 +620,7 @@
           <a:lstStyle/>
           <a:p>
             <a:fld id="{5F491023-0B0A-7041-9F06-D25A50EF063B}" type="datetimeFigureOut">
-              <a:t>2/10/26</a:t>
+              <a:t>3/7/26</a:t>
             </a:fld>
             <a:endParaRPr lang="en-US"/>
           </a:p>
@@ -816,7 +816,7 @@
           <a:lstStyle/>
           <a:p>
             <a:fld id="{5F491023-0B0A-7041-9F06-D25A50EF063B}" type="datetimeFigureOut">
-              <a:t>2/10/26</a:t>
+              <a:t>3/7/26</a:t>
             </a:fld>
             <a:endParaRPr lang="en-US"/>
           </a:p>
@@ -1022,7 +1022,7 @@
           <a:lstStyle/>
           <a:p>
             <a:fld id="{5F491023-0B0A-7041-9F06-D25A50EF063B}" type="datetimeFigureOut">
-              <a:t>2/10/26</a:t>
+              <a:t>3/7/26</a:t>
             </a:fld>
             <a:endParaRPr lang="en-US"/>
           </a:p>
@@ -1218,7 +1218,7 @@
           <a:lstStyle/>
           <a:p>
             <a:fld id="{5F491023-0B0A-7041-9F06-D25A50EF063B}" type="datetimeFigureOut">
-              <a:t>2/10/26</a:t>
+              <a:t>3/7/26</a:t>
             </a:fld>
             <a:endParaRPr lang="en-US"/>
           </a:p>
@@ -1491,7 +1491,7 @@
           <a:lstStyle/>
           <a:p>
             <a:fld id="{5F491023-0B0A-7041-9F06-D25A50EF063B}" type="datetimeFigureOut">
-              <a:t>2/10/26</a:t>
+              <a:t>3/7/26</a:t>
             </a:fld>
             <a:endParaRPr lang="en-US"/>
           </a:p>
@@ -1754,7 +1754,7 @@
           <a:lstStyle/>
           <a:p>
             <a:fld id="{5F491023-0B0A-7041-9F06-D25A50EF063B}" type="datetimeFigureOut">
-              <a:t>2/10/26</a:t>
+              <a:t>3/7/26</a:t>
             </a:fld>
             <a:endParaRPr lang="en-US"/>
           </a:p>
@@ -2164,7 +2164,7 @@
           <a:lstStyle/>
           <a:p>
             <a:fld id="{5F491023-0B0A-7041-9F06-D25A50EF063B}" type="datetimeFigureOut">
-              <a:t>2/10/26</a:t>
+              <a:t>3/7/26</a:t>
             </a:fld>
             <a:endParaRPr lang="en-US"/>
           </a:p>
@@ -2303,7 +2303,7 @@
           <a:lstStyle/>
           <a:p>
             <a:fld id="{5F491023-0B0A-7041-9F06-D25A50EF063B}" type="datetimeFigureOut">
-              <a:t>2/10/26</a:t>
+              <a:t>3/7/26</a:t>
             </a:fld>
             <a:endParaRPr lang="en-US"/>
           </a:p>
@@ -2414,7 +2414,7 @@
           <a:lstStyle/>
           <a:p>
             <a:fld id="{5F491023-0B0A-7041-9F06-D25A50EF063B}" type="datetimeFigureOut">
-              <a:t>2/10/26</a:t>
+              <a:t>3/7/26</a:t>
             </a:fld>
             <a:endParaRPr lang="en-US"/>
           </a:p>
@@ -2723,7 +2723,7 @@
           <a:lstStyle/>
           <a:p>
             <a:fld id="{5F491023-0B0A-7041-9F06-D25A50EF063B}" type="datetimeFigureOut">
-              <a:t>2/10/26</a:t>
+              <a:t>3/7/26</a:t>
             </a:fld>
             <a:endParaRPr lang="en-US"/>
           </a:p>
@@ -3009,7 +3009,7 @@
           <a:lstStyle/>
           <a:p>
             <a:fld id="{5F491023-0B0A-7041-9F06-D25A50EF063B}" type="datetimeFigureOut">
-              <a:t>2/10/26</a:t>
+              <a:t>3/7/26</a:t>
             </a:fld>
             <a:endParaRPr lang="en-US"/>
           </a:p>
@@ -3248,7 +3248,7 @@
           </a:lstStyle>
           <a:p>
             <a:fld id="{5F491023-0B0A-7041-9F06-D25A50EF063B}" type="datetimeFigureOut">
-              <a:t>2/10/26</a:t>
+              <a:t>3/7/26</a:t>
             </a:fld>
             <a:endParaRPr lang="en-US"/>
           </a:p>
@@ -4188,6 +4188,144 @@
           </a:p>
         </p:txBody>
       </p:sp>
+      <p:sp>
+        <p:nvSpPr>
+          <p:cNvPr id="11" name="TextBox 10">
+            <a:extLst>
+              <a:ext uri="{FF2B5EF4-FFF2-40B4-BE49-F238E27FC236}">
+                <a16:creationId xmlns:a16="http://schemas.microsoft.com/office/drawing/2014/main" id="{81E73D83-F164-32DB-D17F-E40D9CECBAB7}"/>
+              </a:ext>
+            </a:extLst>
+          </p:cNvPr>
+          <p:cNvSpPr txBox="1"/>
+          <p:nvPr/>
+        </p:nvSpPr>
+        <p:spPr>
+          <a:xfrm>
+            <a:off x="5466641" y="2747288"/>
+            <a:ext cx="1355344" cy="312077"/>
+          </a:xfrm>
+          <a:prstGeom prst="rect">
+            <a:avLst/>
+          </a:prstGeom>
+          <a:solidFill>
+            <a:schemeClr val="accent4">
+              <a:lumMod val="20000"/>
+              <a:lumOff val="80000"/>
+            </a:schemeClr>
+          </a:solidFill>
+          <a:ln>
+            <a:solidFill>
+              <a:srgbClr val="FF0000"/>
+            </a:solidFill>
+          </a:ln>
+        </p:spPr>
+        <p:txBody>
+          <a:bodyPr wrap="square" rtlCol="0">
+            <a:spAutoFit/>
+          </a:bodyPr>
+          <a:lstStyle/>
+          <a:p>
+            <a:pPr algn="ctr"/>
+            <a:r>
+              <a:rPr lang="en-US" sz="1400" dirty="0"/>
+              <a:t>single stage</a:t>
+            </a:r>
+          </a:p>
+        </p:txBody>
+      </p:sp>
+      <p:sp>
+        <p:nvSpPr>
+          <p:cNvPr id="12" name="TextBox 11">
+            <a:extLst>
+              <a:ext uri="{FF2B5EF4-FFF2-40B4-BE49-F238E27FC236}">
+                <a16:creationId xmlns:a16="http://schemas.microsoft.com/office/drawing/2014/main" id="{669062B5-1722-D066-8A72-D5FECC3FA618}"/>
+              </a:ext>
+            </a:extLst>
+          </p:cNvPr>
+          <p:cNvSpPr txBox="1"/>
+          <p:nvPr/>
+        </p:nvSpPr>
+        <p:spPr>
+          <a:xfrm>
+            <a:off x="7277123" y="2729947"/>
+            <a:ext cx="1355344" cy="312077"/>
+          </a:xfrm>
+          <a:prstGeom prst="rect">
+            <a:avLst/>
+          </a:prstGeom>
+          <a:solidFill>
+            <a:schemeClr val="accent4">
+              <a:lumMod val="20000"/>
+              <a:lumOff val="80000"/>
+            </a:schemeClr>
+          </a:solidFill>
+          <a:ln>
+            <a:solidFill>
+              <a:srgbClr val="FF0000"/>
+            </a:solidFill>
+          </a:ln>
+        </p:spPr>
+        <p:txBody>
+          <a:bodyPr wrap="square" rtlCol="0">
+            <a:spAutoFit/>
+          </a:bodyPr>
+          <a:lstStyle/>
+          <a:p>
+            <a:pPr algn="ctr"/>
+            <a:r>
+              <a:rPr lang="en-US" sz="1400" dirty="0"/>
+              <a:t>two stage</a:t>
+            </a:r>
+          </a:p>
+        </p:txBody>
+      </p:sp>
+      <p:sp>
+        <p:nvSpPr>
+          <p:cNvPr id="13" name="TextBox 12">
+            <a:extLst>
+              <a:ext uri="{FF2B5EF4-FFF2-40B4-BE49-F238E27FC236}">
+                <a16:creationId xmlns:a16="http://schemas.microsoft.com/office/drawing/2014/main" id="{ECE3211B-2093-A9AB-D281-53FE6216A329}"/>
+              </a:ext>
+            </a:extLst>
+          </p:cNvPr>
+          <p:cNvSpPr txBox="1"/>
+          <p:nvPr/>
+        </p:nvSpPr>
+        <p:spPr>
+          <a:xfrm>
+            <a:off x="9464230" y="2737746"/>
+            <a:ext cx="1355344" cy="312077"/>
+          </a:xfrm>
+          <a:prstGeom prst="rect">
+            <a:avLst/>
+          </a:prstGeom>
+          <a:solidFill>
+            <a:schemeClr val="accent4">
+              <a:lumMod val="20000"/>
+              <a:lumOff val="80000"/>
+            </a:schemeClr>
+          </a:solidFill>
+          <a:ln>
+            <a:solidFill>
+              <a:srgbClr val="FF0000"/>
+            </a:solidFill>
+          </a:ln>
+        </p:spPr>
+        <p:txBody>
+          <a:bodyPr wrap="square" rtlCol="0">
+            <a:spAutoFit/>
+          </a:bodyPr>
+          <a:lstStyle/>
+          <a:p>
+            <a:pPr algn="ctr"/>
+            <a:r>
+              <a:rPr lang="en-US" sz="1400" dirty="0"/>
+              <a:t>three stage</a:t>
+            </a:r>
+          </a:p>
+        </p:txBody>
+      </p:sp>
     </p:spTree>
     <p:extLst>
       <p:ext uri="{BB962C8B-B14F-4D97-AF65-F5344CB8AC3E}">
@@ -6852,12 +6990,17 @@
         <p:spPr>
           <a:xfrm>
             <a:off x="143219" y="198304"/>
-            <a:ext cx="5508434" cy="369332"/>
+            <a:ext cx="4767448" cy="369332"/>
           </a:xfrm>
           <a:prstGeom prst="rect">
             <a:avLst/>
           </a:prstGeom>
           <a:noFill/>
+          <a:ln>
+            <a:solidFill>
+              <a:srgbClr val="FF0000"/>
+            </a:solidFill>
+          </a:ln>
         </p:spPr>
         <p:txBody>
           <a:bodyPr wrap="square" rtlCol="0">
@@ -6922,13 +7065,18 @@
         </p:nvSpPr>
         <p:spPr>
           <a:xfrm>
-            <a:off x="231355" y="3800819"/>
-            <a:ext cx="5023691" cy="1600438"/>
+            <a:off x="231356" y="3800819"/>
+            <a:ext cx="3775494" cy="1600438"/>
           </a:xfrm>
           <a:prstGeom prst="rect">
             <a:avLst/>
           </a:prstGeom>
           <a:noFill/>
+          <a:ln>
+            <a:solidFill>
+              <a:srgbClr val="FF0000"/>
+            </a:solidFill>
+          </a:ln>
         </p:spPr>
         <p:txBody>
           <a:bodyPr wrap="square" rtlCol="0">
@@ -6937,40 +7085,68 @@
           <a:lstStyle/>
           <a:p>
             <a:r>
-              <a:rPr lang="en-US" sz="1400" dirty="0"/>
+              <a:rPr lang="en-US" sz="1400" dirty="0">
+                <a:latin typeface="Calibri" panose="020F0502020204030204" pitchFamily="34" charset="0"/>
+                <a:ea typeface="Menlo" panose="020B0609030804020204" pitchFamily="49" charset="0"/>
+                <a:cs typeface="Calibri" panose="020F0502020204030204" pitchFamily="34" charset="0"/>
+              </a:rPr>
               <a:t>Missing lamp/light.</a:t>
             </a:r>
           </a:p>
           <a:p>
-            <a:endParaRPr lang="en-US" sz="1400" dirty="0"/>
-          </a:p>
-          <a:p>
-            <a:r>
-              <a:rPr lang="en-US" sz="1400" dirty="0"/>
+            <a:endParaRPr lang="en-US" sz="1400" dirty="0">
+              <a:latin typeface="Calibri" panose="020F0502020204030204" pitchFamily="34" charset="0"/>
+              <a:ea typeface="Menlo" panose="020B0609030804020204" pitchFamily="49" charset="0"/>
+              <a:cs typeface="Calibri" panose="020F0502020204030204" pitchFamily="34" charset="0"/>
+            </a:endParaRPr>
+          </a:p>
+          <a:p>
+            <a:r>
+              <a:rPr lang="en-US" sz="1400" dirty="0">
+                <a:latin typeface="Calibri" panose="020F0502020204030204" pitchFamily="34" charset="0"/>
+                <a:ea typeface="Menlo" panose="020B0609030804020204" pitchFamily="49" charset="0"/>
+                <a:cs typeface="Calibri" panose="020F0502020204030204" pitchFamily="34" charset="0"/>
+              </a:rPr>
               <a:t>The manual shows copyright year 2001.</a:t>
             </a:r>
           </a:p>
           <a:p>
             <a:r>
-              <a:rPr lang="en-US" sz="1400" dirty="0"/>
+              <a:rPr lang="en-US" sz="1400" dirty="0">
+                <a:latin typeface="Calibri" panose="020F0502020204030204" pitchFamily="34" charset="0"/>
+                <a:ea typeface="Menlo" panose="020B0609030804020204" pitchFamily="49" charset="0"/>
+                <a:cs typeface="Calibri" panose="020F0502020204030204" pitchFamily="34" charset="0"/>
+              </a:rPr>
               <a:t>Honda Engine Serial # GCAE-2072409</a:t>
             </a:r>
           </a:p>
           <a:p>
             <a:r>
-              <a:rPr lang="en-US" sz="1400" dirty="0"/>
+              <a:rPr lang="en-US" sz="1400" dirty="0">
+                <a:latin typeface="Calibri" panose="020F0502020204030204" pitchFamily="34" charset="0"/>
+                <a:ea typeface="Menlo" panose="020B0609030804020204" pitchFamily="49" charset="0"/>
+                <a:cs typeface="Calibri" panose="020F0502020204030204" pitchFamily="34" charset="0"/>
+              </a:rPr>
               <a:t>The label on the frame says that </a:t>
             </a:r>
           </a:p>
           <a:p>
             <a:r>
-              <a:rPr lang="en-US" sz="1400" dirty="0"/>
+              <a:rPr lang="en-US" sz="1400" dirty="0">
+                <a:latin typeface="Calibri" panose="020F0502020204030204" pitchFamily="34" charset="0"/>
+                <a:ea typeface="Menlo" panose="020B0609030804020204" pitchFamily="49" charset="0"/>
+                <a:cs typeface="Calibri" panose="020F0502020204030204" pitchFamily="34" charset="0"/>
+              </a:rPr>
               <a:t>it meets the US "EPA SNRE PH2 2007",</a:t>
             </a:r>
           </a:p>
           <a:p>
             <a:r>
-              <a:rPr lang="en-US" sz="1400" dirty="0"/>
+              <a:rPr lang="en-US" sz="1400" dirty="0">
+                <a:latin typeface="Calibri" panose="020F0502020204030204" pitchFamily="34" charset="0"/>
+                <a:ea typeface="Menlo" panose="020B0609030804020204" pitchFamily="49" charset="0"/>
+                <a:cs typeface="Calibri" panose="020F0502020204030204" pitchFamily="34" charset="0"/>
+              </a:rPr>
               <a:t>Does "2007" mean the year?</a:t>
             </a:r>
           </a:p>
@@ -6990,13 +7166,18 @@
         </p:nvSpPr>
         <p:spPr>
           <a:xfrm>
-            <a:off x="231355" y="5689678"/>
-            <a:ext cx="6097836" cy="261610"/>
+            <a:off x="231355" y="5501442"/>
+            <a:ext cx="3775494" cy="430887"/>
           </a:xfrm>
           <a:prstGeom prst="rect">
             <a:avLst/>
           </a:prstGeom>
           <a:noFill/>
+          <a:ln>
+            <a:solidFill>
+              <a:srgbClr val="FF0000"/>
+            </a:solidFill>
+          </a:ln>
         </p:spPr>
         <p:txBody>
           <a:bodyPr wrap="square">
@@ -7066,8 +7247,8 @@
         </p:blipFill>
         <p:spPr>
           <a:xfrm>
-            <a:off x="6180462" y="4630677"/>
-            <a:ext cx="4605969" cy="1541160"/>
+            <a:off x="4054661" y="2067268"/>
+            <a:ext cx="3683000" cy="1232334"/>
           </a:xfrm>
           <a:prstGeom prst="rect">
             <a:avLst/>
@@ -7102,7 +7283,7 @@
         </p:blipFill>
         <p:spPr>
           <a:xfrm>
-            <a:off x="6180462" y="3356167"/>
+            <a:off x="4054660" y="759728"/>
             <a:ext cx="3683000" cy="1130300"/>
           </a:xfrm>
           <a:prstGeom prst="rect">
@@ -7110,6 +7291,550 @@
           </a:prstGeom>
         </p:spPr>
       </p:pic>
+      <p:sp>
+        <p:nvSpPr>
+          <p:cNvPr id="3" name="TextBox 2">
+            <a:extLst>
+              <a:ext uri="{FF2B5EF4-FFF2-40B4-BE49-F238E27FC236}">
+                <a16:creationId xmlns:a16="http://schemas.microsoft.com/office/drawing/2014/main" id="{6FCF41BD-A4BE-9A2D-EB91-09DBB06DB940}"/>
+              </a:ext>
+            </a:extLst>
+          </p:cNvPr>
+          <p:cNvSpPr txBox="1"/>
+          <p:nvPr/>
+        </p:nvSpPr>
+        <p:spPr>
+          <a:xfrm>
+            <a:off x="4182626" y="3478554"/>
+            <a:ext cx="3555034" cy="1600438"/>
+          </a:xfrm>
+          <a:prstGeom prst="rect">
+            <a:avLst/>
+          </a:prstGeom>
+          <a:noFill/>
+          <a:ln>
+            <a:solidFill>
+              <a:srgbClr val="FF0000"/>
+            </a:solidFill>
+          </a:ln>
+        </p:spPr>
+        <p:txBody>
+          <a:bodyPr wrap="square" rtlCol="0">
+            <a:spAutoFit/>
+          </a:bodyPr>
+          <a:lstStyle/>
+          <a:p>
+            <a:r>
+              <a:rPr lang="en-US" sz="1400" dirty="0">
+                <a:latin typeface="Calibri" panose="020F0502020204030204" pitchFamily="34" charset="0"/>
+                <a:ea typeface="Menlo" panose="020B0609030804020204" pitchFamily="49" charset="0"/>
+                <a:cs typeface="Calibri" panose="020F0502020204030204" pitchFamily="34" charset="0"/>
+              </a:rPr>
+              <a:t>Missing lamp/light.</a:t>
+            </a:r>
+          </a:p>
+          <a:p>
+            <a:endParaRPr lang="en-US" sz="1400" dirty="0">
+              <a:latin typeface="Calibri" panose="020F0502020204030204" pitchFamily="34" charset="0"/>
+              <a:ea typeface="Menlo" panose="020B0609030804020204" pitchFamily="49" charset="0"/>
+              <a:cs typeface="Calibri" panose="020F0502020204030204" pitchFamily="34" charset="0"/>
+            </a:endParaRPr>
+          </a:p>
+          <a:p>
+            <a:r>
+              <a:rPr lang="en-US" sz="1400" dirty="0">
+                <a:latin typeface="Calibri" panose="020F0502020204030204" pitchFamily="34" charset="0"/>
+                <a:ea typeface="Menlo" panose="020B0609030804020204" pitchFamily="49" charset="0"/>
+                <a:cs typeface="Calibri" panose="020F0502020204030204" pitchFamily="34" charset="0"/>
+              </a:rPr>
+              <a:t>The manual shows copyright year 2001.</a:t>
+            </a:r>
+          </a:p>
+          <a:p>
+            <a:r>
+              <a:rPr lang="en-US" sz="1400" dirty="0">
+                <a:latin typeface="Calibri" panose="020F0502020204030204" pitchFamily="34" charset="0"/>
+                <a:ea typeface="Menlo" panose="020B0609030804020204" pitchFamily="49" charset="0"/>
+                <a:cs typeface="Calibri" panose="020F0502020204030204" pitchFamily="34" charset="0"/>
+              </a:rPr>
+              <a:t>Honda Engine Serial # GCAE-2072409</a:t>
+            </a:r>
+          </a:p>
+          <a:p>
+            <a:r>
+              <a:rPr lang="en-US" sz="1400" dirty="0">
+                <a:latin typeface="Calibri" panose="020F0502020204030204" pitchFamily="34" charset="0"/>
+                <a:ea typeface="Menlo" panose="020B0609030804020204" pitchFamily="49" charset="0"/>
+                <a:cs typeface="Calibri" panose="020F0502020204030204" pitchFamily="34" charset="0"/>
+              </a:rPr>
+              <a:t>The label on the frame says that </a:t>
+            </a:r>
+          </a:p>
+          <a:p>
+            <a:r>
+              <a:rPr lang="en-US" sz="1400" dirty="0">
+                <a:latin typeface="Calibri" panose="020F0502020204030204" pitchFamily="34" charset="0"/>
+                <a:ea typeface="Menlo" panose="020B0609030804020204" pitchFamily="49" charset="0"/>
+                <a:cs typeface="Calibri" panose="020F0502020204030204" pitchFamily="34" charset="0"/>
+              </a:rPr>
+              <a:t>it meets the US "EPA SNRE PH2 2007",</a:t>
+            </a:r>
+          </a:p>
+          <a:p>
+            <a:r>
+              <a:rPr lang="en-US" sz="1400" dirty="0">
+                <a:latin typeface="Calibri" panose="020F0502020204030204" pitchFamily="34" charset="0"/>
+                <a:ea typeface="Menlo" panose="020B0609030804020204" pitchFamily="49" charset="0"/>
+                <a:cs typeface="Calibri" panose="020F0502020204030204" pitchFamily="34" charset="0"/>
+              </a:rPr>
+              <a:t>Does "2007" mean the year?</a:t>
+            </a:r>
+          </a:p>
+        </p:txBody>
+      </p:sp>
+      <p:pic>
+        <p:nvPicPr>
+          <p:cNvPr id="1026" name="Picture 2" descr="Honda HS724, HS80, HS828, HS928 Snow ...">
+            <a:extLst>
+              <a:ext uri="{FF2B5EF4-FFF2-40B4-BE49-F238E27FC236}">
+                <a16:creationId xmlns:a16="http://schemas.microsoft.com/office/drawing/2014/main" id="{9CFF6CD0-FD95-0BC3-5DF8-FAC3B8454D06}"/>
+              </a:ext>
+            </a:extLst>
+          </p:cNvPr>
+          <p:cNvPicPr>
+            <a:picLocks noChangeAspect="1" noChangeArrowheads="1"/>
+          </p:cNvPicPr>
+          <p:nvPr/>
+        </p:nvPicPr>
+        <p:blipFill rotWithShape="1">
+          <a:blip r:embed="rId6" cstate="email">
+            <a:extLst>
+              <a:ext uri="{28A0092B-C50C-407E-A947-70E740481C1C}">
+                <a14:useLocalDpi xmlns:a14="http://schemas.microsoft.com/office/drawing/2010/main"/>
+              </a:ext>
+            </a:extLst>
+          </a:blip>
+          <a:srcRect/>
+          <a:stretch>
+            <a:fillRect/>
+          </a:stretch>
+        </p:blipFill>
+        <p:spPr bwMode="auto">
+          <a:xfrm>
+            <a:off x="10447866" y="5728614"/>
+            <a:ext cx="1744133" cy="1126581"/>
+          </a:xfrm>
+          <a:prstGeom prst="rect">
+            <a:avLst/>
+          </a:prstGeom>
+          <a:noFill/>
+          <a:extLst>
+            <a:ext uri="{909E8E84-426E-40DD-AFC4-6F175D3DCCD1}">
+              <a14:hiddenFill xmlns:a14="http://schemas.microsoft.com/office/drawing/2010/main">
+                <a:solidFill>
+                  <a:srgbClr val="FFFFFF"/>
+                </a:solidFill>
+              </a14:hiddenFill>
+            </a:ext>
+          </a:extLst>
+        </p:spPr>
+      </p:pic>
+      <p:pic>
+        <p:nvPicPr>
+          <p:cNvPr id="1028" name="Picture 4">
+            <a:extLst>
+              <a:ext uri="{FF2B5EF4-FFF2-40B4-BE49-F238E27FC236}">
+                <a16:creationId xmlns:a16="http://schemas.microsoft.com/office/drawing/2014/main" id="{DFC31ABE-65CD-FE89-C7C0-CC7B9B66924E}"/>
+              </a:ext>
+            </a:extLst>
+          </p:cNvPr>
+          <p:cNvPicPr>
+            <a:picLocks noChangeAspect="1" noChangeArrowheads="1"/>
+          </p:cNvPicPr>
+          <p:nvPr/>
+        </p:nvPicPr>
+        <p:blipFill>
+          <a:blip r:embed="rId7" cstate="email">
+            <a:extLst>
+              <a:ext uri="{28A0092B-C50C-407E-A947-70E740481C1C}">
+                <a14:useLocalDpi xmlns:a14="http://schemas.microsoft.com/office/drawing/2010/main"/>
+              </a:ext>
+            </a:extLst>
+          </a:blip>
+          <a:srcRect/>
+          <a:stretch>
+            <a:fillRect/>
+          </a:stretch>
+        </p:blipFill>
+        <p:spPr bwMode="auto">
+          <a:xfrm>
+            <a:off x="10650730" y="4779676"/>
+            <a:ext cx="948938" cy="948938"/>
+          </a:xfrm>
+          <a:prstGeom prst="rect">
+            <a:avLst/>
+          </a:prstGeom>
+          <a:noFill/>
+          <a:extLst>
+            <a:ext uri="{909E8E84-426E-40DD-AFC4-6F175D3DCCD1}">
+              <a14:hiddenFill xmlns:a14="http://schemas.microsoft.com/office/drawing/2010/main">
+                <a:solidFill>
+                  <a:srgbClr val="FFFFFF"/>
+                </a:solidFill>
+              </a14:hiddenFill>
+            </a:ext>
+          </a:extLst>
+        </p:spPr>
+      </p:pic>
+      <p:sp>
+        <p:nvSpPr>
+          <p:cNvPr id="6" name="TextBox 5">
+            <a:extLst>
+              <a:ext uri="{FF2B5EF4-FFF2-40B4-BE49-F238E27FC236}">
+                <a16:creationId xmlns:a16="http://schemas.microsoft.com/office/drawing/2014/main" id="{3409DCCF-570B-E22A-AE41-3C77C59B6014}"/>
+              </a:ext>
+            </a:extLst>
+          </p:cNvPr>
+          <p:cNvSpPr txBox="1"/>
+          <p:nvPr/>
+        </p:nvSpPr>
+        <p:spPr>
+          <a:xfrm>
+            <a:off x="8254285" y="4888798"/>
+            <a:ext cx="1804114" cy="380389"/>
+          </a:xfrm>
+          <a:prstGeom prst="rect">
+            <a:avLst/>
+          </a:prstGeom>
+          <a:noFill/>
+          <a:ln>
+            <a:solidFill>
+              <a:srgbClr val="FF0000"/>
+            </a:solidFill>
+          </a:ln>
+        </p:spPr>
+        <p:txBody>
+          <a:bodyPr wrap="square" rtlCol="0">
+            <a:spAutoFit/>
+          </a:bodyPr>
+          <a:lstStyle/>
+          <a:p>
+            <a:r>
+              <a:rPr lang="en-US" dirty="0"/>
+              <a:t>Auger Shear Pins</a:t>
+            </a:r>
+          </a:p>
+        </p:txBody>
+      </p:sp>
+      <p:sp>
+        <p:nvSpPr>
+          <p:cNvPr id="10" name="TextBox 9">
+            <a:extLst>
+              <a:ext uri="{FF2B5EF4-FFF2-40B4-BE49-F238E27FC236}">
+                <a16:creationId xmlns:a16="http://schemas.microsoft.com/office/drawing/2014/main" id="{974ACF3A-0377-1E1B-C555-8886820D3B9D}"/>
+              </a:ext>
+            </a:extLst>
+          </p:cNvPr>
+          <p:cNvSpPr txBox="1"/>
+          <p:nvPr/>
+        </p:nvSpPr>
+        <p:spPr>
+          <a:xfrm>
+            <a:off x="8192483" y="6107238"/>
+            <a:ext cx="2255383" cy="369332"/>
+          </a:xfrm>
+          <a:prstGeom prst="rect">
+            <a:avLst/>
+          </a:prstGeom>
+          <a:noFill/>
+          <a:ln>
+            <a:solidFill>
+              <a:srgbClr val="FF0000"/>
+            </a:solidFill>
+          </a:ln>
+        </p:spPr>
+        <p:txBody>
+          <a:bodyPr wrap="square" rtlCol="0">
+            <a:spAutoFit/>
+          </a:bodyPr>
+          <a:lstStyle/>
+          <a:p>
+            <a:r>
+              <a:rPr lang="en-US" dirty="0"/>
+              <a:t>Impeller Shear Bolt</a:t>
+            </a:r>
+          </a:p>
+        </p:txBody>
+      </p:sp>
+      <p:sp>
+        <p:nvSpPr>
+          <p:cNvPr id="11" name="TextBox 10">
+            <a:extLst>
+              <a:ext uri="{FF2B5EF4-FFF2-40B4-BE49-F238E27FC236}">
+                <a16:creationId xmlns:a16="http://schemas.microsoft.com/office/drawing/2014/main" id="{21CF28A1-0FE0-34E3-8C3B-5414EF415193}"/>
+              </a:ext>
+            </a:extLst>
+          </p:cNvPr>
+          <p:cNvSpPr txBox="1"/>
+          <p:nvPr/>
+        </p:nvSpPr>
+        <p:spPr>
+          <a:xfrm>
+            <a:off x="7983747" y="189159"/>
+            <a:ext cx="3615921" cy="4185761"/>
+          </a:xfrm>
+          <a:prstGeom prst="rect">
+            <a:avLst/>
+          </a:prstGeom>
+          <a:noFill/>
+          <a:ln>
+            <a:solidFill>
+              <a:srgbClr val="FF0000"/>
+            </a:solidFill>
+          </a:ln>
+        </p:spPr>
+        <p:txBody>
+          <a:bodyPr wrap="square" rtlCol="0">
+            <a:spAutoFit/>
+          </a:bodyPr>
+          <a:lstStyle/>
+          <a:p>
+            <a:r>
+              <a:rPr lang="en-US" sz="1400" dirty="0">
+                <a:latin typeface="Calibri" panose="020F0502020204030204" pitchFamily="34" charset="0"/>
+                <a:ea typeface="Menlo" panose="020B0609030804020204" pitchFamily="49" charset="0"/>
+                <a:cs typeface="Calibri" panose="020F0502020204030204" pitchFamily="34" charset="0"/>
+              </a:rPr>
+              <a:t>Auger Belt - Spins the auger/fan</a:t>
+            </a:r>
+          </a:p>
+          <a:p>
+            <a:r>
+              <a:rPr lang="en-US" sz="1400" dirty="0">
+                <a:latin typeface="Calibri" panose="020F0502020204030204" pitchFamily="34" charset="0"/>
+                <a:ea typeface="Menlo" panose="020B0609030804020204" pitchFamily="49" charset="0"/>
+                <a:cs typeface="Calibri" panose="020F0502020204030204" pitchFamily="34" charset="0"/>
+              </a:rPr>
+              <a:t>Part # 22432-736-A01</a:t>
+            </a:r>
+          </a:p>
+          <a:p>
+            <a:r>
+              <a:rPr lang="en-US" sz="1400" dirty="0">
+                <a:latin typeface="Calibri" panose="020F0502020204030204" pitchFamily="34" charset="0"/>
+                <a:ea typeface="Menlo" panose="020B0609030804020204" pitchFamily="49" charset="0"/>
+                <a:cs typeface="Calibri" panose="020F0502020204030204" pitchFamily="34" charset="0"/>
+              </a:rPr>
+              <a:t>5/8" x 37" (LB-33)</a:t>
+            </a:r>
+          </a:p>
+          <a:p>
+            <a:endParaRPr lang="en-US" sz="1400" dirty="0">
+              <a:latin typeface="Calibri" panose="020F0502020204030204" pitchFamily="34" charset="0"/>
+              <a:ea typeface="Menlo" panose="020B0609030804020204" pitchFamily="49" charset="0"/>
+              <a:cs typeface="Calibri" panose="020F0502020204030204" pitchFamily="34" charset="0"/>
+            </a:endParaRPr>
+          </a:p>
+          <a:p>
+            <a:r>
+              <a:rPr lang="en-US" sz="1400" dirty="0">
+                <a:latin typeface="Calibri" panose="020F0502020204030204" pitchFamily="34" charset="0"/>
+                <a:ea typeface="Menlo" panose="020B0609030804020204" pitchFamily="49" charset="0"/>
+                <a:cs typeface="Calibri" panose="020F0502020204030204" pitchFamily="34" charset="0"/>
+              </a:rPr>
+              <a:t>Drive Belt - Moves the machine</a:t>
+            </a:r>
+          </a:p>
+          <a:p>
+            <a:r>
+              <a:rPr lang="en-US" sz="1400" dirty="0">
+                <a:latin typeface="Calibri" panose="020F0502020204030204" pitchFamily="34" charset="0"/>
+                <a:ea typeface="Menlo" panose="020B0609030804020204" pitchFamily="49" charset="0"/>
+                <a:cs typeface="Calibri" panose="020F0502020204030204" pitchFamily="34" charset="0"/>
+              </a:rPr>
+              <a:t>Part # 22431-767-003</a:t>
+            </a:r>
+          </a:p>
+          <a:p>
+            <a:r>
+              <a:rPr lang="en-US" sz="1400" dirty="0">
+                <a:latin typeface="Calibri" panose="020F0502020204030204" pitchFamily="34" charset="0"/>
+                <a:ea typeface="Menlo" panose="020B0609030804020204" pitchFamily="49" charset="0"/>
+                <a:cs typeface="Calibri" panose="020F0502020204030204" pitchFamily="34" charset="0"/>
+              </a:rPr>
+              <a:t>1/2" x 28" (SA-27)</a:t>
+            </a:r>
+          </a:p>
+          <a:p>
+            <a:endParaRPr lang="en-US" sz="1400" dirty="0">
+              <a:latin typeface="Calibri" panose="020F0502020204030204" pitchFamily="34" charset="0"/>
+              <a:ea typeface="Menlo" panose="020B0609030804020204" pitchFamily="49" charset="0"/>
+              <a:cs typeface="Calibri" panose="020F0502020204030204" pitchFamily="34" charset="0"/>
+            </a:endParaRPr>
+          </a:p>
+          <a:p>
+            <a:r>
+              <a:rPr lang="en-US" sz="1400" dirty="0">
+                <a:latin typeface="Calibri" panose="020F0502020204030204" pitchFamily="34" charset="0"/>
+                <a:ea typeface="Menlo" panose="020B0609030804020204" pitchFamily="49" charset="0"/>
+                <a:cs typeface="Calibri" panose="020F0502020204030204" pitchFamily="34" charset="0"/>
+              </a:rPr>
+              <a:t>Auger Shear Bolts (Quantity: 2 - left &amp; right)</a:t>
+            </a:r>
+          </a:p>
+          <a:p>
+            <a:r>
+              <a:rPr lang="en-US" sz="1400" dirty="0">
+                <a:latin typeface="Calibri" panose="020F0502020204030204" pitchFamily="34" charset="0"/>
+                <a:ea typeface="Menlo" panose="020B0609030804020204" pitchFamily="49" charset="0"/>
+                <a:cs typeface="Calibri" panose="020F0502020204030204" pitchFamily="34" charset="0"/>
+              </a:rPr>
+              <a:t>Size: 6mm x 16mm.</a:t>
+            </a:r>
+          </a:p>
+          <a:p>
+            <a:r>
+              <a:rPr lang="en-US" sz="1400" dirty="0">
+                <a:latin typeface="Calibri" panose="020F0502020204030204" pitchFamily="34" charset="0"/>
+                <a:ea typeface="Menlo" panose="020B0609030804020204" pitchFamily="49" charset="0"/>
+                <a:cs typeface="Calibri" panose="020F0502020204030204" pitchFamily="34" charset="0"/>
+              </a:rPr>
+              <a:t>Part # 92101-06016-0A (Bolt)</a:t>
+            </a:r>
+          </a:p>
+          <a:p>
+            <a:r>
+              <a:rPr lang="en-US" sz="1400" dirty="0">
+                <a:latin typeface="Calibri" panose="020F0502020204030204" pitchFamily="34" charset="0"/>
+                <a:ea typeface="Menlo" panose="020B0609030804020204" pitchFamily="49" charset="0"/>
+                <a:cs typeface="Calibri" panose="020F0502020204030204" pitchFamily="34" charset="0"/>
+              </a:rPr>
+              <a:t>Part # 90114-SA0-000  (Nut)</a:t>
+            </a:r>
+          </a:p>
+          <a:p>
+            <a:endParaRPr lang="en-US" sz="1400" dirty="0">
+              <a:latin typeface="Calibri" panose="020F0502020204030204" pitchFamily="34" charset="0"/>
+              <a:ea typeface="Menlo" panose="020B0609030804020204" pitchFamily="49" charset="0"/>
+              <a:cs typeface="Calibri" panose="020F0502020204030204" pitchFamily="34" charset="0"/>
+            </a:endParaRPr>
+          </a:p>
+          <a:p>
+            <a:r>
+              <a:rPr lang="en-US" sz="1400" dirty="0">
+                <a:latin typeface="Calibri" panose="020F0502020204030204" pitchFamily="34" charset="0"/>
+                <a:ea typeface="Menlo" panose="020B0609030804020204" pitchFamily="49" charset="0"/>
+                <a:cs typeface="Calibri" panose="020F0502020204030204" pitchFamily="34" charset="0"/>
+              </a:rPr>
+              <a:t>Blower (Impeller) Shear Bolt (Quantity: 1)</a:t>
+            </a:r>
+          </a:p>
+          <a:p>
+            <a:r>
+              <a:rPr lang="en-US" sz="1400" dirty="0">
+                <a:latin typeface="Calibri" panose="020F0502020204030204" pitchFamily="34" charset="0"/>
+                <a:ea typeface="Menlo" panose="020B0609030804020204" pitchFamily="49" charset="0"/>
+                <a:cs typeface="Calibri" panose="020F0502020204030204" pitchFamily="34" charset="0"/>
+              </a:rPr>
+              <a:t>Located behind the auger on the impeller fan</a:t>
+            </a:r>
+          </a:p>
+          <a:p>
+            <a:r>
+              <a:rPr lang="en-US" sz="1400" dirty="0">
+                <a:latin typeface="Calibri" panose="020F0502020204030204" pitchFamily="34" charset="0"/>
+                <a:ea typeface="Menlo" panose="020B0609030804020204" pitchFamily="49" charset="0"/>
+                <a:cs typeface="Calibri" panose="020F0502020204030204" pitchFamily="34" charset="0"/>
+              </a:rPr>
+              <a:t>Special 6mm bolt with a specific shoulder</a:t>
+            </a:r>
+          </a:p>
+          <a:p>
+            <a:r>
+              <a:rPr lang="en-US" sz="1400" dirty="0">
+                <a:latin typeface="Calibri" panose="020F0502020204030204" pitchFamily="34" charset="0"/>
+                <a:ea typeface="Menlo" panose="020B0609030804020204" pitchFamily="49" charset="0"/>
+                <a:cs typeface="Calibri" panose="020F0502020204030204" pitchFamily="34" charset="0"/>
+              </a:rPr>
+              <a:t>(approx. 10mm diameter shoulder)</a:t>
+            </a:r>
+          </a:p>
+          <a:p>
+            <a:r>
+              <a:rPr lang="en-US" sz="1400" dirty="0">
+                <a:latin typeface="Calibri" panose="020F0502020204030204" pitchFamily="34" charset="0"/>
+                <a:ea typeface="Menlo" panose="020B0609030804020204" pitchFamily="49" charset="0"/>
+                <a:cs typeface="Calibri" panose="020F0502020204030204" pitchFamily="34" charset="0"/>
+              </a:rPr>
+              <a:t>Part # 90102-732-010 (Bolt)</a:t>
+            </a:r>
+          </a:p>
+          <a:p>
+            <a:r>
+              <a:rPr lang="en-US" sz="1400" dirty="0">
+                <a:latin typeface="Calibri" panose="020F0502020204030204" pitchFamily="34" charset="0"/>
+                <a:ea typeface="Menlo" panose="020B0609030804020204" pitchFamily="49" charset="0"/>
+                <a:cs typeface="Calibri" panose="020F0502020204030204" pitchFamily="34" charset="0"/>
+              </a:rPr>
+              <a:t>Part # 90114-SA0-000 (Nut)</a:t>
+            </a:r>
+          </a:p>
+        </p:txBody>
+      </p:sp>
+      <p:sp>
+        <p:nvSpPr>
+          <p:cNvPr id="12" name="TextBox 11">
+            <a:extLst>
+              <a:ext uri="{FF2B5EF4-FFF2-40B4-BE49-F238E27FC236}">
+                <a16:creationId xmlns:a16="http://schemas.microsoft.com/office/drawing/2014/main" id="{E54181FD-2217-C00A-9910-3DAA1743D4F0}"/>
+              </a:ext>
+            </a:extLst>
+          </p:cNvPr>
+          <p:cNvSpPr txBox="1"/>
+          <p:nvPr/>
+        </p:nvSpPr>
+        <p:spPr>
+          <a:xfrm>
+            <a:off x="4182626" y="5239831"/>
+            <a:ext cx="3555034" cy="1384995"/>
+          </a:xfrm>
+          <a:prstGeom prst="rect">
+            <a:avLst/>
+          </a:prstGeom>
+          <a:noFill/>
+          <a:ln>
+            <a:solidFill>
+              <a:srgbClr val="FF0000"/>
+            </a:solidFill>
+          </a:ln>
+        </p:spPr>
+        <p:txBody>
+          <a:bodyPr wrap="square" rtlCol="0">
+            <a:spAutoFit/>
+          </a:bodyPr>
+          <a:lstStyle/>
+          <a:p>
+            <a:r>
+              <a:rPr lang="en-US" sz="1400" dirty="0">
+                <a:latin typeface="Calibri" panose="020F0502020204030204" pitchFamily="34" charset="0"/>
+                <a:ea typeface="Menlo" panose="020B0609030804020204" pitchFamily="49" charset="0"/>
+                <a:cs typeface="Calibri" panose="020F0502020204030204" pitchFamily="34" charset="0"/>
+              </a:rPr>
+              <a:t>We may install impeller kit which uses rubber pieces to attach to the blades to reduce the spacing between the impeller and the walls – thus preventing snow accumulation.</a:t>
+            </a:r>
+          </a:p>
+          <a:p>
+            <a:r>
+              <a:rPr lang="en-US" sz="1400" dirty="0">
+                <a:latin typeface="Calibri" panose="020F0502020204030204" pitchFamily="34" charset="0"/>
+                <a:ea typeface="Menlo" panose="020B0609030804020204" pitchFamily="49" charset="0"/>
+                <a:cs typeface="Calibri" panose="020F0502020204030204" pitchFamily="34" charset="0"/>
+              </a:rPr>
+              <a:t>For each blade we get pre-cut rubber paddle, stainless backing plate, bolts, washers, nuts. </a:t>
+            </a:r>
+          </a:p>
+        </p:txBody>
+      </p:sp>
     </p:spTree>
     <p:extLst>
       <p:ext uri="{BB962C8B-B14F-4D97-AF65-F5344CB8AC3E}">
@@ -7154,8 +7879,8 @@
         </p:nvSpPr>
         <p:spPr>
           <a:xfrm>
-            <a:off x="143219" y="198304"/>
-            <a:ext cx="5508434" cy="646331"/>
+            <a:off x="210952" y="1369399"/>
+            <a:ext cx="3971581" cy="646331"/>
           </a:xfrm>
           <a:prstGeom prst="rect">
             <a:avLst/>
@@ -7170,14 +7895,7 @@
           <a:p>
             <a:r>
               <a:rPr lang="en-US" dirty="0"/>
-              <a:t>Kress KG471 professional-grade 60V battery-powered </a:t>
-            </a:r>
-            <a:br>
-              <a:rPr lang="en-US" dirty="0"/>
-            </a:br>
-            <a:r>
-              <a:rPr lang="en-US" dirty="0"/>
-              <a:t>2-stage snow blower</a:t>
+              <a:t>Kress KG471 professional-grade 60V battery-powered 2-stage snow blower</a:t>
             </a:r>
           </a:p>
         </p:txBody>
@@ -7210,7 +7928,7 @@
         </p:blipFill>
         <p:spPr>
           <a:xfrm>
-            <a:off x="715433" y="1677855"/>
+            <a:off x="588152" y="2283049"/>
             <a:ext cx="4754033" cy="4251013"/>
           </a:xfrm>
           <a:prstGeom prst="rect">
@@ -7218,6 +7936,41 @@
           </a:prstGeom>
         </p:spPr>
       </p:pic>
+      <p:sp>
+        <p:nvSpPr>
+          <p:cNvPr id="4" name="TextBox 3">
+            <a:extLst>
+              <a:ext uri="{FF2B5EF4-FFF2-40B4-BE49-F238E27FC236}">
+                <a16:creationId xmlns:a16="http://schemas.microsoft.com/office/drawing/2014/main" id="{51E35D5C-7AF6-7109-427A-D1F06A571E9E}"/>
+              </a:ext>
+            </a:extLst>
+          </p:cNvPr>
+          <p:cNvSpPr txBox="1"/>
+          <p:nvPr/>
+        </p:nvSpPr>
+        <p:spPr>
+          <a:xfrm>
+            <a:off x="210952" y="323938"/>
+            <a:ext cx="4754033" cy="369332"/>
+          </a:xfrm>
+          <a:prstGeom prst="rect">
+            <a:avLst/>
+          </a:prstGeom>
+          <a:noFill/>
+        </p:spPr>
+        <p:txBody>
+          <a:bodyPr wrap="square" rtlCol="0">
+            <a:spAutoFit/>
+          </a:bodyPr>
+          <a:lstStyle/>
+          <a:p>
+            <a:r>
+              <a:rPr lang="en-US" dirty="0"/>
+              <a:t>I bought this electric snowblower in Feb 2026</a:t>
+            </a:r>
+          </a:p>
+        </p:txBody>
+      </p:sp>
     </p:spTree>
     <p:extLst>
       <p:ext uri="{BB962C8B-B14F-4D97-AF65-F5344CB8AC3E}">

--- a/snow_plow_blower.pptx
+++ b/snow_plow_blower.pptx
@@ -207,7 +207,7 @@
           <a:p>
             <a:fld id="{25BB0166-7DA8-4040-98E7-81186BCABFDE}" type="datetimeFigureOut">
               <a:rPr lang="en-US" smtClean="0"/>
-              <a:t>3/7/26</a:t>
+              <a:t>3/29/26</a:t>
             </a:fld>
             <a:endParaRPr lang="en-US"/>
           </a:p>
@@ -620,7 +620,7 @@
           <a:lstStyle/>
           <a:p>
             <a:fld id="{5F491023-0B0A-7041-9F06-D25A50EF063B}" type="datetimeFigureOut">
-              <a:t>3/7/26</a:t>
+              <a:t>3/29/26</a:t>
             </a:fld>
             <a:endParaRPr lang="en-US"/>
           </a:p>
@@ -816,7 +816,7 @@
           <a:lstStyle/>
           <a:p>
             <a:fld id="{5F491023-0B0A-7041-9F06-D25A50EF063B}" type="datetimeFigureOut">
-              <a:t>3/7/26</a:t>
+              <a:t>3/29/26</a:t>
             </a:fld>
             <a:endParaRPr lang="en-US"/>
           </a:p>
@@ -1022,7 +1022,7 @@
           <a:lstStyle/>
           <a:p>
             <a:fld id="{5F491023-0B0A-7041-9F06-D25A50EF063B}" type="datetimeFigureOut">
-              <a:t>3/7/26</a:t>
+              <a:t>3/29/26</a:t>
             </a:fld>
             <a:endParaRPr lang="en-US"/>
           </a:p>
@@ -1218,7 +1218,7 @@
           <a:lstStyle/>
           <a:p>
             <a:fld id="{5F491023-0B0A-7041-9F06-D25A50EF063B}" type="datetimeFigureOut">
-              <a:t>3/7/26</a:t>
+              <a:t>3/29/26</a:t>
             </a:fld>
             <a:endParaRPr lang="en-US"/>
           </a:p>
@@ -1491,7 +1491,7 @@
           <a:lstStyle/>
           <a:p>
             <a:fld id="{5F491023-0B0A-7041-9F06-D25A50EF063B}" type="datetimeFigureOut">
-              <a:t>3/7/26</a:t>
+              <a:t>3/29/26</a:t>
             </a:fld>
             <a:endParaRPr lang="en-US"/>
           </a:p>
@@ -1754,7 +1754,7 @@
           <a:lstStyle/>
           <a:p>
             <a:fld id="{5F491023-0B0A-7041-9F06-D25A50EF063B}" type="datetimeFigureOut">
-              <a:t>3/7/26</a:t>
+              <a:t>3/29/26</a:t>
             </a:fld>
             <a:endParaRPr lang="en-US"/>
           </a:p>
@@ -2164,7 +2164,7 @@
           <a:lstStyle/>
           <a:p>
             <a:fld id="{5F491023-0B0A-7041-9F06-D25A50EF063B}" type="datetimeFigureOut">
-              <a:t>3/7/26</a:t>
+              <a:t>3/29/26</a:t>
             </a:fld>
             <a:endParaRPr lang="en-US"/>
           </a:p>
@@ -2303,7 +2303,7 @@
           <a:lstStyle/>
           <a:p>
             <a:fld id="{5F491023-0B0A-7041-9F06-D25A50EF063B}" type="datetimeFigureOut">
-              <a:t>3/7/26</a:t>
+              <a:t>3/29/26</a:t>
             </a:fld>
             <a:endParaRPr lang="en-US"/>
           </a:p>
@@ -2414,7 +2414,7 @@
           <a:lstStyle/>
           <a:p>
             <a:fld id="{5F491023-0B0A-7041-9F06-D25A50EF063B}" type="datetimeFigureOut">
-              <a:t>3/7/26</a:t>
+              <a:t>3/29/26</a:t>
             </a:fld>
             <a:endParaRPr lang="en-US"/>
           </a:p>
@@ -2723,7 +2723,7 @@
           <a:lstStyle/>
           <a:p>
             <a:fld id="{5F491023-0B0A-7041-9F06-D25A50EF063B}" type="datetimeFigureOut">
-              <a:t>3/7/26</a:t>
+              <a:t>3/29/26</a:t>
             </a:fld>
             <a:endParaRPr lang="en-US"/>
           </a:p>
@@ -3009,7 +3009,7 @@
           <a:lstStyle/>
           <a:p>
             <a:fld id="{5F491023-0B0A-7041-9F06-D25A50EF063B}" type="datetimeFigureOut">
-              <a:t>3/7/26</a:t>
+              <a:t>3/29/26</a:t>
             </a:fld>
             <a:endParaRPr lang="en-US"/>
           </a:p>
@@ -3248,7 +3248,7 @@
           </a:lstStyle>
           <a:p>
             <a:fld id="{5F491023-0B0A-7041-9F06-D25A50EF063B}" type="datetimeFigureOut">
-              <a:t>3/7/26</a:t>
+              <a:t>3/29/26</a:t>
             </a:fld>
             <a:endParaRPr lang="en-US"/>
           </a:p>
@@ -9016,6 +9016,86 @@
           </a:prstGeom>
         </p:spPr>
       </p:pic>
+      <p:pic>
+        <p:nvPicPr>
+          <p:cNvPr id="4" name="Picture 3">
+            <a:extLst>
+              <a:ext uri="{FF2B5EF4-FFF2-40B4-BE49-F238E27FC236}">
+                <a16:creationId xmlns:a16="http://schemas.microsoft.com/office/drawing/2014/main" id="{67F3C68C-FBD8-EB3F-6EDC-FD6E191FE74F}"/>
+              </a:ext>
+            </a:extLst>
+          </p:cNvPr>
+          <p:cNvPicPr>
+            <a:picLocks noChangeAspect="1"/>
+          </p:cNvPicPr>
+          <p:nvPr/>
+        </p:nvPicPr>
+        <p:blipFill>
+          <a:blip r:embed="rId10" cstate="email">
+            <a:extLst>
+              <a:ext uri="{28A0092B-C50C-407E-A947-70E740481C1C}">
+                <a14:useLocalDpi xmlns:a14="http://schemas.microsoft.com/office/drawing/2010/main"/>
+              </a:ext>
+            </a:extLst>
+          </a:blip>
+          <a:srcRect/>
+          <a:stretch>
+            <a:fillRect/>
+          </a:stretch>
+        </p:blipFill>
+        <p:spPr>
+          <a:xfrm>
+            <a:off x="9956800" y="4146175"/>
+            <a:ext cx="2091981" cy="1563331"/>
+          </a:xfrm>
+          <a:prstGeom prst="rect">
+            <a:avLst/>
+          </a:prstGeom>
+        </p:spPr>
+      </p:pic>
+      <p:sp>
+        <p:nvSpPr>
+          <p:cNvPr id="6" name="TextBox 5">
+            <a:extLst>
+              <a:ext uri="{FF2B5EF4-FFF2-40B4-BE49-F238E27FC236}">
+                <a16:creationId xmlns:a16="http://schemas.microsoft.com/office/drawing/2014/main" id="{8647E8BD-2C69-3BCA-954D-D86DC2536C87}"/>
+              </a:ext>
+            </a:extLst>
+          </p:cNvPr>
+          <p:cNvSpPr txBox="1"/>
+          <p:nvPr/>
+        </p:nvSpPr>
+        <p:spPr>
+          <a:xfrm>
+            <a:off x="8923868" y="5936977"/>
+            <a:ext cx="3124914" cy="646331"/>
+          </a:xfrm>
+          <a:prstGeom prst="rect">
+            <a:avLst/>
+          </a:prstGeom>
+          <a:noFill/>
+        </p:spPr>
+        <p:txBody>
+          <a:bodyPr wrap="square" rtlCol="0">
+            <a:spAutoFit/>
+          </a:bodyPr>
+          <a:lstStyle/>
+          <a:p>
+            <a:r>
+              <a:rPr lang="en-US" sz="1200" dirty="0"/>
+              <a:t>Our winch is Badlands  ZXR 2500 </a:t>
+            </a:r>
+            <a:r>
+              <a:rPr lang="en-US" sz="1200" dirty="0" err="1"/>
+              <a:t>lbs</a:t>
+            </a:r>
+            <a:r>
+              <a:rPr lang="en-US" sz="1200" dirty="0"/>
+              <a:t> with 50 ft  3/16 inch Synthetic Winch Line Cable Rope 8,350 LBs</a:t>
+            </a:r>
+          </a:p>
+        </p:txBody>
+      </p:sp>
     </p:spTree>
     <p:extLst>
       <p:ext uri="{BB962C8B-B14F-4D97-AF65-F5344CB8AC3E}">

--- a/snow_plow_blower.pptx
+++ b/snow_plow_blower.pptx
@@ -5,7 +5,7 @@
     <p:sldMasterId id="2147483648" r:id="rId1"/>
   </p:sldMasterIdLst>
   <p:notesMasterIdLst>
-    <p:notesMasterId r:id="rId13"/>
+    <p:notesMasterId r:id="rId14"/>
   </p:notesMasterIdLst>
   <p:sldIdLst>
     <p:sldId id="261" r:id="rId2"/>
@@ -18,7 +18,8 @@
     <p:sldId id="268" r:id="rId9"/>
     <p:sldId id="264" r:id="rId10"/>
     <p:sldId id="270" r:id="rId11"/>
-    <p:sldId id="266" r:id="rId12"/>
+    <p:sldId id="272" r:id="rId12"/>
+    <p:sldId id="266" r:id="rId13"/>
   </p:sldIdLst>
   <p:sldSz cx="12192000" cy="6858000"/>
   <p:notesSz cx="6858000" cy="9144000"/>
@@ -207,7 +208,7 @@
           <a:p>
             <a:fld id="{25BB0166-7DA8-4040-98E7-81186BCABFDE}" type="datetimeFigureOut">
               <a:rPr lang="en-US" smtClean="0"/>
-              <a:t>3/29/26</a:t>
+              <a:t>4/7/26</a:t>
             </a:fld>
             <a:endParaRPr lang="en-US"/>
           </a:p>
@@ -620,7 +621,7 @@
           <a:lstStyle/>
           <a:p>
             <a:fld id="{5F491023-0B0A-7041-9F06-D25A50EF063B}" type="datetimeFigureOut">
-              <a:t>3/29/26</a:t>
+              <a:t>4/7/26</a:t>
             </a:fld>
             <a:endParaRPr lang="en-US"/>
           </a:p>
@@ -816,7 +817,7 @@
           <a:lstStyle/>
           <a:p>
             <a:fld id="{5F491023-0B0A-7041-9F06-D25A50EF063B}" type="datetimeFigureOut">
-              <a:t>3/29/26</a:t>
+              <a:t>4/7/26</a:t>
             </a:fld>
             <a:endParaRPr lang="en-US"/>
           </a:p>
@@ -1022,7 +1023,7 @@
           <a:lstStyle/>
           <a:p>
             <a:fld id="{5F491023-0B0A-7041-9F06-D25A50EF063B}" type="datetimeFigureOut">
-              <a:t>3/29/26</a:t>
+              <a:t>4/7/26</a:t>
             </a:fld>
             <a:endParaRPr lang="en-US"/>
           </a:p>
@@ -1218,7 +1219,7 @@
           <a:lstStyle/>
           <a:p>
             <a:fld id="{5F491023-0B0A-7041-9F06-D25A50EF063B}" type="datetimeFigureOut">
-              <a:t>3/29/26</a:t>
+              <a:t>4/7/26</a:t>
             </a:fld>
             <a:endParaRPr lang="en-US"/>
           </a:p>
@@ -1491,7 +1492,7 @@
           <a:lstStyle/>
           <a:p>
             <a:fld id="{5F491023-0B0A-7041-9F06-D25A50EF063B}" type="datetimeFigureOut">
-              <a:t>3/29/26</a:t>
+              <a:t>4/7/26</a:t>
             </a:fld>
             <a:endParaRPr lang="en-US"/>
           </a:p>
@@ -1754,7 +1755,7 @@
           <a:lstStyle/>
           <a:p>
             <a:fld id="{5F491023-0B0A-7041-9F06-D25A50EF063B}" type="datetimeFigureOut">
-              <a:t>3/29/26</a:t>
+              <a:t>4/7/26</a:t>
             </a:fld>
             <a:endParaRPr lang="en-US"/>
           </a:p>
@@ -2164,7 +2165,7 @@
           <a:lstStyle/>
           <a:p>
             <a:fld id="{5F491023-0B0A-7041-9F06-D25A50EF063B}" type="datetimeFigureOut">
-              <a:t>3/29/26</a:t>
+              <a:t>4/7/26</a:t>
             </a:fld>
             <a:endParaRPr lang="en-US"/>
           </a:p>
@@ -2303,7 +2304,7 @@
           <a:lstStyle/>
           <a:p>
             <a:fld id="{5F491023-0B0A-7041-9F06-D25A50EF063B}" type="datetimeFigureOut">
-              <a:t>3/29/26</a:t>
+              <a:t>4/7/26</a:t>
             </a:fld>
             <a:endParaRPr lang="en-US"/>
           </a:p>
@@ -2414,7 +2415,7 @@
           <a:lstStyle/>
           <a:p>
             <a:fld id="{5F491023-0B0A-7041-9F06-D25A50EF063B}" type="datetimeFigureOut">
-              <a:t>3/29/26</a:t>
+              <a:t>4/7/26</a:t>
             </a:fld>
             <a:endParaRPr lang="en-US"/>
           </a:p>
@@ -2723,7 +2724,7 @@
           <a:lstStyle/>
           <a:p>
             <a:fld id="{5F491023-0B0A-7041-9F06-D25A50EF063B}" type="datetimeFigureOut">
-              <a:t>3/29/26</a:t>
+              <a:t>4/7/26</a:t>
             </a:fld>
             <a:endParaRPr lang="en-US"/>
           </a:p>
@@ -3009,7 +3010,7 @@
           <a:lstStyle/>
           <a:p>
             <a:fld id="{5F491023-0B0A-7041-9F06-D25A50EF063B}" type="datetimeFigureOut">
-              <a:t>3/29/26</a:t>
+              <a:t>4/7/26</a:t>
             </a:fld>
             <a:endParaRPr lang="en-US"/>
           </a:p>
@@ -3248,7 +3249,7 @@
           </a:lstStyle>
           <a:p>
             <a:fld id="{5F491023-0B0A-7041-9F06-D25A50EF063B}" type="datetimeFigureOut">
-              <a:t>3/29/26</a:t>
+              <a:t>4/7/26</a:t>
             </a:fld>
             <a:endParaRPr lang="en-US"/>
           </a:p>
@@ -5045,6 +5046,1595 @@
 </file>
 
 <file path=ppt/slides/slide11.xml><?xml version="1.0" encoding="utf-8"?>
+<p:sld xmlns:a="http://schemas.openxmlformats.org/drawingml/2006/main" xmlns:r="http://schemas.openxmlformats.org/officeDocument/2006/relationships" xmlns:p="http://schemas.openxmlformats.org/presentationml/2006/main">
+  <p:cSld>
+    <p:spTree>
+      <p:nvGrpSpPr>
+        <p:cNvPr id="1" name="">
+          <a:extLst>
+            <a:ext uri="{FF2B5EF4-FFF2-40B4-BE49-F238E27FC236}">
+              <a16:creationId xmlns:a16="http://schemas.microsoft.com/office/drawing/2014/main" id="{1545F99A-9A76-0D4B-7909-5BEEC960A928}"/>
+            </a:ext>
+          </a:extLst>
+        </p:cNvPr>
+        <p:cNvGrpSpPr/>
+        <p:nvPr/>
+      </p:nvGrpSpPr>
+      <p:grpSpPr>
+        <a:xfrm>
+          <a:off x="0" y="0"/>
+          <a:ext cx="0" cy="0"/>
+          <a:chOff x="0" y="0"/>
+          <a:chExt cx="0" cy="0"/>
+        </a:xfrm>
+      </p:grpSpPr>
+      <p:sp>
+        <p:nvSpPr>
+          <p:cNvPr id="3" name="Google Shape;54;p13">
+            <a:extLst>
+              <a:ext uri="{FF2B5EF4-FFF2-40B4-BE49-F238E27FC236}">
+                <a16:creationId xmlns:a16="http://schemas.microsoft.com/office/drawing/2014/main" id="{4E1CE4C6-F533-D5DF-0A47-0AC720A471FE}"/>
+              </a:ext>
+            </a:extLst>
+          </p:cNvPr>
+          <p:cNvSpPr txBox="1"/>
+          <p:nvPr/>
+        </p:nvSpPr>
+        <p:spPr>
+          <a:xfrm>
+            <a:off x="174584" y="190200"/>
+            <a:ext cx="3102016" cy="2419085"/>
+          </a:xfrm>
+          <a:prstGeom prst="rect">
+            <a:avLst/>
+          </a:prstGeom>
+          <a:solidFill>
+            <a:srgbClr val="FFF2CC"/>
+          </a:solidFill>
+          <a:ln w="9525" cap="flat" cmpd="sng">
+            <a:solidFill>
+              <a:srgbClr val="FF0000"/>
+            </a:solidFill>
+            <a:prstDash val="solid"/>
+            <a:round/>
+            <a:headEnd type="none" w="sm" len="sm"/>
+            <a:tailEnd type="none" w="sm" len="sm"/>
+          </a:ln>
+        </p:spPr>
+        <p:txBody>
+          <a:bodyPr spcFirstLastPara="1" wrap="square" lIns="9125" tIns="9125" rIns="9125" bIns="9125" anchor="t" anchorCtr="0">
+            <a:spAutoFit/>
+          </a:bodyPr>
+          <a:lstStyle/>
+          <a:p>
+            <a:pPr marL="0" lvl="0" indent="0" algn="ctr" rtl="0">
+              <a:spcBef>
+                <a:spcPts val="0"/>
+              </a:spcBef>
+              <a:spcAft>
+                <a:spcPts val="0"/>
+              </a:spcAft>
+              <a:buNone/>
+            </a:pPr>
+            <a:r>
+              <a:rPr lang="en" sz="1200" b="1" dirty="0">
+                <a:solidFill>
+                  <a:schemeClr val="dk1"/>
+                </a:solidFill>
+                <a:latin typeface="Calibri" panose="020F0502020204030204" pitchFamily="34" charset="0"/>
+                <a:ea typeface="Calibri"/>
+                <a:cs typeface="Calibri" panose="020F0502020204030204" pitchFamily="34" charset="0"/>
+                <a:sym typeface="Calibri"/>
+              </a:rPr>
+              <a:t>Solutions to prevent the winch and cable </a:t>
+            </a:r>
+            <a:endParaRPr sz="1200" b="1" dirty="0">
+              <a:solidFill>
+                <a:schemeClr val="dk1"/>
+              </a:solidFill>
+              <a:latin typeface="Calibri" panose="020F0502020204030204" pitchFamily="34" charset="0"/>
+              <a:ea typeface="Calibri"/>
+              <a:cs typeface="Calibri" panose="020F0502020204030204" pitchFamily="34" charset="0"/>
+              <a:sym typeface="Calibri"/>
+            </a:endParaRPr>
+          </a:p>
+          <a:p>
+            <a:pPr marL="0" lvl="0" indent="0" algn="ctr" rtl="0">
+              <a:spcBef>
+                <a:spcPts val="0"/>
+              </a:spcBef>
+              <a:spcAft>
+                <a:spcPts val="0"/>
+              </a:spcAft>
+              <a:buNone/>
+            </a:pPr>
+            <a:r>
+              <a:rPr lang="en" sz="1200" b="1" dirty="0">
+                <a:solidFill>
+                  <a:schemeClr val="dk1"/>
+                </a:solidFill>
+                <a:latin typeface="Calibri" panose="020F0502020204030204" pitchFamily="34" charset="0"/>
+                <a:ea typeface="Calibri"/>
+                <a:cs typeface="Calibri" panose="020F0502020204030204" pitchFamily="34" charset="0"/>
+                <a:sym typeface="Calibri"/>
+              </a:rPr>
+              <a:t>from breaking when plowing</a:t>
+            </a:r>
+            <a:endParaRPr sz="1200" b="1" dirty="0">
+              <a:solidFill>
+                <a:schemeClr val="dk1"/>
+              </a:solidFill>
+              <a:latin typeface="Calibri" panose="020F0502020204030204" pitchFamily="34" charset="0"/>
+              <a:ea typeface="Calibri"/>
+              <a:cs typeface="Calibri" panose="020F0502020204030204" pitchFamily="34" charset="0"/>
+              <a:sym typeface="Calibri"/>
+            </a:endParaRPr>
+          </a:p>
+          <a:p>
+            <a:pPr marL="0" lvl="0" indent="0" algn="l" rtl="0">
+              <a:spcBef>
+                <a:spcPts val="0"/>
+              </a:spcBef>
+              <a:spcAft>
+                <a:spcPts val="0"/>
+              </a:spcAft>
+              <a:buNone/>
+            </a:pPr>
+            <a:r>
+              <a:rPr lang="en" sz="1200" dirty="0">
+                <a:solidFill>
+                  <a:schemeClr val="dk1"/>
+                </a:solidFill>
+                <a:latin typeface="Calibri" panose="020F0502020204030204" pitchFamily="34" charset="0"/>
+                <a:ea typeface="Calibri"/>
+                <a:cs typeface="Calibri" panose="020F0502020204030204" pitchFamily="34" charset="0"/>
+                <a:sym typeface="Calibri"/>
+              </a:rPr>
+              <a:t>--------------------------------------------</a:t>
+            </a:r>
+            <a:endParaRPr sz="1200" dirty="0">
+              <a:solidFill>
+                <a:schemeClr val="dk1"/>
+              </a:solidFill>
+              <a:latin typeface="Calibri" panose="020F0502020204030204" pitchFamily="34" charset="0"/>
+              <a:ea typeface="Calibri"/>
+              <a:cs typeface="Calibri" panose="020F0502020204030204" pitchFamily="34" charset="0"/>
+              <a:sym typeface="Calibri"/>
+            </a:endParaRPr>
+          </a:p>
+          <a:p>
+            <a:pPr marL="0" lvl="0" indent="0" algn="l" rtl="0">
+              <a:spcBef>
+                <a:spcPts val="0"/>
+              </a:spcBef>
+              <a:spcAft>
+                <a:spcPts val="0"/>
+              </a:spcAft>
+              <a:buNone/>
+            </a:pPr>
+            <a:r>
+              <a:rPr lang="en" sz="1200" b="1" dirty="0">
+                <a:solidFill>
+                  <a:schemeClr val="dk1"/>
+                </a:solidFill>
+                <a:latin typeface="Calibri" panose="020F0502020204030204" pitchFamily="34" charset="0"/>
+                <a:ea typeface="Calibri"/>
+                <a:cs typeface="Calibri" panose="020F0502020204030204" pitchFamily="34" charset="0"/>
+                <a:sym typeface="Calibri"/>
+              </a:rPr>
+              <a:t>Better angle, brackets, pulleys</a:t>
+            </a:r>
+            <a:endParaRPr sz="1200" dirty="0">
+              <a:solidFill>
+                <a:schemeClr val="dk1"/>
+              </a:solidFill>
+              <a:latin typeface="Calibri" panose="020F0502020204030204" pitchFamily="34" charset="0"/>
+              <a:ea typeface="Calibri"/>
+              <a:cs typeface="Calibri" panose="020F0502020204030204" pitchFamily="34" charset="0"/>
+              <a:sym typeface="Calibri"/>
+            </a:endParaRPr>
+          </a:p>
+          <a:p>
+            <a:pPr marL="0" lvl="0" indent="0" algn="l" rtl="0">
+              <a:spcBef>
+                <a:spcPts val="0"/>
+              </a:spcBef>
+              <a:spcAft>
+                <a:spcPts val="0"/>
+              </a:spcAft>
+              <a:buNone/>
+            </a:pPr>
+            <a:r>
+              <a:rPr lang="en" sz="1200" dirty="0">
+                <a:solidFill>
+                  <a:schemeClr val="dk1"/>
+                </a:solidFill>
+                <a:latin typeface="Calibri" panose="020F0502020204030204" pitchFamily="34" charset="0"/>
+                <a:ea typeface="Calibri"/>
+                <a:cs typeface="Calibri" panose="020F0502020204030204" pitchFamily="34" charset="0"/>
+                <a:sym typeface="Calibri"/>
+              </a:rPr>
+              <a:t>Solution 1.1 - mount the winch higher. Or change the point where the hook attaches</a:t>
+            </a:r>
+            <a:endParaRPr sz="1200" dirty="0">
+              <a:solidFill>
+                <a:schemeClr val="dk1"/>
+              </a:solidFill>
+              <a:latin typeface="Calibri" panose="020F0502020204030204" pitchFamily="34" charset="0"/>
+              <a:ea typeface="Calibri"/>
+              <a:cs typeface="Calibri" panose="020F0502020204030204" pitchFamily="34" charset="0"/>
+              <a:sym typeface="Calibri"/>
+            </a:endParaRPr>
+          </a:p>
+          <a:p>
+            <a:pPr marL="0" lvl="0" indent="0" algn="l" rtl="0">
+              <a:spcBef>
+                <a:spcPts val="0"/>
+              </a:spcBef>
+              <a:spcAft>
+                <a:spcPts val="0"/>
+              </a:spcAft>
+              <a:buNone/>
+            </a:pPr>
+            <a:r>
+              <a:rPr lang="en" sz="1200" dirty="0">
+                <a:solidFill>
+                  <a:schemeClr val="dk1"/>
+                </a:solidFill>
+                <a:latin typeface="Calibri" panose="020F0502020204030204" pitchFamily="34" charset="0"/>
+                <a:ea typeface="Calibri"/>
+                <a:cs typeface="Calibri" panose="020F0502020204030204" pitchFamily="34" charset="0"/>
+                <a:sym typeface="Calibri"/>
+              </a:rPr>
+              <a:t>Solution 1.2 - use brackets with blocks &amp; pulleys</a:t>
+            </a:r>
+            <a:endParaRPr sz="1200" dirty="0">
+              <a:solidFill>
+                <a:schemeClr val="dk1"/>
+              </a:solidFill>
+              <a:latin typeface="Calibri" panose="020F0502020204030204" pitchFamily="34" charset="0"/>
+              <a:ea typeface="Calibri"/>
+              <a:cs typeface="Calibri" panose="020F0502020204030204" pitchFamily="34" charset="0"/>
+              <a:sym typeface="Calibri"/>
+            </a:endParaRPr>
+          </a:p>
+          <a:p>
+            <a:pPr marL="0" lvl="0" indent="0" algn="l" rtl="0">
+              <a:spcBef>
+                <a:spcPts val="0"/>
+              </a:spcBef>
+              <a:spcAft>
+                <a:spcPts val="0"/>
+              </a:spcAft>
+              <a:buClr>
+                <a:schemeClr val="dk1"/>
+              </a:buClr>
+              <a:buSzPts val="1100"/>
+              <a:buFont typeface="Arial"/>
+              <a:buNone/>
+            </a:pPr>
+            <a:r>
+              <a:rPr lang="en" sz="1200" dirty="0">
+                <a:solidFill>
+                  <a:schemeClr val="dk1"/>
+                </a:solidFill>
+                <a:latin typeface="Calibri" panose="020F0502020204030204" pitchFamily="34" charset="0"/>
+                <a:ea typeface="Calibri"/>
+                <a:cs typeface="Calibri" panose="020F0502020204030204" pitchFamily="34" charset="0"/>
+                <a:sym typeface="Calibri"/>
+              </a:rPr>
+              <a:t>--------------------------------------------</a:t>
+            </a:r>
+            <a:endParaRPr sz="1200" dirty="0">
+              <a:solidFill>
+                <a:schemeClr val="dk1"/>
+              </a:solidFill>
+              <a:latin typeface="Calibri" panose="020F0502020204030204" pitchFamily="34" charset="0"/>
+              <a:ea typeface="Calibri"/>
+              <a:cs typeface="Calibri" panose="020F0502020204030204" pitchFamily="34" charset="0"/>
+              <a:sym typeface="Calibri"/>
+            </a:endParaRPr>
+          </a:p>
+          <a:p>
+            <a:pPr marL="0" lvl="0" indent="0" algn="l" rtl="0">
+              <a:spcBef>
+                <a:spcPts val="0"/>
+              </a:spcBef>
+              <a:spcAft>
+                <a:spcPts val="0"/>
+              </a:spcAft>
+              <a:buNone/>
+            </a:pPr>
+            <a:r>
+              <a:rPr lang="en" sz="1200" b="1" dirty="0">
+                <a:solidFill>
+                  <a:schemeClr val="dk1"/>
+                </a:solidFill>
+                <a:latin typeface="Calibri" panose="020F0502020204030204" pitchFamily="34" charset="0"/>
+                <a:ea typeface="Calibri"/>
+                <a:cs typeface="Calibri" panose="020F0502020204030204" pitchFamily="34" charset="0"/>
+                <a:sym typeface="Calibri"/>
+              </a:rPr>
+              <a:t>Prevent cable tangling</a:t>
+            </a:r>
+            <a:endParaRPr sz="1200" dirty="0">
+              <a:solidFill>
+                <a:schemeClr val="dk1"/>
+              </a:solidFill>
+              <a:latin typeface="Calibri" panose="020F0502020204030204" pitchFamily="34" charset="0"/>
+              <a:ea typeface="Calibri"/>
+              <a:cs typeface="Calibri" panose="020F0502020204030204" pitchFamily="34" charset="0"/>
+              <a:sym typeface="Calibri"/>
+            </a:endParaRPr>
+          </a:p>
+          <a:p>
+            <a:pPr marL="0" lvl="0" indent="0" algn="l" rtl="0">
+              <a:spcBef>
+                <a:spcPts val="0"/>
+              </a:spcBef>
+              <a:spcAft>
+                <a:spcPts val="0"/>
+              </a:spcAft>
+              <a:buNone/>
+            </a:pPr>
+            <a:r>
+              <a:rPr lang="en" sz="1200" dirty="0">
+                <a:solidFill>
+                  <a:schemeClr val="dk1"/>
+                </a:solidFill>
+                <a:latin typeface="Calibri" panose="020F0502020204030204" pitchFamily="34" charset="0"/>
+                <a:ea typeface="Calibri"/>
+                <a:cs typeface="Calibri" panose="020F0502020204030204" pitchFamily="34" charset="0"/>
+                <a:sym typeface="Calibri"/>
+              </a:rPr>
+              <a:t>Solution 2.1 - use a spring to keep tension. Or use a commercial tensioner</a:t>
+            </a:r>
+            <a:endParaRPr sz="1200" dirty="0">
+              <a:solidFill>
+                <a:schemeClr val="dk1"/>
+              </a:solidFill>
+              <a:latin typeface="Calibri" panose="020F0502020204030204" pitchFamily="34" charset="0"/>
+              <a:ea typeface="Calibri"/>
+              <a:cs typeface="Calibri" panose="020F0502020204030204" pitchFamily="34" charset="0"/>
+              <a:sym typeface="Calibri"/>
+            </a:endParaRPr>
+          </a:p>
+          <a:p>
+            <a:pPr marL="0" lvl="0" indent="0" algn="l" rtl="0">
+              <a:spcBef>
+                <a:spcPts val="0"/>
+              </a:spcBef>
+              <a:spcAft>
+                <a:spcPts val="0"/>
+              </a:spcAft>
+              <a:buNone/>
+            </a:pPr>
+            <a:r>
+              <a:rPr lang="en" sz="1200" dirty="0">
+                <a:solidFill>
+                  <a:schemeClr val="dk1"/>
+                </a:solidFill>
+                <a:latin typeface="Calibri" panose="020F0502020204030204" pitchFamily="34" charset="0"/>
+                <a:ea typeface="Calibri"/>
+                <a:cs typeface="Calibri" panose="020F0502020204030204" pitchFamily="34" charset="0"/>
+                <a:sym typeface="Calibri"/>
+              </a:rPr>
+              <a:t>Solution 2.2 - use a synthetic rope or a flat tow strap instead of the metal cable</a:t>
+            </a:r>
+            <a:endParaRPr sz="1200" dirty="0">
+              <a:solidFill>
+                <a:schemeClr val="dk1"/>
+              </a:solidFill>
+              <a:latin typeface="Calibri" panose="020F0502020204030204" pitchFamily="34" charset="0"/>
+              <a:ea typeface="Calibri"/>
+              <a:cs typeface="Calibri" panose="020F0502020204030204" pitchFamily="34" charset="0"/>
+              <a:sym typeface="Calibri"/>
+            </a:endParaRPr>
+          </a:p>
+        </p:txBody>
+      </p:sp>
+      <p:sp>
+        <p:nvSpPr>
+          <p:cNvPr id="4" name="Google Shape;59;p14">
+            <a:extLst>
+              <a:ext uri="{FF2B5EF4-FFF2-40B4-BE49-F238E27FC236}">
+                <a16:creationId xmlns:a16="http://schemas.microsoft.com/office/drawing/2014/main" id="{7266E298-6835-C0DE-5ACD-8A766ED20F4A}"/>
+              </a:ext>
+            </a:extLst>
+          </p:cNvPr>
+          <p:cNvSpPr txBox="1"/>
+          <p:nvPr/>
+        </p:nvSpPr>
+        <p:spPr>
+          <a:xfrm>
+            <a:off x="3432630" y="198925"/>
+            <a:ext cx="3468639" cy="757092"/>
+          </a:xfrm>
+          <a:prstGeom prst="rect">
+            <a:avLst/>
+          </a:prstGeom>
+          <a:solidFill>
+            <a:srgbClr val="FFF2CC"/>
+          </a:solidFill>
+          <a:ln w="9525" cap="flat" cmpd="sng">
+            <a:solidFill>
+              <a:srgbClr val="FF0000"/>
+            </a:solidFill>
+            <a:prstDash val="solid"/>
+            <a:round/>
+            <a:headEnd type="none" w="sm" len="sm"/>
+            <a:tailEnd type="none" w="sm" len="sm"/>
+          </a:ln>
+        </p:spPr>
+        <p:txBody>
+          <a:bodyPr spcFirstLastPara="1" wrap="square" lIns="9125" tIns="9125" rIns="9125" bIns="9125" anchor="t" anchorCtr="0">
+            <a:spAutoFit/>
+          </a:bodyPr>
+          <a:lstStyle/>
+          <a:p>
+            <a:pPr marL="0" lvl="0" indent="0" algn="l" rtl="0">
+              <a:spcBef>
+                <a:spcPts val="0"/>
+              </a:spcBef>
+              <a:spcAft>
+                <a:spcPts val="0"/>
+              </a:spcAft>
+              <a:buNone/>
+            </a:pPr>
+            <a:r>
+              <a:rPr lang="en" sz="1200">
+                <a:solidFill>
+                  <a:schemeClr val="dk1"/>
+                </a:solidFill>
+                <a:latin typeface="Calibri"/>
+                <a:ea typeface="Calibri"/>
+                <a:cs typeface="Calibri"/>
+                <a:sym typeface="Calibri"/>
+              </a:rPr>
+              <a:t>Solution 1.1 - mount the winch higher</a:t>
+            </a:r>
+            <a:endParaRPr sz="1200">
+              <a:solidFill>
+                <a:schemeClr val="dk1"/>
+              </a:solidFill>
+              <a:latin typeface="Calibri"/>
+              <a:ea typeface="Calibri"/>
+              <a:cs typeface="Calibri"/>
+              <a:sym typeface="Calibri"/>
+            </a:endParaRPr>
+          </a:p>
+          <a:p>
+            <a:pPr marL="0" lvl="0" indent="0" algn="l" rtl="0">
+              <a:spcBef>
+                <a:spcPts val="0"/>
+              </a:spcBef>
+              <a:spcAft>
+                <a:spcPts val="0"/>
+              </a:spcAft>
+              <a:buNone/>
+            </a:pPr>
+            <a:r>
+              <a:rPr lang="en" sz="1200" u="sng">
+                <a:solidFill>
+                  <a:schemeClr val="hlink"/>
+                </a:solidFill>
+                <a:latin typeface="Calibri"/>
+                <a:ea typeface="Calibri"/>
+                <a:cs typeface="Calibri"/>
+                <a:sym typeface="Calibri"/>
+                <a:hlinkClick r:id="rId2"/>
+              </a:rPr>
+              <a:t>https://www.youtube.com/watch?v=walB-pyDaYE</a:t>
+            </a:r>
+            <a:endParaRPr sz="1200">
+              <a:solidFill>
+                <a:schemeClr val="dk1"/>
+              </a:solidFill>
+              <a:latin typeface="Calibri"/>
+              <a:ea typeface="Calibri"/>
+              <a:cs typeface="Calibri"/>
+              <a:sym typeface="Calibri"/>
+            </a:endParaRPr>
+          </a:p>
+          <a:p>
+            <a:pPr marL="0" lvl="0" indent="0" algn="l" rtl="0">
+              <a:spcBef>
+                <a:spcPts val="0"/>
+              </a:spcBef>
+              <a:spcAft>
+                <a:spcPts val="0"/>
+              </a:spcAft>
+              <a:buNone/>
+            </a:pPr>
+            <a:r>
+              <a:rPr lang="en" sz="1200">
+                <a:solidFill>
+                  <a:schemeClr val="dk1"/>
+                </a:solidFill>
+                <a:latin typeface="Calibri"/>
+                <a:ea typeface="Calibri"/>
+                <a:cs typeface="Calibri"/>
+                <a:sym typeface="Calibri"/>
+              </a:rPr>
+              <a:t>or change the hook point:</a:t>
+            </a:r>
+            <a:endParaRPr sz="1200">
+              <a:solidFill>
+                <a:schemeClr val="dk1"/>
+              </a:solidFill>
+              <a:latin typeface="Calibri"/>
+              <a:ea typeface="Calibri"/>
+              <a:cs typeface="Calibri"/>
+              <a:sym typeface="Calibri"/>
+            </a:endParaRPr>
+          </a:p>
+          <a:p>
+            <a:pPr marL="0" lvl="0" indent="0" algn="l" rtl="0">
+              <a:spcBef>
+                <a:spcPts val="0"/>
+              </a:spcBef>
+              <a:spcAft>
+                <a:spcPts val="0"/>
+              </a:spcAft>
+              <a:buNone/>
+            </a:pPr>
+            <a:r>
+              <a:rPr lang="en" sz="1200" u="sng">
+                <a:solidFill>
+                  <a:schemeClr val="hlink"/>
+                </a:solidFill>
+                <a:latin typeface="Calibri"/>
+                <a:ea typeface="Calibri"/>
+                <a:cs typeface="Calibri"/>
+                <a:sym typeface="Calibri"/>
+                <a:hlinkClick r:id="rId3"/>
+              </a:rPr>
+              <a:t>https://www.youtube.com/watch?v=QB3OdEiAtSg</a:t>
+            </a:r>
+            <a:r>
+              <a:rPr lang="en" sz="1200">
+                <a:solidFill>
+                  <a:schemeClr val="dk1"/>
+                </a:solidFill>
+                <a:latin typeface="Calibri"/>
+                <a:ea typeface="Calibri"/>
+                <a:cs typeface="Calibri"/>
+                <a:sym typeface="Calibri"/>
+              </a:rPr>
+              <a:t>  </a:t>
+            </a:r>
+            <a:endParaRPr sz="1200">
+              <a:solidFill>
+                <a:schemeClr val="dk1"/>
+              </a:solidFill>
+              <a:latin typeface="Calibri"/>
+              <a:ea typeface="Calibri"/>
+              <a:cs typeface="Calibri"/>
+              <a:sym typeface="Calibri"/>
+            </a:endParaRPr>
+          </a:p>
+        </p:txBody>
+      </p:sp>
+      <p:pic>
+        <p:nvPicPr>
+          <p:cNvPr id="5" name="Google Shape;60;p14">
+            <a:extLst>
+              <a:ext uri="{FF2B5EF4-FFF2-40B4-BE49-F238E27FC236}">
+                <a16:creationId xmlns:a16="http://schemas.microsoft.com/office/drawing/2014/main" id="{179EB1D4-92E1-92F1-60F6-01900397AD2E}"/>
+              </a:ext>
+            </a:extLst>
+          </p:cNvPr>
+          <p:cNvPicPr preferRelativeResize="0"/>
+          <p:nvPr/>
+        </p:nvPicPr>
+        <p:blipFill>
+          <a:blip r:embed="rId4" cstate="email">
+            <a:alphaModFix/>
+            <a:extLst>
+              <a:ext uri="{28A0092B-C50C-407E-A947-70E740481C1C}">
+                <a14:useLocalDpi xmlns:a14="http://schemas.microsoft.com/office/drawing/2010/main"/>
+              </a:ext>
+            </a:extLst>
+          </a:blip>
+          <a:stretch>
+            <a:fillRect/>
+          </a:stretch>
+        </p:blipFill>
+        <p:spPr>
+          <a:xfrm>
+            <a:off x="3445776" y="1039147"/>
+            <a:ext cx="2572487" cy="1999750"/>
+          </a:xfrm>
+          <a:prstGeom prst="rect">
+            <a:avLst/>
+          </a:prstGeom>
+          <a:noFill/>
+          <a:ln w="9525" cap="flat" cmpd="sng">
+            <a:solidFill>
+              <a:srgbClr val="FF0000"/>
+            </a:solidFill>
+            <a:prstDash val="solid"/>
+            <a:round/>
+            <a:headEnd type="none" w="sm" len="sm"/>
+            <a:tailEnd type="none" w="sm" len="sm"/>
+          </a:ln>
+        </p:spPr>
+      </p:pic>
+      <p:sp>
+        <p:nvSpPr>
+          <p:cNvPr id="6" name="Google Shape;61;p14">
+            <a:extLst>
+              <a:ext uri="{FF2B5EF4-FFF2-40B4-BE49-F238E27FC236}">
+                <a16:creationId xmlns:a16="http://schemas.microsoft.com/office/drawing/2014/main" id="{307B8EF6-5F8E-E2EB-02EC-0A65C7F1EBF6}"/>
+              </a:ext>
+            </a:extLst>
+          </p:cNvPr>
+          <p:cNvSpPr txBox="1"/>
+          <p:nvPr/>
+        </p:nvSpPr>
+        <p:spPr>
+          <a:xfrm>
+            <a:off x="193389" y="3819104"/>
+            <a:ext cx="3252388" cy="480093"/>
+          </a:xfrm>
+          <a:prstGeom prst="rect">
+            <a:avLst/>
+          </a:prstGeom>
+          <a:solidFill>
+            <a:srgbClr val="FFF2CC"/>
+          </a:solidFill>
+          <a:ln w="9525" cap="flat" cmpd="sng">
+            <a:solidFill>
+              <a:srgbClr val="FF0000"/>
+            </a:solidFill>
+            <a:prstDash val="solid"/>
+            <a:round/>
+            <a:headEnd type="none" w="sm" len="sm"/>
+            <a:tailEnd type="none" w="sm" len="sm"/>
+          </a:ln>
+        </p:spPr>
+        <p:txBody>
+          <a:bodyPr spcFirstLastPara="1" wrap="square" lIns="9125" tIns="9125" rIns="9125" bIns="9125" anchor="t" anchorCtr="0">
+            <a:spAutoFit/>
+          </a:bodyPr>
+          <a:lstStyle/>
+          <a:p>
+            <a:pPr marL="0" lvl="0" indent="0" algn="l" rtl="0">
+              <a:spcBef>
+                <a:spcPts val="0"/>
+              </a:spcBef>
+              <a:spcAft>
+                <a:spcPts val="0"/>
+              </a:spcAft>
+              <a:buClr>
+                <a:schemeClr val="dk1"/>
+              </a:buClr>
+              <a:buSzPts val="1100"/>
+              <a:buFont typeface="Arial"/>
+              <a:buNone/>
+            </a:pPr>
+            <a:r>
+              <a:rPr lang="en" sz="1200" dirty="0">
+                <a:solidFill>
+                  <a:schemeClr val="dk1"/>
+                </a:solidFill>
+                <a:latin typeface="Calibri"/>
+                <a:ea typeface="Calibri"/>
+                <a:cs typeface="Calibri"/>
+                <a:sym typeface="Calibri"/>
+              </a:rPr>
+              <a:t>Solution 1.2 - use brackets with blocks and pulleys </a:t>
+            </a:r>
+            <a:endParaRPr sz="900" dirty="0">
+              <a:solidFill>
+                <a:schemeClr val="dk1"/>
+              </a:solidFill>
+              <a:latin typeface="Calibri"/>
+              <a:ea typeface="Calibri"/>
+              <a:cs typeface="Calibri"/>
+              <a:sym typeface="Calibri"/>
+            </a:endParaRPr>
+          </a:p>
+          <a:p>
+            <a:pPr marL="0" lvl="0" indent="0" algn="l" rtl="0">
+              <a:spcBef>
+                <a:spcPts val="0"/>
+              </a:spcBef>
+              <a:spcAft>
+                <a:spcPts val="0"/>
+              </a:spcAft>
+              <a:buNone/>
+            </a:pPr>
+            <a:r>
+              <a:rPr lang="en" sz="900" u="sng" dirty="0">
+                <a:solidFill>
+                  <a:schemeClr val="hlink"/>
+                </a:solidFill>
+                <a:latin typeface="Calibri"/>
+                <a:ea typeface="Calibri"/>
+                <a:cs typeface="Calibri"/>
+                <a:sym typeface="Calibri"/>
+                <a:hlinkClick r:id="rId5"/>
+              </a:rPr>
+              <a:t>https://www.youtube.com/watch?v=xptbCmz50AE</a:t>
+            </a:r>
+            <a:endParaRPr sz="900" dirty="0">
+              <a:solidFill>
+                <a:schemeClr val="dk1"/>
+              </a:solidFill>
+              <a:latin typeface="Calibri"/>
+              <a:ea typeface="Calibri"/>
+              <a:cs typeface="Calibri"/>
+              <a:sym typeface="Calibri"/>
+            </a:endParaRPr>
+          </a:p>
+          <a:p>
+            <a:pPr marL="0" lvl="0" indent="0" algn="l" rtl="0">
+              <a:spcBef>
+                <a:spcPts val="0"/>
+              </a:spcBef>
+              <a:spcAft>
+                <a:spcPts val="0"/>
+              </a:spcAft>
+              <a:buNone/>
+            </a:pPr>
+            <a:r>
+              <a:rPr lang="en" sz="900" u="sng" dirty="0">
+                <a:solidFill>
+                  <a:schemeClr val="hlink"/>
+                </a:solidFill>
+                <a:latin typeface="Calibri"/>
+                <a:ea typeface="Calibri"/>
+                <a:cs typeface="Calibri"/>
+                <a:sym typeface="Calibri"/>
+                <a:hlinkClick r:id="rId6"/>
+              </a:rPr>
+              <a:t>https://www.youtube.com/watch?v=lIwT-UqNNQw</a:t>
+            </a:r>
+            <a:r>
+              <a:rPr lang="en" sz="900" dirty="0">
+                <a:solidFill>
+                  <a:schemeClr val="dk1"/>
+                </a:solidFill>
+                <a:latin typeface="Calibri"/>
+                <a:ea typeface="Calibri"/>
+                <a:cs typeface="Calibri"/>
+                <a:sym typeface="Calibri"/>
+              </a:rPr>
+              <a:t>  </a:t>
+            </a:r>
+            <a:endParaRPr sz="900" dirty="0">
+              <a:solidFill>
+                <a:schemeClr val="dk1"/>
+              </a:solidFill>
+              <a:latin typeface="Calibri"/>
+              <a:ea typeface="Calibri"/>
+              <a:cs typeface="Calibri"/>
+              <a:sym typeface="Calibri"/>
+            </a:endParaRPr>
+          </a:p>
+        </p:txBody>
+      </p:sp>
+      <p:pic>
+        <p:nvPicPr>
+          <p:cNvPr id="7" name="Google Shape;62;p14">
+            <a:extLst>
+              <a:ext uri="{FF2B5EF4-FFF2-40B4-BE49-F238E27FC236}">
+                <a16:creationId xmlns:a16="http://schemas.microsoft.com/office/drawing/2014/main" id="{6222C343-344F-9E9A-F868-0CD8F976000C}"/>
+              </a:ext>
+            </a:extLst>
+          </p:cNvPr>
+          <p:cNvPicPr preferRelativeResize="0"/>
+          <p:nvPr/>
+        </p:nvPicPr>
+        <p:blipFill>
+          <a:blip r:embed="rId7" cstate="email">
+            <a:alphaModFix/>
+            <a:extLst>
+              <a:ext uri="{28A0092B-C50C-407E-A947-70E740481C1C}">
+                <a14:useLocalDpi xmlns:a14="http://schemas.microsoft.com/office/drawing/2010/main"/>
+              </a:ext>
+            </a:extLst>
+          </a:blip>
+          <a:stretch>
+            <a:fillRect/>
+          </a:stretch>
+        </p:blipFill>
+        <p:spPr>
+          <a:xfrm>
+            <a:off x="191851" y="4495417"/>
+            <a:ext cx="3253925" cy="1692038"/>
+          </a:xfrm>
+          <a:prstGeom prst="rect">
+            <a:avLst/>
+          </a:prstGeom>
+          <a:noFill/>
+          <a:ln w="9525" cap="flat" cmpd="sng">
+            <a:solidFill>
+              <a:srgbClr val="FF0000"/>
+            </a:solidFill>
+            <a:prstDash val="solid"/>
+            <a:round/>
+            <a:headEnd type="none" w="sm" len="sm"/>
+            <a:tailEnd type="none" w="sm" len="sm"/>
+          </a:ln>
+        </p:spPr>
+      </p:pic>
+      <p:pic>
+        <p:nvPicPr>
+          <p:cNvPr id="8" name="Google Shape;63;p14">
+            <a:extLst>
+              <a:ext uri="{FF2B5EF4-FFF2-40B4-BE49-F238E27FC236}">
+                <a16:creationId xmlns:a16="http://schemas.microsoft.com/office/drawing/2014/main" id="{4BC472D9-5CAC-DB25-3904-2543D49C913F}"/>
+              </a:ext>
+            </a:extLst>
+          </p:cNvPr>
+          <p:cNvPicPr preferRelativeResize="0"/>
+          <p:nvPr/>
+        </p:nvPicPr>
+        <p:blipFill>
+          <a:blip r:embed="rId8" cstate="email">
+            <a:alphaModFix/>
+            <a:extLst>
+              <a:ext uri="{28A0092B-C50C-407E-A947-70E740481C1C}">
+                <a14:useLocalDpi xmlns:a14="http://schemas.microsoft.com/office/drawing/2010/main"/>
+              </a:ext>
+            </a:extLst>
+          </a:blip>
+          <a:stretch>
+            <a:fillRect/>
+          </a:stretch>
+        </p:blipFill>
+        <p:spPr>
+          <a:xfrm>
+            <a:off x="3818056" y="3819104"/>
+            <a:ext cx="1572353" cy="2368351"/>
+          </a:xfrm>
+          <a:prstGeom prst="rect">
+            <a:avLst/>
+          </a:prstGeom>
+          <a:noFill/>
+          <a:ln w="9525" cap="flat" cmpd="sng">
+            <a:solidFill>
+              <a:srgbClr val="FF0000"/>
+            </a:solidFill>
+            <a:prstDash val="solid"/>
+            <a:round/>
+            <a:headEnd type="none" w="sm" len="sm"/>
+            <a:tailEnd type="none" w="sm" len="sm"/>
+          </a:ln>
+        </p:spPr>
+      </p:pic>
+      <p:pic>
+        <p:nvPicPr>
+          <p:cNvPr id="10" name="Google Shape;64;p14">
+            <a:extLst>
+              <a:ext uri="{FF2B5EF4-FFF2-40B4-BE49-F238E27FC236}">
+                <a16:creationId xmlns:a16="http://schemas.microsoft.com/office/drawing/2014/main" id="{4D89C221-4626-70A4-A709-2B97F859E0AC}"/>
+              </a:ext>
+            </a:extLst>
+          </p:cNvPr>
+          <p:cNvPicPr preferRelativeResize="0"/>
+          <p:nvPr/>
+        </p:nvPicPr>
+        <p:blipFill>
+          <a:blip r:embed="rId9" cstate="email">
+            <a:alphaModFix/>
+            <a:extLst>
+              <a:ext uri="{28A0092B-C50C-407E-A947-70E740481C1C}">
+                <a14:useLocalDpi xmlns:a14="http://schemas.microsoft.com/office/drawing/2010/main"/>
+              </a:ext>
+            </a:extLst>
+          </a:blip>
+          <a:srcRect/>
+          <a:stretch>
+            <a:fillRect/>
+          </a:stretch>
+        </p:blipFill>
+        <p:spPr>
+          <a:xfrm>
+            <a:off x="6108131" y="1039150"/>
+            <a:ext cx="2741663" cy="1999750"/>
+          </a:xfrm>
+          <a:prstGeom prst="rect">
+            <a:avLst/>
+          </a:prstGeom>
+          <a:noFill/>
+          <a:ln w="9525" cap="flat" cmpd="sng">
+            <a:solidFill>
+              <a:srgbClr val="FF0000"/>
+            </a:solidFill>
+            <a:prstDash val="solid"/>
+            <a:round/>
+            <a:headEnd type="none" w="sm" len="sm"/>
+            <a:tailEnd type="none" w="sm" len="sm"/>
+          </a:ln>
+        </p:spPr>
+      </p:pic>
+      <p:sp>
+        <p:nvSpPr>
+          <p:cNvPr id="11" name="Google Shape;69;p15">
+            <a:extLst>
+              <a:ext uri="{FF2B5EF4-FFF2-40B4-BE49-F238E27FC236}">
+                <a16:creationId xmlns:a16="http://schemas.microsoft.com/office/drawing/2014/main" id="{A11DA198-36A9-2CBF-EF11-C9A37E2BACB8}"/>
+              </a:ext>
+            </a:extLst>
+          </p:cNvPr>
+          <p:cNvSpPr txBox="1"/>
+          <p:nvPr/>
+        </p:nvSpPr>
+        <p:spPr>
+          <a:xfrm>
+            <a:off x="9732800" y="260430"/>
+            <a:ext cx="2355322" cy="1449589"/>
+          </a:xfrm>
+          <a:prstGeom prst="rect">
+            <a:avLst/>
+          </a:prstGeom>
+          <a:solidFill>
+            <a:srgbClr val="FFF2CC"/>
+          </a:solidFill>
+          <a:ln w="9525" cap="flat" cmpd="sng">
+            <a:solidFill>
+              <a:srgbClr val="FF0000"/>
+            </a:solidFill>
+            <a:prstDash val="solid"/>
+            <a:round/>
+            <a:headEnd type="none" w="sm" len="sm"/>
+            <a:tailEnd type="none" w="sm" len="sm"/>
+          </a:ln>
+        </p:spPr>
+        <p:txBody>
+          <a:bodyPr spcFirstLastPara="1" wrap="square" lIns="9125" tIns="9125" rIns="9125" bIns="9125" anchor="t" anchorCtr="0">
+            <a:spAutoFit/>
+          </a:bodyPr>
+          <a:lstStyle/>
+          <a:p>
+            <a:pPr marL="0" lvl="0" indent="0" algn="l" rtl="0">
+              <a:spcBef>
+                <a:spcPts val="0"/>
+              </a:spcBef>
+              <a:spcAft>
+                <a:spcPts val="0"/>
+              </a:spcAft>
+              <a:buClr>
+                <a:schemeClr val="dk1"/>
+              </a:buClr>
+              <a:buSzPts val="1100"/>
+              <a:buFont typeface="Arial"/>
+              <a:buNone/>
+            </a:pPr>
+            <a:r>
+              <a:rPr lang="en" sz="1200" dirty="0">
+                <a:solidFill>
+                  <a:schemeClr val="dk1"/>
+                </a:solidFill>
+                <a:latin typeface="Calibri"/>
+                <a:ea typeface="Calibri"/>
+                <a:cs typeface="Calibri"/>
+                <a:sym typeface="Calibri"/>
+              </a:rPr>
+              <a:t>Solution 2.1 - use a spring to keep tension</a:t>
+            </a:r>
+            <a:endParaRPr sz="1200" dirty="0">
+              <a:solidFill>
+                <a:schemeClr val="dk1"/>
+              </a:solidFill>
+              <a:latin typeface="Calibri"/>
+              <a:ea typeface="Calibri"/>
+              <a:cs typeface="Calibri"/>
+              <a:sym typeface="Calibri"/>
+            </a:endParaRPr>
+          </a:p>
+          <a:p>
+            <a:pPr marL="0" lvl="0" indent="0" algn="l" rtl="0">
+              <a:spcBef>
+                <a:spcPts val="0"/>
+              </a:spcBef>
+              <a:spcAft>
+                <a:spcPts val="0"/>
+              </a:spcAft>
+              <a:buClr>
+                <a:schemeClr val="dk1"/>
+              </a:buClr>
+              <a:buSzPts val="1100"/>
+              <a:buFont typeface="Arial"/>
+              <a:buNone/>
+            </a:pPr>
+            <a:r>
+              <a:rPr lang="en" sz="1200" dirty="0">
+                <a:solidFill>
+                  <a:schemeClr val="dk1"/>
+                </a:solidFill>
+                <a:latin typeface="Calibri"/>
+                <a:ea typeface="Calibri"/>
+                <a:cs typeface="Calibri"/>
+                <a:sym typeface="Calibri"/>
+              </a:rPr>
+              <a:t>Example - using leaf spring</a:t>
+            </a:r>
+            <a:endParaRPr sz="1200" dirty="0">
+              <a:solidFill>
+                <a:schemeClr val="dk1"/>
+              </a:solidFill>
+              <a:latin typeface="Calibri"/>
+              <a:ea typeface="Calibri"/>
+              <a:cs typeface="Calibri"/>
+              <a:sym typeface="Calibri"/>
+            </a:endParaRPr>
+          </a:p>
+          <a:p>
+            <a:pPr marL="0" lvl="0" indent="0" algn="l" rtl="0">
+              <a:spcBef>
+                <a:spcPts val="0"/>
+              </a:spcBef>
+              <a:spcAft>
+                <a:spcPts val="0"/>
+              </a:spcAft>
+              <a:buNone/>
+            </a:pPr>
+            <a:r>
+              <a:rPr lang="en" sz="900" u="sng" dirty="0">
+                <a:solidFill>
+                  <a:schemeClr val="hlink"/>
+                </a:solidFill>
+                <a:latin typeface="Calibri"/>
+                <a:ea typeface="Calibri"/>
+                <a:cs typeface="Calibri"/>
+                <a:sym typeface="Calibri"/>
+                <a:hlinkClick r:id="rId10"/>
+              </a:rPr>
+              <a:t>https://www.youtube.com/watch?v=MSzYsjSwWq0</a:t>
+            </a:r>
+            <a:r>
+              <a:rPr lang="en" sz="900" dirty="0">
+                <a:solidFill>
+                  <a:schemeClr val="dk1"/>
+                </a:solidFill>
+                <a:latin typeface="Calibri"/>
+                <a:ea typeface="Calibri"/>
+                <a:cs typeface="Calibri"/>
+                <a:sym typeface="Calibri"/>
+              </a:rPr>
+              <a:t> </a:t>
+            </a:r>
+            <a:endParaRPr sz="900" dirty="0">
+              <a:solidFill>
+                <a:schemeClr val="dk1"/>
+              </a:solidFill>
+              <a:latin typeface="Calibri"/>
+              <a:ea typeface="Calibri"/>
+              <a:cs typeface="Calibri"/>
+              <a:sym typeface="Calibri"/>
+            </a:endParaRPr>
+          </a:p>
+          <a:p>
+            <a:pPr marL="0" lvl="0" indent="0" algn="l" rtl="0">
+              <a:spcBef>
+                <a:spcPts val="0"/>
+              </a:spcBef>
+              <a:spcAft>
+                <a:spcPts val="0"/>
+              </a:spcAft>
+              <a:buNone/>
+            </a:pPr>
+            <a:r>
+              <a:rPr lang="en" sz="1200" dirty="0">
+                <a:solidFill>
+                  <a:schemeClr val="dk1"/>
+                </a:solidFill>
+                <a:latin typeface="Calibri"/>
+                <a:ea typeface="Calibri"/>
+                <a:cs typeface="Calibri"/>
+                <a:sym typeface="Calibri"/>
+              </a:rPr>
+              <a:t>Example - commercial tensioner</a:t>
+            </a:r>
+            <a:endParaRPr sz="900" dirty="0">
+              <a:solidFill>
+                <a:schemeClr val="dk1"/>
+              </a:solidFill>
+              <a:latin typeface="Calibri"/>
+              <a:ea typeface="Calibri"/>
+              <a:cs typeface="Calibri"/>
+              <a:sym typeface="Calibri"/>
+            </a:endParaRPr>
+          </a:p>
+          <a:p>
+            <a:pPr marL="0" lvl="0" indent="0" algn="l" rtl="0">
+              <a:spcBef>
+                <a:spcPts val="0"/>
+              </a:spcBef>
+              <a:spcAft>
+                <a:spcPts val="0"/>
+              </a:spcAft>
+              <a:buNone/>
+            </a:pPr>
+            <a:r>
+              <a:rPr lang="en" sz="900" u="sng" dirty="0">
+                <a:solidFill>
+                  <a:schemeClr val="hlink"/>
+                </a:solidFill>
+                <a:latin typeface="Calibri"/>
+                <a:ea typeface="Calibri"/>
+                <a:cs typeface="Calibri"/>
+                <a:sym typeface="Calibri"/>
+                <a:hlinkClick r:id="rId11"/>
+              </a:rPr>
+              <a:t>https://www.youtube.com/watch?v=JiPT2l71U3U</a:t>
+            </a:r>
+            <a:r>
+              <a:rPr lang="en" sz="900" dirty="0">
+                <a:solidFill>
+                  <a:schemeClr val="dk1"/>
+                </a:solidFill>
+                <a:latin typeface="Calibri"/>
+                <a:ea typeface="Calibri"/>
+                <a:cs typeface="Calibri"/>
+                <a:sym typeface="Calibri"/>
+              </a:rPr>
+              <a:t> </a:t>
+            </a:r>
+            <a:endParaRPr sz="900" dirty="0">
+              <a:solidFill>
+                <a:schemeClr val="dk1"/>
+              </a:solidFill>
+              <a:latin typeface="Calibri"/>
+              <a:ea typeface="Calibri"/>
+              <a:cs typeface="Calibri"/>
+              <a:sym typeface="Calibri"/>
+            </a:endParaRPr>
+          </a:p>
+          <a:p>
+            <a:pPr marL="0" lvl="0" indent="0" algn="l" rtl="0">
+              <a:spcBef>
+                <a:spcPts val="0"/>
+              </a:spcBef>
+              <a:spcAft>
+                <a:spcPts val="0"/>
+              </a:spcAft>
+              <a:buNone/>
+            </a:pPr>
+            <a:r>
+              <a:rPr lang="en" sz="900" u="sng" dirty="0">
+                <a:solidFill>
+                  <a:schemeClr val="hlink"/>
+                </a:solidFill>
+                <a:latin typeface="Calibri"/>
+                <a:ea typeface="Calibri"/>
+                <a:cs typeface="Calibri"/>
+                <a:sym typeface="Calibri"/>
+                <a:hlinkClick r:id="rId12"/>
+              </a:rPr>
+              <a:t>https://zips.com/products/winches-cables/winch-parts/winch-tensioners</a:t>
+            </a:r>
+            <a:r>
+              <a:rPr lang="en" sz="900" dirty="0">
+                <a:solidFill>
+                  <a:schemeClr val="dk1"/>
+                </a:solidFill>
+                <a:latin typeface="Calibri"/>
+                <a:ea typeface="Calibri"/>
+                <a:cs typeface="Calibri"/>
+                <a:sym typeface="Calibri"/>
+              </a:rPr>
+              <a:t> </a:t>
+            </a:r>
+            <a:endParaRPr sz="900" dirty="0">
+              <a:solidFill>
+                <a:schemeClr val="dk1"/>
+              </a:solidFill>
+              <a:latin typeface="Calibri"/>
+              <a:ea typeface="Calibri"/>
+              <a:cs typeface="Calibri"/>
+              <a:sym typeface="Calibri"/>
+            </a:endParaRPr>
+          </a:p>
+        </p:txBody>
+      </p:sp>
+      <p:pic>
+        <p:nvPicPr>
+          <p:cNvPr id="13" name="Google Shape;70;p15">
+            <a:extLst>
+              <a:ext uri="{FF2B5EF4-FFF2-40B4-BE49-F238E27FC236}">
+                <a16:creationId xmlns:a16="http://schemas.microsoft.com/office/drawing/2014/main" id="{7AFB6B3D-B7D1-1D83-7DB6-C6E9420B34F0}"/>
+              </a:ext>
+            </a:extLst>
+          </p:cNvPr>
+          <p:cNvPicPr preferRelativeResize="0"/>
+          <p:nvPr/>
+        </p:nvPicPr>
+        <p:blipFill>
+          <a:blip r:embed="rId13" cstate="email">
+            <a:alphaModFix/>
+            <a:extLst>
+              <a:ext uri="{28A0092B-C50C-407E-A947-70E740481C1C}">
+                <a14:useLocalDpi xmlns:a14="http://schemas.microsoft.com/office/drawing/2010/main"/>
+              </a:ext>
+            </a:extLst>
+          </a:blip>
+          <a:stretch>
+            <a:fillRect/>
+          </a:stretch>
+        </p:blipFill>
+        <p:spPr>
+          <a:xfrm>
+            <a:off x="8141435" y="5596787"/>
+            <a:ext cx="1503387" cy="1002258"/>
+          </a:xfrm>
+          <a:prstGeom prst="rect">
+            <a:avLst/>
+          </a:prstGeom>
+          <a:noFill/>
+          <a:ln>
+            <a:noFill/>
+          </a:ln>
+        </p:spPr>
+      </p:pic>
+      <p:sp>
+        <p:nvSpPr>
+          <p:cNvPr id="14" name="Google Shape;71;p15">
+            <a:extLst>
+              <a:ext uri="{FF2B5EF4-FFF2-40B4-BE49-F238E27FC236}">
+                <a16:creationId xmlns:a16="http://schemas.microsoft.com/office/drawing/2014/main" id="{10B91DBF-B60C-622D-5430-E7C609A04BD2}"/>
+              </a:ext>
+            </a:extLst>
+          </p:cNvPr>
+          <p:cNvSpPr txBox="1"/>
+          <p:nvPr/>
+        </p:nvSpPr>
+        <p:spPr>
+          <a:xfrm>
+            <a:off x="5574429" y="4317284"/>
+            <a:ext cx="3275365" cy="1034091"/>
+          </a:xfrm>
+          <a:prstGeom prst="rect">
+            <a:avLst/>
+          </a:prstGeom>
+          <a:solidFill>
+            <a:srgbClr val="FFF2CC"/>
+          </a:solidFill>
+          <a:ln w="9525" cap="flat" cmpd="sng">
+            <a:solidFill>
+              <a:srgbClr val="FF0000"/>
+            </a:solidFill>
+            <a:prstDash val="solid"/>
+            <a:round/>
+            <a:headEnd type="none" w="sm" len="sm"/>
+            <a:tailEnd type="none" w="sm" len="sm"/>
+          </a:ln>
+        </p:spPr>
+        <p:txBody>
+          <a:bodyPr spcFirstLastPara="1" wrap="square" lIns="9125" tIns="9125" rIns="9125" bIns="9125" anchor="t" anchorCtr="0">
+            <a:spAutoFit/>
+          </a:bodyPr>
+          <a:lstStyle/>
+          <a:p>
+            <a:pPr marL="0" lvl="0" indent="0" algn="l" rtl="0">
+              <a:spcBef>
+                <a:spcPts val="0"/>
+              </a:spcBef>
+              <a:spcAft>
+                <a:spcPts val="0"/>
+              </a:spcAft>
+              <a:buNone/>
+            </a:pPr>
+            <a:r>
+              <a:rPr lang="en" sz="1200" dirty="0">
+                <a:solidFill>
+                  <a:schemeClr val="dk1"/>
+                </a:solidFill>
+                <a:latin typeface="Calibri"/>
+                <a:ea typeface="Calibri"/>
+                <a:cs typeface="Calibri"/>
+                <a:sym typeface="Calibri"/>
+              </a:rPr>
+              <a:t>Solution 2.2 - use a synthetic rope or flat tow strap instead of the metal cable. </a:t>
+            </a:r>
+            <a:endParaRPr sz="1200" dirty="0">
+              <a:solidFill>
+                <a:schemeClr val="dk1"/>
+              </a:solidFill>
+              <a:latin typeface="Calibri"/>
+              <a:ea typeface="Calibri"/>
+              <a:cs typeface="Calibri"/>
+              <a:sym typeface="Calibri"/>
+            </a:endParaRPr>
+          </a:p>
+          <a:p>
+            <a:pPr marL="0" lvl="0" indent="0" algn="l" rtl="0">
+              <a:spcBef>
+                <a:spcPts val="0"/>
+              </a:spcBef>
+              <a:spcAft>
+                <a:spcPts val="0"/>
+              </a:spcAft>
+              <a:buNone/>
+            </a:pPr>
+            <a:r>
+              <a:rPr lang="en" sz="1200" dirty="0">
+                <a:solidFill>
+                  <a:schemeClr val="dk1"/>
+                </a:solidFill>
+                <a:latin typeface="Calibri"/>
+                <a:ea typeface="Calibri"/>
+                <a:cs typeface="Calibri"/>
+                <a:sym typeface="Calibri"/>
+              </a:rPr>
+              <a:t>Use a "roller fairlead" for synthetic line, or use "hawse fairlead" for flat strap to avoid tangling</a:t>
+            </a:r>
+            <a:endParaRPr sz="900" dirty="0">
+              <a:solidFill>
+                <a:schemeClr val="dk1"/>
+              </a:solidFill>
+              <a:latin typeface="Calibri"/>
+              <a:ea typeface="Calibri"/>
+              <a:cs typeface="Calibri"/>
+              <a:sym typeface="Calibri"/>
+            </a:endParaRPr>
+          </a:p>
+          <a:p>
+            <a:pPr marL="0" lvl="0" indent="0" algn="l" rtl="0">
+              <a:spcBef>
+                <a:spcPts val="0"/>
+              </a:spcBef>
+              <a:spcAft>
+                <a:spcPts val="0"/>
+              </a:spcAft>
+              <a:buNone/>
+            </a:pPr>
+            <a:r>
+              <a:rPr lang="en" sz="900" u="sng" dirty="0">
+                <a:solidFill>
+                  <a:schemeClr val="hlink"/>
+                </a:solidFill>
+                <a:latin typeface="Calibri"/>
+                <a:ea typeface="Calibri"/>
+                <a:cs typeface="Calibri"/>
+                <a:sym typeface="Calibri"/>
+                <a:hlinkClick r:id="rId14"/>
+              </a:rPr>
+              <a:t>https://www.youtube.com/watch?v=b4dRQ-H7ffM</a:t>
+            </a:r>
+            <a:endParaRPr sz="900" dirty="0">
+              <a:solidFill>
+                <a:schemeClr val="dk1"/>
+              </a:solidFill>
+              <a:latin typeface="Calibri"/>
+              <a:ea typeface="Calibri"/>
+              <a:cs typeface="Calibri"/>
+              <a:sym typeface="Calibri"/>
+            </a:endParaRPr>
+          </a:p>
+          <a:p>
+            <a:pPr marL="0" lvl="0" indent="0" algn="l" rtl="0">
+              <a:spcBef>
+                <a:spcPts val="0"/>
+              </a:spcBef>
+              <a:spcAft>
+                <a:spcPts val="0"/>
+              </a:spcAft>
+              <a:buNone/>
+            </a:pPr>
+            <a:r>
+              <a:rPr lang="en" sz="900" u="sng" dirty="0">
+                <a:solidFill>
+                  <a:schemeClr val="hlink"/>
+                </a:solidFill>
+                <a:latin typeface="Calibri"/>
+                <a:ea typeface="Calibri"/>
+                <a:cs typeface="Calibri"/>
+                <a:sym typeface="Calibri"/>
+                <a:hlinkClick r:id="rId15"/>
+              </a:rPr>
+              <a:t>https://www.youtube.com/watch?v=oim648rsuI8</a:t>
+            </a:r>
+            <a:r>
+              <a:rPr lang="en" sz="900" dirty="0">
+                <a:solidFill>
+                  <a:schemeClr val="dk1"/>
+                </a:solidFill>
+                <a:latin typeface="Calibri"/>
+                <a:ea typeface="Calibri"/>
+                <a:cs typeface="Calibri"/>
+                <a:sym typeface="Calibri"/>
+              </a:rPr>
+              <a:t>  </a:t>
+            </a:r>
+            <a:endParaRPr sz="900" dirty="0">
+              <a:solidFill>
+                <a:schemeClr val="dk1"/>
+              </a:solidFill>
+              <a:latin typeface="Calibri"/>
+              <a:ea typeface="Calibri"/>
+              <a:cs typeface="Calibri"/>
+              <a:sym typeface="Calibri"/>
+            </a:endParaRPr>
+          </a:p>
+        </p:txBody>
+      </p:sp>
+      <p:pic>
+        <p:nvPicPr>
+          <p:cNvPr id="15" name="Google Shape;72;p15">
+            <a:extLst>
+              <a:ext uri="{FF2B5EF4-FFF2-40B4-BE49-F238E27FC236}">
+                <a16:creationId xmlns:a16="http://schemas.microsoft.com/office/drawing/2014/main" id="{AF9875A1-0A6D-7D47-2DBB-EFC791BD07EC}"/>
+              </a:ext>
+            </a:extLst>
+          </p:cNvPr>
+          <p:cNvPicPr preferRelativeResize="0"/>
+          <p:nvPr/>
+        </p:nvPicPr>
+        <p:blipFill>
+          <a:blip r:embed="rId16" cstate="email">
+            <a:alphaModFix/>
+            <a:extLst>
+              <a:ext uri="{28A0092B-C50C-407E-A947-70E740481C1C}">
+                <a14:useLocalDpi xmlns:a14="http://schemas.microsoft.com/office/drawing/2010/main"/>
+              </a:ext>
+            </a:extLst>
+          </a:blip>
+          <a:stretch>
+            <a:fillRect/>
+          </a:stretch>
+        </p:blipFill>
+        <p:spPr>
+          <a:xfrm>
+            <a:off x="5615275" y="5536820"/>
+            <a:ext cx="1363106" cy="1063686"/>
+          </a:xfrm>
+          <a:prstGeom prst="rect">
+            <a:avLst/>
+          </a:prstGeom>
+          <a:noFill/>
+          <a:ln>
+            <a:noFill/>
+          </a:ln>
+        </p:spPr>
+      </p:pic>
+      <p:pic>
+        <p:nvPicPr>
+          <p:cNvPr id="16" name="Google Shape;73;p15">
+            <a:extLst>
+              <a:ext uri="{FF2B5EF4-FFF2-40B4-BE49-F238E27FC236}">
+                <a16:creationId xmlns:a16="http://schemas.microsoft.com/office/drawing/2014/main" id="{9B1E111C-11E8-2678-DA38-CC17DBA4A225}"/>
+              </a:ext>
+            </a:extLst>
+          </p:cNvPr>
+          <p:cNvPicPr preferRelativeResize="0"/>
+          <p:nvPr/>
+        </p:nvPicPr>
+        <p:blipFill>
+          <a:blip r:embed="rId17" cstate="email">
+            <a:alphaModFix/>
+            <a:extLst>
+              <a:ext uri="{28A0092B-C50C-407E-A947-70E740481C1C}">
+                <a14:useLocalDpi xmlns:a14="http://schemas.microsoft.com/office/drawing/2010/main"/>
+              </a:ext>
+            </a:extLst>
+          </a:blip>
+          <a:stretch>
+            <a:fillRect/>
+          </a:stretch>
+        </p:blipFill>
+        <p:spPr>
+          <a:xfrm>
+            <a:off x="7028065" y="5566073"/>
+            <a:ext cx="1063686" cy="1063686"/>
+          </a:xfrm>
+          <a:prstGeom prst="rect">
+            <a:avLst/>
+          </a:prstGeom>
+          <a:noFill/>
+          <a:ln>
+            <a:noFill/>
+          </a:ln>
+        </p:spPr>
+      </p:pic>
+      <p:pic>
+        <p:nvPicPr>
+          <p:cNvPr id="17" name="Google Shape;74;p15">
+            <a:extLst>
+              <a:ext uri="{FF2B5EF4-FFF2-40B4-BE49-F238E27FC236}">
+                <a16:creationId xmlns:a16="http://schemas.microsoft.com/office/drawing/2014/main" id="{47197648-FF7F-DC4B-0506-9B3588E3CF82}"/>
+              </a:ext>
+            </a:extLst>
+          </p:cNvPr>
+          <p:cNvPicPr preferRelativeResize="0"/>
+          <p:nvPr/>
+        </p:nvPicPr>
+        <p:blipFill>
+          <a:blip r:embed="rId18" cstate="email">
+            <a:alphaModFix/>
+            <a:extLst>
+              <a:ext uri="{28A0092B-C50C-407E-A947-70E740481C1C}">
+                <a14:useLocalDpi xmlns:a14="http://schemas.microsoft.com/office/drawing/2010/main"/>
+              </a:ext>
+            </a:extLst>
+          </a:blip>
+          <a:stretch>
+            <a:fillRect/>
+          </a:stretch>
+        </p:blipFill>
+        <p:spPr>
+          <a:xfrm>
+            <a:off x="9993920" y="3819104"/>
+            <a:ext cx="2094202" cy="1717716"/>
+          </a:xfrm>
+          <a:prstGeom prst="rect">
+            <a:avLst/>
+          </a:prstGeom>
+          <a:noFill/>
+          <a:ln w="9525" cap="flat" cmpd="sng">
+            <a:solidFill>
+              <a:srgbClr val="FF0000"/>
+            </a:solidFill>
+            <a:prstDash val="solid"/>
+            <a:round/>
+            <a:headEnd type="none" w="sm" len="sm"/>
+            <a:tailEnd type="none" w="sm" len="sm"/>
+          </a:ln>
+        </p:spPr>
+      </p:pic>
+      <p:pic>
+        <p:nvPicPr>
+          <p:cNvPr id="18" name="Google Shape;75;p15">
+            <a:extLst>
+              <a:ext uri="{FF2B5EF4-FFF2-40B4-BE49-F238E27FC236}">
+                <a16:creationId xmlns:a16="http://schemas.microsoft.com/office/drawing/2014/main" id="{4AA1D398-D03E-3A5D-D271-0B375EF2AFAE}"/>
+              </a:ext>
+            </a:extLst>
+          </p:cNvPr>
+          <p:cNvPicPr preferRelativeResize="0"/>
+          <p:nvPr/>
+        </p:nvPicPr>
+        <p:blipFill>
+          <a:blip r:embed="rId19" cstate="email">
+            <a:alphaModFix/>
+            <a:extLst>
+              <a:ext uri="{28A0092B-C50C-407E-A947-70E740481C1C}">
+                <a14:useLocalDpi xmlns:a14="http://schemas.microsoft.com/office/drawing/2010/main"/>
+              </a:ext>
+            </a:extLst>
+          </a:blip>
+          <a:stretch>
+            <a:fillRect/>
+          </a:stretch>
+        </p:blipFill>
+        <p:spPr>
+          <a:xfrm>
+            <a:off x="9993920" y="2294107"/>
+            <a:ext cx="2094202" cy="1405000"/>
+          </a:xfrm>
+          <a:prstGeom prst="rect">
+            <a:avLst/>
+          </a:prstGeom>
+          <a:noFill/>
+          <a:ln w="9525" cap="flat" cmpd="sng">
+            <a:solidFill>
+              <a:srgbClr val="FF0000"/>
+            </a:solidFill>
+            <a:prstDash val="solid"/>
+            <a:round/>
+            <a:headEnd type="none" w="sm" len="sm"/>
+            <a:tailEnd type="none" w="sm" len="sm"/>
+          </a:ln>
+        </p:spPr>
+      </p:pic>
+    </p:spTree>
+    <p:extLst>
+      <p:ext uri="{BB962C8B-B14F-4D97-AF65-F5344CB8AC3E}">
+        <p14:creationId xmlns:p14="http://schemas.microsoft.com/office/powerpoint/2010/main" val="3864361690"/>
+      </p:ext>
+    </p:extLst>
+  </p:cSld>
+  <p:clrMapOvr>
+    <a:masterClrMapping/>
+  </p:clrMapOvr>
+</p:sld>
+</file>
+
+<file path=ppt/slides/slide12.xml><?xml version="1.0" encoding="utf-8"?>
 <p:sld xmlns:a="http://schemas.openxmlformats.org/drawingml/2006/main" xmlns:r="http://schemas.openxmlformats.org/officeDocument/2006/relationships" xmlns:p="http://schemas.openxmlformats.org/presentationml/2006/main">
   <p:cSld>
     <p:spTree>
